--- a/cloudflare-deploy/public/library/admin/admin-en.pptx
+++ b/cloudflare-deploy/public/library/admin/admin-en.pptx
@@ -51,6 +51,8 @@
     <p:sldId id="299" r:id="rId50"/>
     <p:sldId id="300" r:id="rId51"/>
     <p:sldId id="301" r:id="rId52"/>
+    <p:sldId id="302" r:id="rId53"/>
+    <p:sldId id="303" r:id="rId54"/>
   </p:sldIdLst>
   <p:sldSz cx="12191695" cy="6858000" type="screen4x3"/>
   <p:notesSz cx="6858000" cy="9144000"/>
@@ -28063,6 +28065,167 @@
           </a:p>
         </p:txBody>
       </p:sp>
+      <p:sp>
+        <p:nvSpPr>
+          <p:cNvPr id="89" name="Rounded Rectangle 88"/>
+          <p:cNvSpPr/>
+          <p:nvPr/>
+        </p:nvSpPr>
+        <p:spPr>
+          <a:xfrm>
+            <a:off x="6141567" y="4224528"/>
+            <a:ext cx="384048" cy="228600"/>
+          </a:xfrm>
+          <a:prstGeom prst="roundRect">
+            <a:avLst/>
+          </a:prstGeom>
+          <a:solidFill>
+            <a:srgbClr val="4F46E5"/>
+          </a:solidFill>
+          <a:ln>
+            <a:noFill/>
+          </a:ln>
+          <a:effectLst/>
+        </p:spPr>
+        <p:style>
+          <a:lnRef idx="1">
+            <a:schemeClr val="accent1"/>
+          </a:lnRef>
+          <a:fillRef idx="3">
+            <a:schemeClr val="accent1"/>
+          </a:fillRef>
+          <a:effectRef idx="2">
+            <a:schemeClr val="accent1"/>
+          </a:effectRef>
+          <a:fontRef idx="minor">
+            <a:schemeClr val="lt1"/>
+          </a:fontRef>
+        </p:style>
+        <p:txBody>
+          <a:bodyPr rtlCol="0" anchor="ctr"/>
+          <a:lstStyle/>
+          <a:p>
+            <a:pPr algn="ctr"/>
+          </a:p>
+        </p:txBody>
+      </p:sp>
+      <p:sp>
+        <p:nvSpPr>
+          <p:cNvPr id="90" name="TextBox 89"/>
+          <p:cNvSpPr txBox="1"/>
+          <p:nvPr/>
+        </p:nvSpPr>
+        <p:spPr>
+          <a:xfrm>
+            <a:off x="6141567" y="4206240"/>
+            <a:ext cx="384048" cy="265176"/>
+          </a:xfrm>
+          <a:prstGeom prst="rect">
+            <a:avLst/>
+          </a:prstGeom>
+          <a:noFill/>
+        </p:spPr>
+        <p:txBody>
+          <a:bodyPr wrap="square" anchor="ctr">
+            <a:spAutoFit/>
+          </a:bodyPr>
+          <a:lstStyle/>
+          <a:p>
+            <a:pPr algn="ctr">
+              <a:lnSpc>
+                <a:spcPct val="100000"/>
+              </a:lnSpc>
+            </a:pPr>
+            <a:r>
+              <a:rPr sz="900" b="1">
+                <a:solidFill>
+                  <a:srgbClr val="FFFFFF"/>
+                </a:solidFill>
+                <a:latin typeface="Malgun Gothic"/>
+              </a:rPr>
+              <a:t>21</a:t>
+            </a:r>
+          </a:p>
+        </p:txBody>
+      </p:sp>
+      <p:sp>
+        <p:nvSpPr>
+          <p:cNvPr id="91" name="TextBox 90"/>
+          <p:cNvSpPr txBox="1"/>
+          <p:nvPr/>
+        </p:nvSpPr>
+        <p:spPr>
+          <a:xfrm>
+            <a:off x="6617055" y="4197096"/>
+            <a:ext cx="4587087" cy="274320"/>
+          </a:xfrm>
+          <a:prstGeom prst="rect">
+            <a:avLst/>
+          </a:prstGeom>
+          <a:noFill/>
+        </p:spPr>
+        <p:txBody>
+          <a:bodyPr wrap="square" anchor="ctr">
+            <a:spAutoFit/>
+          </a:bodyPr>
+          <a:lstStyle/>
+          <a:p>
+            <a:pPr algn="l">
+              <a:lnSpc>
+                <a:spcPct val="100000"/>
+              </a:lnSpc>
+            </a:pPr>
+            <a:r>
+              <a:rPr sz="1050" b="1">
+                <a:solidFill>
+                  <a:srgbClr val="334155"/>
+                </a:solidFill>
+                <a:latin typeface="Malgun Gothic"/>
+              </a:rPr>
+              <a:t>Chinese Pronunciation Coach</a:t>
+            </a:r>
+          </a:p>
+        </p:txBody>
+      </p:sp>
+      <p:sp>
+        <p:nvSpPr>
+          <p:cNvPr id="92" name="TextBox 91"/>
+          <p:cNvSpPr txBox="1"/>
+          <p:nvPr/>
+        </p:nvSpPr>
+        <p:spPr>
+          <a:xfrm>
+            <a:off x="11213287" y="4197096"/>
+            <a:ext cx="457200" cy="274320"/>
+          </a:xfrm>
+          <a:prstGeom prst="rect">
+            <a:avLst/>
+          </a:prstGeom>
+          <a:noFill/>
+        </p:spPr>
+        <p:txBody>
+          <a:bodyPr wrap="square" anchor="ctr">
+            <a:spAutoFit/>
+          </a:bodyPr>
+          <a:lstStyle/>
+          <a:p>
+            <a:pPr algn="r">
+              <a:lnSpc>
+                <a:spcPct val="100000"/>
+              </a:lnSpc>
+            </a:pPr>
+            <a:r>
+              <a:rPr sz="1050" b="1">
+                <a:solidFill>
+                  <a:srgbClr val="4F46E5"/>
+                </a:solidFill>
+                <a:latin typeface="Malgun Gothic"/>
+              </a:rPr>
+              <a:t>25</a:t>
+            </a:r>
+          </a:p>
+        </p:txBody>
+      </p:sp>
     </p:spTree>
   </p:cSld>
   <p:clrMapOvr>
@@ -38256,7 +38419,7 @@
                 </a:solidFill>
                 <a:latin typeface="Malgun Gothic"/>
               </a:rPr>
-              <a:t>21</a:t>
+              <a:t>22</a:t>
             </a:r>
           </a:p>
         </p:txBody>
@@ -38295,7 +38458,7 @@
                 </a:solidFill>
                 <a:latin typeface="Malgun Gothic"/>
               </a:rPr>
-              <a:t>Chinese Pronunciation Coach</a:t>
+              <a:t>Notice Studio (Poster + Popup)</a:t>
             </a:r>
           </a:p>
         </p:txBody>
@@ -38334,7 +38497,7 @@
                 </a:solidFill>
                 <a:latin typeface="Malgun Gothic"/>
               </a:rPr>
-              <a:t>25</a:t>
+              <a:t>26</a:t>
             </a:r>
           </a:p>
         </p:txBody>
@@ -38417,7 +38580,7 @@
                 </a:solidFill>
                 <a:latin typeface="Malgun Gothic"/>
               </a:rPr>
-              <a:t>22</a:t>
+              <a:t>23</a:t>
             </a:r>
           </a:p>
         </p:txBody>
@@ -38456,7 +38619,7 @@
                 </a:solidFill>
                 <a:latin typeface="Malgun Gothic"/>
               </a:rPr>
-              <a:t>Notice Studio (Poster + Popup)</a:t>
+              <a:t>Command the AI Operations Assistant</a:t>
             </a:r>
           </a:p>
         </p:txBody>
@@ -38495,7 +38658,7 @@
                 </a:solidFill>
                 <a:latin typeface="Malgun Gothic"/>
               </a:rPr>
-              <a:t>26</a:t>
+              <a:t>27</a:t>
             </a:r>
           </a:p>
         </p:txBody>
@@ -38578,7 +38741,7 @@
                 </a:solidFill>
                 <a:latin typeface="Malgun Gothic"/>
               </a:rPr>
-              <a:t>23</a:t>
+              <a:t>24</a:t>
             </a:r>
           </a:p>
         </p:txBody>
@@ -38617,7 +38780,7 @@
                 </a:solidFill>
                 <a:latin typeface="Malgun Gothic"/>
               </a:rPr>
-              <a:t>Command the AI Operations Assistant</a:t>
+              <a:t>Student Voice-Diary Monitor</a:t>
             </a:r>
           </a:p>
         </p:txBody>
@@ -38656,7 +38819,7 @@
                 </a:solidFill>
                 <a:latin typeface="Malgun Gothic"/>
               </a:rPr>
-              <a:t>27</a:t>
+              <a:t>28</a:t>
             </a:r>
           </a:p>
         </p:txBody>
@@ -38739,7 +38902,7 @@
                 </a:solidFill>
                 <a:latin typeface="Malgun Gothic"/>
               </a:rPr>
-              <a:t>24</a:t>
+              <a:t>25</a:t>
             </a:r>
           </a:p>
         </p:txBody>
@@ -38778,7 +38941,7 @@
                 </a:solidFill>
                 <a:latin typeface="Malgun Gothic"/>
               </a:rPr>
-              <a:t>Student Voice-Diary Monitor</a:t>
+              <a:t>Teacher AI-Coaching Review (Ops)</a:t>
             </a:r>
           </a:p>
         </p:txBody>
@@ -38817,7 +38980,7 @@
                 </a:solidFill>
                 <a:latin typeface="Malgun Gothic"/>
               </a:rPr>
-              <a:t>28</a:t>
+              <a:t>29</a:t>
             </a:r>
           </a:p>
         </p:txBody>
@@ -38900,7 +39063,7 @@
                 </a:solidFill>
                 <a:latin typeface="Malgun Gothic"/>
               </a:rPr>
-              <a:t>25</a:t>
+              <a:t>26</a:t>
             </a:r>
           </a:p>
         </p:txBody>
@@ -38939,7 +39102,7 @@
                 </a:solidFill>
                 <a:latin typeface="Malgun Gothic"/>
               </a:rPr>
-              <a:t>Teacher AI-Coaching Review (Ops)</a:t>
+              <a:t>QR Attendance Check-in</a:t>
             </a:r>
           </a:p>
         </p:txBody>
@@ -38978,7 +39141,7 @@
                 </a:solidFill>
                 <a:latin typeface="Malgun Gothic"/>
               </a:rPr>
-              <a:t>29</a:t>
+              <a:t>30</a:t>
             </a:r>
           </a:p>
         </p:txBody>
@@ -39061,7 +39224,7 @@
                 </a:solidFill>
                 <a:latin typeface="Malgun Gothic"/>
               </a:rPr>
-              <a:t>26</a:t>
+              <a:t>27</a:t>
             </a:r>
           </a:p>
         </p:txBody>
@@ -39100,7 +39263,7 @@
                 </a:solidFill>
                 <a:latin typeface="Malgun Gothic"/>
               </a:rPr>
-              <a:t>QR Attendance Check-in</a:t>
+              <a:t>Consultation Booking Management</a:t>
             </a:r>
           </a:p>
         </p:txBody>
@@ -39139,7 +39302,7 @@
                 </a:solidFill>
                 <a:latin typeface="Malgun Gothic"/>
               </a:rPr>
-              <a:t>30</a:t>
+              <a:t>31</a:t>
             </a:r>
           </a:p>
         </p:txBody>
@@ -39222,7 +39385,7 @@
                 </a:solidFill>
                 <a:latin typeface="Malgun Gothic"/>
               </a:rPr>
-              <a:t>27</a:t>
+              <a:t>28</a:t>
             </a:r>
           </a:p>
         </p:txBody>
@@ -39261,7 +39424,7 @@
                 </a:solidFill>
                 <a:latin typeface="Malgun Gothic"/>
               </a:rPr>
-              <a:t>Consultation Booking Management</a:t>
+              <a:t>Friend-Referral Rewards</a:t>
             </a:r>
           </a:p>
         </p:txBody>
@@ -39300,7 +39463,7 @@
                 </a:solidFill>
                 <a:latin typeface="Malgun Gothic"/>
               </a:rPr>
-              <a:t>31</a:t>
+              <a:t>32</a:t>
             </a:r>
           </a:p>
         </p:txBody>
@@ -39383,7 +39546,7 @@
                 </a:solidFill>
                 <a:latin typeface="Malgun Gothic"/>
               </a:rPr>
-              <a:t>28</a:t>
+              <a:t>29</a:t>
             </a:r>
           </a:p>
         </p:txBody>
@@ -39422,7 +39585,7 @@
                 </a:solidFill>
                 <a:latin typeface="Malgun Gothic"/>
               </a:rPr>
-              <a:t>Friend-Referral Rewards</a:t>
+              <a:t>Approving Postpone/Change Requests</a:t>
             </a:r>
           </a:p>
         </p:txBody>
@@ -39461,7 +39624,7 @@
                 </a:solidFill>
                 <a:latin typeface="Malgun Gothic"/>
               </a:rPr>
-              <a:t>32</a:t>
+              <a:t>33</a:t>
             </a:r>
           </a:p>
         </p:txBody>
@@ -39544,7 +39707,7 @@
                 </a:solidFill>
                 <a:latin typeface="Malgun Gothic"/>
               </a:rPr>
-              <a:t>29</a:t>
+              <a:t>30</a:t>
             </a:r>
           </a:p>
         </p:txBody>
@@ -39583,7 +39746,7 @@
                 </a:solidFill>
                 <a:latin typeface="Malgun Gothic"/>
               </a:rPr>
-              <a:t>Approving Postpone/Change Requests</a:t>
+              <a:t>Share Library Links via KakaoTalk</a:t>
             </a:r>
           </a:p>
         </p:txBody>
@@ -39622,7 +39785,7 @@
                 </a:solidFill>
                 <a:latin typeface="Malgun Gothic"/>
               </a:rPr>
-              <a:t>33</a:t>
+              <a:t>34</a:t>
             </a:r>
           </a:p>
         </p:txBody>
@@ -39705,7 +39868,7 @@
                 </a:solidFill>
                 <a:latin typeface="Malgun Gothic"/>
               </a:rPr>
-              <a:t>30</a:t>
+              <a:t>31</a:t>
             </a:r>
           </a:p>
         </p:txBody>
@@ -39744,7 +39907,7 @@
                 </a:solidFill>
                 <a:latin typeface="Malgun Gothic"/>
               </a:rPr>
-              <a:t>Share Library Links via KakaoTalk</a:t>
+              <a:t>Enrolment &amp; payment → automatic lesson creation</a:t>
             </a:r>
           </a:p>
         </p:txBody>
@@ -39783,7 +39946,7 @@
                 </a:solidFill>
                 <a:latin typeface="Malgun Gothic"/>
               </a:rPr>
-              <a:t>34</a:t>
+              <a:t>35</a:t>
             </a:r>
           </a:p>
         </p:txBody>
@@ -39866,7 +40029,7 @@
                 </a:solidFill>
                 <a:latin typeface="Malgun Gothic"/>
               </a:rPr>
-              <a:t>31</a:t>
+              <a:t>32</a:t>
             </a:r>
           </a:p>
         </p:txBody>
@@ -39905,7 +40068,7 @@
                 </a:solidFill>
                 <a:latin typeface="Malgun Gothic"/>
               </a:rPr>
-              <a:t>Enrolment &amp; payment → automatic lesson creation</a:t>
+              <a:t>Class Observation (live)</a:t>
             </a:r>
           </a:p>
         </p:txBody>
@@ -39944,7 +40107,7 @@
                 </a:solidFill>
                 <a:latin typeface="Malgun Gothic"/>
               </a:rPr>
-              <a:t>35</a:t>
+              <a:t>36</a:t>
             </a:r>
           </a:p>
         </p:txBody>
@@ -40027,7 +40190,7 @@
                 </a:solidFill>
                 <a:latin typeface="Malgun Gothic"/>
               </a:rPr>
-              <a:t>32</a:t>
+              <a:t>33</a:t>
             </a:r>
           </a:p>
         </p:txBody>
@@ -40066,7 +40229,7 @@
                 </a:solidFill>
                 <a:latin typeface="Malgun Gothic"/>
               </a:rPr>
-              <a:t>Class Observation (live)</a:t>
+              <a:t>A refreshed admin screen</a:t>
             </a:r>
           </a:p>
         </p:txBody>
@@ -40105,7 +40268,7 @@
                 </a:solidFill>
                 <a:latin typeface="Malgun Gothic"/>
               </a:rPr>
-              <a:t>36</a:t>
+              <a:t>37</a:t>
             </a:r>
           </a:p>
         </p:txBody>
@@ -40188,7 +40351,7 @@
                 </a:solidFill>
                 <a:latin typeface="Malgun Gothic"/>
               </a:rPr>
-              <a:t>33</a:t>
+              <a:t>34</a:t>
             </a:r>
           </a:p>
         </p:txBody>
@@ -40227,7 +40390,7 @@
                 </a:solidFill>
                 <a:latin typeface="Malgun Gothic"/>
               </a:rPr>
-              <a:t>A refreshed admin screen</a:t>
+              <a:t>The interface language sets itself</a:t>
             </a:r>
           </a:p>
         </p:txBody>
@@ -40266,7 +40429,7 @@
                 </a:solidFill>
                 <a:latin typeface="Malgun Gothic"/>
               </a:rPr>
-              <a:t>37</a:t>
+              <a:t>38</a:t>
             </a:r>
           </a:p>
         </p:txBody>
@@ -40349,7 +40512,7 @@
                 </a:solidFill>
                 <a:latin typeface="Malgun Gothic"/>
               </a:rPr>
-              <a:t>34</a:t>
+              <a:t>35</a:t>
             </a:r>
           </a:p>
         </p:txBody>
@@ -40388,7 +40551,7 @@
                 </a:solidFill>
                 <a:latin typeface="Malgun Gothic"/>
               </a:rPr>
-              <a:t>The interface language sets itself</a:t>
+              <a:t>Running Judgment Training (student judgment index)</a:t>
             </a:r>
           </a:p>
         </p:txBody>
@@ -40427,7 +40590,7 @@
                 </a:solidFill>
                 <a:latin typeface="Malgun Gothic"/>
               </a:rPr>
-              <a:t>38</a:t>
+              <a:t>39</a:t>
             </a:r>
           </a:p>
         </p:txBody>
@@ -40510,7 +40673,7 @@
                 </a:solidFill>
                 <a:latin typeface="Malgun Gothic"/>
               </a:rPr>
-              <a:t>35</a:t>
+              <a:t>36</a:t>
             </a:r>
           </a:p>
         </p:txBody>
@@ -40549,7 +40712,7 @@
                 </a:solidFill>
                 <a:latin typeface="Malgun Gothic"/>
               </a:rPr>
-              <a:t>Running Judgment Training (student judgment index)</a:t>
+              <a:t>Teacher accounts (password reset · access limits)</a:t>
             </a:r>
           </a:p>
         </p:txBody>
@@ -40588,7 +40751,7 @@
                 </a:solidFill>
                 <a:latin typeface="Malgun Gothic"/>
               </a:rPr>
-              <a:t>39</a:t>
+              <a:t>40</a:t>
             </a:r>
           </a:p>
         </p:txBody>
@@ -40671,7 +40834,7 @@
                 </a:solidFill>
                 <a:latin typeface="Malgun Gothic"/>
               </a:rPr>
-              <a:t>36</a:t>
+              <a:t>37</a:t>
             </a:r>
           </a:p>
         </p:txBody>
@@ -40710,7 +40873,7 @@
                 </a:solidFill>
                 <a:latin typeface="Malgun Gothic"/>
               </a:rPr>
-              <a:t>Teacher accounts (password reset · access limits)</a:t>
+              <a:t>Teacher Management, redesigned (roster filters · groups · detail tabs)</a:t>
             </a:r>
           </a:p>
         </p:txBody>
@@ -40749,7 +40912,7 @@
                 </a:solidFill>
                 <a:latin typeface="Malgun Gothic"/>
               </a:rPr>
-              <a:t>40</a:t>
+              <a:t>41</a:t>
             </a:r>
           </a:p>
         </p:txBody>
@@ -40832,7 +40995,7 @@
                 </a:solidFill>
                 <a:latin typeface="Malgun Gothic"/>
               </a:rPr>
-              <a:t>37</a:t>
+              <a:t>38</a:t>
             </a:r>
           </a:p>
         </p:txBody>
@@ -40871,7 +41034,7 @@
                 </a:solidFill>
                 <a:latin typeface="Malgun Gothic"/>
               </a:rPr>
-              <a:t>Feature Summary · Data</a:t>
+              <a:t>Sending the Parent Monthly Report (pentagon)</a:t>
             </a:r>
           </a:p>
         </p:txBody>
@@ -40910,7 +41073,7 @@
                 </a:solidFill>
                 <a:latin typeface="Malgun Gothic"/>
               </a:rPr>
-              <a:t>41</a:t>
+              <a:t>42</a:t>
             </a:r>
           </a:p>
         </p:txBody>
@@ -40993,7 +41156,7 @@
                 </a:solidFill>
                 <a:latin typeface="Malgun Gothic"/>
               </a:rPr>
-              <a:t>38</a:t>
+              <a:t>39</a:t>
             </a:r>
           </a:p>
         </p:txBody>
@@ -41032,7 +41195,7 @@
                 </a:solidFill>
                 <a:latin typeface="Malgun Gothic"/>
               </a:rPr>
-              <a:t>Data at a Glance</a:t>
+              <a:t>Feature Summary · Data</a:t>
             </a:r>
           </a:p>
         </p:txBody>
@@ -41071,7 +41234,7 @@
                 </a:solidFill>
                 <a:latin typeface="Malgun Gothic"/>
               </a:rPr>
-              <a:t>42</a:t>
+              <a:t>43</a:t>
             </a:r>
           </a:p>
         </p:txBody>
@@ -41154,7 +41317,7 @@
                 </a:solidFill>
                 <a:latin typeface="Malgun Gothic"/>
               </a:rPr>
-              <a:t>39</a:t>
+              <a:t>40</a:t>
             </a:r>
           </a:p>
         </p:txBody>
@@ -41193,7 +41356,7 @@
                 </a:solidFill>
                 <a:latin typeface="Malgun Gothic"/>
               </a:rPr>
-              <a:t>Frequently Asked Questions (FAQ)</a:t>
+              <a:t>Data at a Glance</a:t>
             </a:r>
           </a:p>
         </p:txBody>
@@ -41232,7 +41395,7 @@
                 </a:solidFill>
                 <a:latin typeface="Malgun Gothic"/>
               </a:rPr>
-              <a:t>43</a:t>
+              <a:t>44</a:t>
             </a:r>
           </a:p>
         </p:txBody>
@@ -41315,7 +41478,7 @@
                 </a:solidFill>
                 <a:latin typeface="Malgun Gothic"/>
               </a:rPr>
-              <a:t>40</a:t>
+              <a:t>41</a:t>
             </a:r>
           </a:p>
         </p:txBody>
@@ -41354,7 +41517,7 @@
                 </a:solidFill>
                 <a:latin typeface="Malgun Gothic"/>
               </a:rPr>
-              <a:t>Checklist</a:t>
+              <a:t>Frequently Asked Questions (FAQ)</a:t>
             </a:r>
           </a:p>
         </p:txBody>
@@ -41393,7 +41556,7 @@
                 </a:solidFill>
                 <a:latin typeface="Malgun Gothic"/>
               </a:rPr>
-              <a:t>44</a:t>
+              <a:t>45</a:t>
             </a:r>
           </a:p>
         </p:txBody>
@@ -41476,7 +41639,7 @@
                 </a:solidFill>
                 <a:latin typeface="Malgun Gothic"/>
               </a:rPr>
-              <a:t>41</a:t>
+              <a:t>42</a:t>
             </a:r>
           </a:p>
         </p:txBody>
@@ -41515,7 +41678,7 @@
                 </a:solidFill>
                 <a:latin typeface="Malgun Gothic"/>
               </a:rPr>
-              <a:t>Conclusion</a:t>
+              <a:t>Checklist</a:t>
             </a:r>
           </a:p>
         </p:txBody>
@@ -41554,7 +41717,168 @@
                 </a:solidFill>
                 <a:latin typeface="Malgun Gothic"/>
               </a:rPr>
-              <a:t>45</a:t>
+              <a:t>46</a:t>
+            </a:r>
+          </a:p>
+        </p:txBody>
+      </p:sp>
+      <p:sp>
+        <p:nvSpPr>
+          <p:cNvPr id="91" name="Rounded Rectangle 90"/>
+          <p:cNvSpPr/>
+          <p:nvPr/>
+        </p:nvSpPr>
+        <p:spPr>
+          <a:xfrm>
+            <a:off x="6141567" y="4224528"/>
+            <a:ext cx="384048" cy="228600"/>
+          </a:xfrm>
+          <a:prstGeom prst="roundRect">
+            <a:avLst/>
+          </a:prstGeom>
+          <a:solidFill>
+            <a:srgbClr val="4F46E5"/>
+          </a:solidFill>
+          <a:ln>
+            <a:noFill/>
+          </a:ln>
+          <a:effectLst/>
+        </p:spPr>
+        <p:style>
+          <a:lnRef idx="1">
+            <a:schemeClr val="accent1"/>
+          </a:lnRef>
+          <a:fillRef idx="3">
+            <a:schemeClr val="accent1"/>
+          </a:fillRef>
+          <a:effectRef idx="2">
+            <a:schemeClr val="accent1"/>
+          </a:effectRef>
+          <a:fontRef idx="minor">
+            <a:schemeClr val="lt1"/>
+          </a:fontRef>
+        </p:style>
+        <p:txBody>
+          <a:bodyPr rtlCol="0" anchor="ctr"/>
+          <a:lstStyle/>
+          <a:p>
+            <a:pPr algn="ctr"/>
+          </a:p>
+        </p:txBody>
+      </p:sp>
+      <p:sp>
+        <p:nvSpPr>
+          <p:cNvPr id="92" name="TextBox 91"/>
+          <p:cNvSpPr txBox="1"/>
+          <p:nvPr/>
+        </p:nvSpPr>
+        <p:spPr>
+          <a:xfrm>
+            <a:off x="6141567" y="4206240"/>
+            <a:ext cx="384048" cy="265176"/>
+          </a:xfrm>
+          <a:prstGeom prst="rect">
+            <a:avLst/>
+          </a:prstGeom>
+          <a:noFill/>
+        </p:spPr>
+        <p:txBody>
+          <a:bodyPr wrap="square" anchor="ctr">
+            <a:spAutoFit/>
+          </a:bodyPr>
+          <a:lstStyle/>
+          <a:p>
+            <a:pPr algn="ctr">
+              <a:lnSpc>
+                <a:spcPct val="100000"/>
+              </a:lnSpc>
+            </a:pPr>
+            <a:r>
+              <a:rPr sz="900" b="1">
+                <a:solidFill>
+                  <a:srgbClr val="FFFFFF"/>
+                </a:solidFill>
+                <a:latin typeface="Malgun Gothic"/>
+              </a:rPr>
+              <a:t>43</a:t>
+            </a:r>
+          </a:p>
+        </p:txBody>
+      </p:sp>
+      <p:sp>
+        <p:nvSpPr>
+          <p:cNvPr id="93" name="TextBox 92"/>
+          <p:cNvSpPr txBox="1"/>
+          <p:nvPr/>
+        </p:nvSpPr>
+        <p:spPr>
+          <a:xfrm>
+            <a:off x="6617055" y="4197096"/>
+            <a:ext cx="4587087" cy="274320"/>
+          </a:xfrm>
+          <a:prstGeom prst="rect">
+            <a:avLst/>
+          </a:prstGeom>
+          <a:noFill/>
+        </p:spPr>
+        <p:txBody>
+          <a:bodyPr wrap="square" anchor="ctr">
+            <a:spAutoFit/>
+          </a:bodyPr>
+          <a:lstStyle/>
+          <a:p>
+            <a:pPr algn="l">
+              <a:lnSpc>
+                <a:spcPct val="100000"/>
+              </a:lnSpc>
+            </a:pPr>
+            <a:r>
+              <a:rPr sz="1050" b="1">
+                <a:solidFill>
+                  <a:srgbClr val="334155"/>
+                </a:solidFill>
+                <a:latin typeface="Malgun Gothic"/>
+              </a:rPr>
+              <a:t>Conclusion</a:t>
+            </a:r>
+          </a:p>
+        </p:txBody>
+      </p:sp>
+      <p:sp>
+        <p:nvSpPr>
+          <p:cNvPr id="94" name="TextBox 93"/>
+          <p:cNvSpPr txBox="1"/>
+          <p:nvPr/>
+        </p:nvSpPr>
+        <p:spPr>
+          <a:xfrm>
+            <a:off x="11213287" y="4197096"/>
+            <a:ext cx="457200" cy="274320"/>
+          </a:xfrm>
+          <a:prstGeom prst="rect">
+            <a:avLst/>
+          </a:prstGeom>
+          <a:noFill/>
+        </p:spPr>
+        <p:txBody>
+          <a:bodyPr wrap="square" anchor="ctr">
+            <a:spAutoFit/>
+          </a:bodyPr>
+          <a:lstStyle/>
+          <a:p>
+            <a:pPr algn="r">
+              <a:lnSpc>
+                <a:spcPct val="100000"/>
+              </a:lnSpc>
+            </a:pPr>
+            <a:r>
+              <a:rPr sz="1050" b="1">
+                <a:solidFill>
+                  <a:srgbClr val="4F46E5"/>
+                </a:solidFill>
+                <a:latin typeface="Malgun Gothic"/>
+              </a:rPr>
+              <a:t>47</a:t>
             </a:r>
           </a:p>
         </p:txBody>
@@ -42788,7 +43112,7 @@
                 </a:solidFill>
                 <a:latin typeface="Malgun Gothic"/>
               </a:rPr>
-              <a:t>Feature Summary · Data</a:t>
+              <a:t>How to Use the Main Features</a:t>
             </a:r>
           </a:p>
         </p:txBody>
@@ -42801,8 +43125,8 @@
         </p:nvSpPr>
         <p:spPr>
           <a:xfrm>
-            <a:off x="365760" y="841248"/>
-            <a:ext cx="658368" cy="512064"/>
+            <a:off x="365760" y="822960"/>
+            <a:ext cx="868680" cy="868680"/>
           </a:xfrm>
           <a:prstGeom prst="roundRect">
             <a:avLst/>
@@ -42845,9 +43169,2149 @@
         </p:nvSpPr>
         <p:spPr>
           <a:xfrm>
+            <a:off x="365760" y="822960"/>
+            <a:ext cx="868680" cy="868680"/>
+          </a:xfrm>
+          <a:prstGeom prst="rect">
+            <a:avLst/>
+          </a:prstGeom>
+          <a:noFill/>
+        </p:spPr>
+        <p:txBody>
+          <a:bodyPr wrap="square" anchor="ctr">
+            <a:spAutoFit/>
+          </a:bodyPr>
+          <a:lstStyle/>
+          <a:p>
+            <a:pPr algn="ctr">
+              <a:lnSpc>
+                <a:spcPct val="100000"/>
+              </a:lnSpc>
+            </a:pPr>
+            <a:r>
+              <a:rPr sz="2600" b="1">
+                <a:solidFill>
+                  <a:srgbClr val="FFFFFF"/>
+                </a:solidFill>
+                <a:latin typeface="Malgun Gothic"/>
+              </a:rPr>
+              <a:t>37</a:t>
+            </a:r>
+          </a:p>
+        </p:txBody>
+      </p:sp>
+      <p:sp>
+        <p:nvSpPr>
+          <p:cNvPr id="8" name="TextBox 7"/>
+          <p:cNvSpPr txBox="1"/>
+          <p:nvPr/>
+        </p:nvSpPr>
+        <p:spPr>
+          <a:xfrm>
+            <a:off x="1371600" y="822960"/>
+            <a:ext cx="10424160" cy="502920"/>
+          </a:xfrm>
+          <a:prstGeom prst="rect">
+            <a:avLst/>
+          </a:prstGeom>
+          <a:noFill/>
+        </p:spPr>
+        <p:txBody>
+          <a:bodyPr wrap="square" anchor="t">
+            <a:spAutoFit/>
+          </a:bodyPr>
+          <a:lstStyle/>
+          <a:p>
+            <a:pPr algn="l">
+              <a:lnSpc>
+                <a:spcPct val="100000"/>
+              </a:lnSpc>
+            </a:pPr>
+            <a:r>
+              <a:rPr sz="2300" b="1">
+                <a:solidFill>
+                  <a:srgbClr val="1E2340"/>
+                </a:solidFill>
+                <a:latin typeface="Malgun Gothic"/>
+              </a:rPr>
+              <a:t>🗂️ Teacher Management, redesigned (roster filters · groups · detail tabs)</a:t>
+            </a:r>
+          </a:p>
+        </p:txBody>
+      </p:sp>
+      <p:sp>
+        <p:nvSpPr>
+          <p:cNvPr id="9" name="TextBox 8"/>
+          <p:cNvSpPr txBox="1"/>
+          <p:nvPr/>
+        </p:nvSpPr>
+        <p:spPr>
+          <a:xfrm>
+            <a:off x="1417320" y="1353312"/>
+            <a:ext cx="10424160" cy="320040"/>
+          </a:xfrm>
+          <a:prstGeom prst="rect">
+            <a:avLst/>
+          </a:prstGeom>
+          <a:noFill/>
+        </p:spPr>
+        <p:txBody>
+          <a:bodyPr wrap="square" anchor="t">
+            <a:spAutoFit/>
+          </a:bodyPr>
+          <a:lstStyle/>
+          <a:p>
+            <a:pPr algn="l">
+              <a:lnSpc>
+                <a:spcPct val="100000"/>
+              </a:lnSpc>
+            </a:pPr>
+            <a:r>
+              <a:rPr sz="1300" b="0">
+                <a:solidFill>
+                  <a:srgbClr val="64748B"/>
+                </a:solidFill>
+                <a:latin typeface="Malgun Gothic"/>
+              </a:rPr>
+              <a:t>Easy-to-search roster · detail at a glance</a:t>
+            </a:r>
+          </a:p>
+        </p:txBody>
+      </p:sp>
+      <p:sp>
+        <p:nvSpPr>
+          <p:cNvPr id="10" name="Rounded Rectangle 9"/>
+          <p:cNvSpPr/>
+          <p:nvPr/>
+        </p:nvSpPr>
+        <p:spPr>
+          <a:xfrm>
+            <a:off x="365760" y="1828800"/>
+            <a:ext cx="11430000" cy="777240"/>
+          </a:xfrm>
+          <a:prstGeom prst="roundRect">
+            <a:avLst/>
+          </a:prstGeom>
+          <a:solidFill>
+            <a:srgbClr val="EEF2FF"/>
+          </a:solidFill>
+          <a:ln>
+            <a:noFill/>
+          </a:ln>
+          <a:effectLst/>
+        </p:spPr>
+        <p:style>
+          <a:lnRef idx="1">
+            <a:schemeClr val="accent1"/>
+          </a:lnRef>
+          <a:fillRef idx="3">
+            <a:schemeClr val="accent1"/>
+          </a:fillRef>
+          <a:effectRef idx="2">
+            <a:schemeClr val="accent1"/>
+          </a:effectRef>
+          <a:fontRef idx="minor">
+            <a:schemeClr val="lt1"/>
+          </a:fontRef>
+        </p:style>
+        <p:txBody>
+          <a:bodyPr rtlCol="0" anchor="ctr"/>
+          <a:lstStyle/>
+          <a:p>
+            <a:pPr algn="ctr"/>
+          </a:p>
+        </p:txBody>
+      </p:sp>
+      <p:sp>
+        <p:nvSpPr>
+          <p:cNvPr id="11" name="TextBox 10"/>
+          <p:cNvSpPr txBox="1"/>
+          <p:nvPr/>
+        </p:nvSpPr>
+        <p:spPr>
+          <a:xfrm>
+            <a:off x="548640" y="1901952"/>
+            <a:ext cx="11064240" cy="640080"/>
+          </a:xfrm>
+          <a:prstGeom prst="rect">
+            <a:avLst/>
+          </a:prstGeom>
+          <a:noFill/>
+        </p:spPr>
+        <p:txBody>
+          <a:bodyPr wrap="square" anchor="t">
+            <a:spAutoFit/>
+          </a:bodyPr>
+          <a:lstStyle/>
+          <a:p>
+            <a:pPr algn="l">
+              <a:lnSpc>
+                <a:spcPct val="115000"/>
+              </a:lnSpc>
+            </a:pPr>
+            <a:r>
+              <a:rPr sz="1200" b="0">
+                <a:solidFill>
+                  <a:srgbClr val="334155"/>
+                </a:solidFill>
+                <a:latin typeface="Malgun Gothic"/>
+              </a:rPr>
+              <a:t>The teacher-management screen is now easier to search and read. Scattered menus are grouped into four bundles in the sidebar, and above the roster there are status/group dropdown filters with applied-filter chips. Tapping a teacher opens a detail view split into Profile / Payroll / Evaluation tabs, with a manager badge and employment status (active / on-leave / left) shown at a glance.</a:t>
+            </a:r>
+          </a:p>
+        </p:txBody>
+      </p:sp>
+      <p:sp>
+        <p:nvSpPr>
+          <p:cNvPr id="12" name="TextBox 11"/>
+          <p:cNvSpPr txBox="1"/>
+          <p:nvPr/>
+        </p:nvSpPr>
+        <p:spPr>
+          <a:xfrm>
+            <a:off x="457200" y="2743200"/>
+            <a:ext cx="5669280" cy="320040"/>
+          </a:xfrm>
+          <a:prstGeom prst="rect">
+            <a:avLst/>
+          </a:prstGeom>
+          <a:noFill/>
+        </p:spPr>
+        <p:txBody>
+          <a:bodyPr wrap="square" anchor="t">
+            <a:spAutoFit/>
+          </a:bodyPr>
+          <a:lstStyle/>
+          <a:p>
+            <a:pPr algn="l">
+              <a:lnSpc>
+                <a:spcPct val="100000"/>
+              </a:lnSpc>
+            </a:pPr>
+            <a:r>
+              <a:rPr sz="1350" b="1">
+                <a:solidFill>
+                  <a:srgbClr val="4F46E5"/>
+                </a:solidFill>
+                <a:latin typeface="Malgun Gothic"/>
+              </a:rPr>
+              <a:t>How to use</a:t>
+            </a:r>
+          </a:p>
+        </p:txBody>
+      </p:sp>
+      <p:sp>
+        <p:nvSpPr>
+          <p:cNvPr id="13" name="TextBox 12"/>
+          <p:cNvSpPr txBox="1"/>
+          <p:nvPr/>
+        </p:nvSpPr>
+        <p:spPr>
+          <a:xfrm>
+            <a:off x="457200" y="3108960"/>
+            <a:ext cx="5669280" cy="2377440"/>
+          </a:xfrm>
+          <a:prstGeom prst="rect">
+            <a:avLst/>
+          </a:prstGeom>
+          <a:noFill/>
+        </p:spPr>
+        <p:txBody>
+          <a:bodyPr wrap="square">
+            <a:spAutoFit/>
+          </a:bodyPr>
+          <a:lstStyle/>
+          <a:p>
+            <a:pPr>
+              <a:lnSpc>
+                <a:spcPct val="115000"/>
+              </a:lnSpc>
+              <a:spcAft>
+                <a:spcPts val="600"/>
+              </a:spcAft>
+            </a:pPr>
+            <a:r>
+              <a:rPr sz="1050" b="1">
+                <a:solidFill>
+                  <a:srgbClr val="4F46E5"/>
+                </a:solidFill>
+                <a:latin typeface="Malgun Gothic"/>
+              </a:rPr>
+              <a:t>● </a:t>
+            </a:r>
+            <a:r>
+              <a:rPr sz="1250">
+                <a:solidFill>
+                  <a:srgbClr val="334155"/>
+                </a:solidFill>
+                <a:latin typeface="Malgun Gothic"/>
+              </a:rPr>
+              <a:t>Open Teachers in the admin menu (menus are tidied into four bundles).</a:t>
+            </a:r>
+          </a:p>
+          <a:p>
+            <a:pPr>
+              <a:lnSpc>
+                <a:spcPct val="115000"/>
+              </a:lnSpc>
+              <a:spcAft>
+                <a:spcPts val="600"/>
+              </a:spcAft>
+            </a:pPr>
+            <a:r>
+              <a:rPr sz="1050" b="1">
+                <a:solidFill>
+                  <a:srgbClr val="4F46E5"/>
+                </a:solidFill>
+                <a:latin typeface="Malgun Gothic"/>
+              </a:rPr>
+              <a:t>● </a:t>
+            </a:r>
+            <a:r>
+              <a:rPr sz="1250">
+                <a:solidFill>
+                  <a:srgbClr val="334155"/>
+                </a:solidFill>
+                <a:latin typeface="Malgun Gothic"/>
+              </a:rPr>
+              <a:t>Filter to just the teachers you want with the status/group dropdowns above the roster.</a:t>
+            </a:r>
+          </a:p>
+          <a:p>
+            <a:pPr>
+              <a:lnSpc>
+                <a:spcPct val="115000"/>
+              </a:lnSpc>
+              <a:spcAft>
+                <a:spcPts val="600"/>
+              </a:spcAft>
+            </a:pPr>
+            <a:r>
+              <a:rPr sz="1050" b="1">
+                <a:solidFill>
+                  <a:srgbClr val="4F46E5"/>
+                </a:solidFill>
+                <a:latin typeface="Malgun Gothic"/>
+              </a:rPr>
+              <a:t>● </a:t>
+            </a:r>
+            <a:r>
+              <a:rPr sz="1250">
+                <a:solidFill>
+                  <a:srgbClr val="334155"/>
+                </a:solidFill>
+                <a:latin typeface="Malgun Gothic"/>
+              </a:rPr>
+              <a:t>Applied filters show as chips; remove a chip to clear it.</a:t>
+            </a:r>
+          </a:p>
+          <a:p>
+            <a:pPr>
+              <a:lnSpc>
+                <a:spcPct val="115000"/>
+              </a:lnSpc>
+              <a:spcAft>
+                <a:spcPts val="600"/>
+              </a:spcAft>
+            </a:pPr>
+            <a:r>
+              <a:rPr sz="1050" b="1">
+                <a:solidFill>
+                  <a:srgbClr val="4F46E5"/>
+                </a:solidFill>
+                <a:latin typeface="Malgun Gothic"/>
+              </a:rPr>
+              <a:t>● </a:t>
+            </a:r>
+            <a:r>
+              <a:rPr sz="1250">
+                <a:solidFill>
+                  <a:srgbClr val="334155"/>
+                </a:solidFill>
+                <a:latin typeface="Malgun Gothic"/>
+              </a:rPr>
+              <a:t>Tap a teacher to open the Profile / Payroll / Evaluation detail tabs.</a:t>
+            </a:r>
+          </a:p>
+          <a:p>
+            <a:pPr>
+              <a:lnSpc>
+                <a:spcPct val="115000"/>
+              </a:lnSpc>
+              <a:spcAft>
+                <a:spcPts val="600"/>
+              </a:spcAft>
+            </a:pPr>
+            <a:r>
+              <a:rPr sz="1050" b="1">
+                <a:solidFill>
+                  <a:srgbClr val="4F46E5"/>
+                </a:solidFill>
+                <a:latin typeface="Malgun Gothic"/>
+              </a:rPr>
+              <a:t>● </a:t>
+            </a:r>
+            <a:r>
+              <a:rPr sz="1250">
+                <a:solidFill>
+                  <a:srgbClr val="334155"/>
+                </a:solidFill>
+                <a:latin typeface="Malgun Gothic"/>
+              </a:rPr>
+              <a:t>The summary numbers on the payroll/evaluation tabs load only as needed when opened.</a:t>
+            </a:r>
+          </a:p>
+        </p:txBody>
+      </p:sp>
+      <p:sp>
+        <p:nvSpPr>
+          <p:cNvPr id="14" name="Rounded Rectangle 13"/>
+          <p:cNvSpPr/>
+          <p:nvPr/>
+        </p:nvSpPr>
+        <p:spPr>
+          <a:xfrm>
+            <a:off x="457200" y="5166360"/>
+            <a:ext cx="5669280" cy="1627632"/>
+          </a:xfrm>
+          <a:prstGeom prst="roundRect">
+            <a:avLst/>
+          </a:prstGeom>
+          <a:solidFill>
+            <a:srgbClr val="F4F7FF"/>
+          </a:solidFill>
+          <a:ln w="12700">
+            <a:solidFill>
+              <a:srgbClr val="4F46E5"/>
+            </a:solidFill>
+          </a:ln>
+          <a:effectLst/>
+        </p:spPr>
+        <p:style>
+          <a:lnRef idx="1">
+            <a:schemeClr val="accent1"/>
+          </a:lnRef>
+          <a:fillRef idx="3">
+            <a:schemeClr val="accent1"/>
+          </a:fillRef>
+          <a:effectRef idx="2">
+            <a:schemeClr val="accent1"/>
+          </a:effectRef>
+          <a:fontRef idx="minor">
+            <a:schemeClr val="lt1"/>
+          </a:fontRef>
+        </p:style>
+        <p:txBody>
+          <a:bodyPr rtlCol="0" anchor="ctr"/>
+          <a:lstStyle/>
+          <a:p>
+            <a:pPr algn="ctr"/>
+          </a:p>
+        </p:txBody>
+      </p:sp>
+      <p:sp>
+        <p:nvSpPr>
+          <p:cNvPr id="15" name="TextBox 14"/>
+          <p:cNvSpPr txBox="1"/>
+          <p:nvPr/>
+        </p:nvSpPr>
+        <p:spPr>
+          <a:xfrm>
+            <a:off x="594360" y="5221224"/>
+            <a:ext cx="5394960" cy="274320"/>
+          </a:xfrm>
+          <a:prstGeom prst="rect">
+            <a:avLst/>
+          </a:prstGeom>
+          <a:noFill/>
+        </p:spPr>
+        <p:txBody>
+          <a:bodyPr wrap="square" anchor="t">
+            <a:spAutoFit/>
+          </a:bodyPr>
+          <a:lstStyle/>
+          <a:p>
+            <a:pPr algn="l">
+              <a:lnSpc>
+                <a:spcPct val="100000"/>
+              </a:lnSpc>
+            </a:pPr>
+            <a:r>
+              <a:rPr sz="1150" b="1">
+                <a:solidFill>
+                  <a:srgbClr val="4F46E5"/>
+                </a:solidFill>
+                <a:latin typeface="Malgun Gothic"/>
+              </a:rPr>
+              <a:t>✅ Key Points</a:t>
+            </a:r>
+          </a:p>
+        </p:txBody>
+      </p:sp>
+      <p:sp>
+        <p:nvSpPr>
+          <p:cNvPr id="16" name="TextBox 15"/>
+          <p:cNvSpPr txBox="1"/>
+          <p:nvPr/>
+        </p:nvSpPr>
+        <p:spPr>
+          <a:xfrm>
+            <a:off x="594360" y="5495544"/>
+            <a:ext cx="5394960" cy="1261872"/>
+          </a:xfrm>
+          <a:prstGeom prst="rect">
+            <a:avLst/>
+          </a:prstGeom>
+          <a:noFill/>
+        </p:spPr>
+        <p:txBody>
+          <a:bodyPr wrap="square">
+            <a:spAutoFit/>
+          </a:bodyPr>
+          <a:lstStyle/>
+          <a:p>
+            <a:pPr>
+              <a:lnSpc>
+                <a:spcPct val="115000"/>
+              </a:lnSpc>
+              <a:spcAft>
+                <a:spcPts val="200"/>
+              </a:spcAft>
+            </a:pPr>
+            <a:r>
+              <a:rPr sz="900" b="1">
+                <a:solidFill>
+                  <a:srgbClr val="4F46E5"/>
+                </a:solidFill>
+                <a:latin typeface="Malgun Gothic"/>
+              </a:rPr>
+              <a:t>● </a:t>
+            </a:r>
+            <a:r>
+              <a:rPr sz="1100">
+                <a:solidFill>
+                  <a:srgbClr val="334155"/>
+                </a:solidFill>
+                <a:latin typeface="Malgun Gothic"/>
+              </a:rPr>
+              <a:t>Managers are marked with a badge, and status shows as active / on-leave / left (3 states).</a:t>
+            </a:r>
+          </a:p>
+          <a:p>
+            <a:pPr>
+              <a:lnSpc>
+                <a:spcPct val="115000"/>
+              </a:lnSpc>
+              <a:spcAft>
+                <a:spcPts val="200"/>
+              </a:spcAft>
+            </a:pPr>
+            <a:r>
+              <a:rPr sz="900" b="1">
+                <a:solidFill>
+                  <a:srgbClr val="4F46E5"/>
+                </a:solidFill>
+                <a:latin typeface="Malgun Gothic"/>
+              </a:rPr>
+              <a:t>● </a:t>
+            </a:r>
+            <a:r>
+              <a:rPr sz="1100">
+                <a:solidFill>
+                  <a:srgbClr val="334155"/>
+                </a:solidFill>
+                <a:latin typeface="Malgun Gothic"/>
+              </a:rPr>
+              <a:t>A blank name falls back to the ID, so there are no empty cells.</a:t>
+            </a:r>
+          </a:p>
+          <a:p>
+            <a:pPr>
+              <a:lnSpc>
+                <a:spcPct val="115000"/>
+              </a:lnSpc>
+              <a:spcAft>
+                <a:spcPts val="200"/>
+              </a:spcAft>
+            </a:pPr>
+            <a:r>
+              <a:rPr sz="900" b="1">
+                <a:solidFill>
+                  <a:srgbClr val="4F46E5"/>
+                </a:solidFill>
+                <a:latin typeface="Malgun Gothic"/>
+              </a:rPr>
+              <a:t>● </a:t>
+            </a:r>
+            <a:r>
+              <a:rPr sz="1100">
+                <a:solidFill>
+                  <a:srgbClr val="334155"/>
+                </a:solidFill>
+                <a:latin typeface="Malgun Gothic"/>
+              </a:rPr>
+              <a:t>Detail tabs reuse existing APIs for speed, and the screen is bilingual (KO/EN).</a:t>
+            </a:r>
+          </a:p>
+          <a:p>
+            <a:pPr>
+              <a:lnSpc>
+                <a:spcPct val="115000"/>
+              </a:lnSpc>
+              <a:spcAft>
+                <a:spcPts val="200"/>
+              </a:spcAft>
+            </a:pPr>
+            <a:r>
+              <a:rPr sz="900" b="1">
+                <a:solidFill>
+                  <a:srgbClr val="4F46E5"/>
+                </a:solidFill>
+                <a:latin typeface="Malgun Gothic"/>
+              </a:rPr>
+              <a:t>● </a:t>
+            </a:r>
+            <a:r>
+              <a:rPr sz="1100">
+                <a:solidFill>
+                  <a:srgbClr val="334155"/>
+                </a:solidFill>
+                <a:latin typeface="Malgun Gothic"/>
+              </a:rPr>
+              <a:t>The duplicate payroll entry was tidied and bug reports moved to a separate system.</a:t>
+            </a:r>
+          </a:p>
+        </p:txBody>
+      </p:sp>
+      <p:sp>
+        <p:nvSpPr>
+          <p:cNvPr id="17" name="Rounded Rectangle 16"/>
+          <p:cNvSpPr/>
+          <p:nvPr/>
+        </p:nvSpPr>
+        <p:spPr>
+          <a:xfrm>
+            <a:off x="457200" y="6903720"/>
+            <a:ext cx="5669280" cy="640080"/>
+          </a:xfrm>
+          <a:prstGeom prst="roundRect">
+            <a:avLst/>
+          </a:prstGeom>
+          <a:solidFill>
+            <a:srgbClr val="FFFBEB"/>
+          </a:solidFill>
+          <a:ln w="12700">
+            <a:solidFill>
+              <a:srgbClr val="F59E0B"/>
+            </a:solidFill>
+          </a:ln>
+          <a:effectLst/>
+        </p:spPr>
+        <p:style>
+          <a:lnRef idx="1">
+            <a:schemeClr val="accent1"/>
+          </a:lnRef>
+          <a:fillRef idx="3">
+            <a:schemeClr val="accent1"/>
+          </a:fillRef>
+          <a:effectRef idx="2">
+            <a:schemeClr val="accent1"/>
+          </a:effectRef>
+          <a:fontRef idx="minor">
+            <a:schemeClr val="lt1"/>
+          </a:fontRef>
+        </p:style>
+        <p:txBody>
+          <a:bodyPr rtlCol="0" anchor="ctr"/>
+          <a:lstStyle/>
+          <a:p>
+            <a:pPr algn="ctr"/>
+          </a:p>
+        </p:txBody>
+      </p:sp>
+      <p:sp>
+        <p:nvSpPr>
+          <p:cNvPr id="18" name="TextBox 17"/>
+          <p:cNvSpPr txBox="1"/>
+          <p:nvPr/>
+        </p:nvSpPr>
+        <p:spPr>
+          <a:xfrm>
+            <a:off x="594360" y="6949440"/>
+            <a:ext cx="5394960" cy="548640"/>
+          </a:xfrm>
+          <a:prstGeom prst="rect">
+            <a:avLst/>
+          </a:prstGeom>
+          <a:noFill/>
+        </p:spPr>
+        <p:txBody>
+          <a:bodyPr wrap="square" anchor="t">
+            <a:spAutoFit/>
+          </a:bodyPr>
+          <a:lstStyle/>
+          <a:p>
+            <a:pPr algn="l">
+              <a:lnSpc>
+                <a:spcPct val="105000"/>
+              </a:lnSpc>
+            </a:pPr>
+            <a:r>
+              <a:rPr sz="1050" b="0">
+                <a:solidFill>
+                  <a:srgbClr val="92670A"/>
+                </a:solidFill>
+                <a:latin typeface="Malgun Gothic"/>
+              </a:rPr>
+              <a:t>⚠️ Good to know · This is a filtering/detail cleanup. Registering, editing and deleting teachers works exactly as before.</a:t>
+            </a:r>
+          </a:p>
+        </p:txBody>
+      </p:sp>
+      <p:sp>
+        <p:nvSpPr>
+          <p:cNvPr id="19" name="Rounded Rectangle 18"/>
+          <p:cNvSpPr/>
+          <p:nvPr/>
+        </p:nvSpPr>
+        <p:spPr>
+          <a:xfrm>
+            <a:off x="457200" y="7635240"/>
+            <a:ext cx="5669280" cy="658368"/>
+          </a:xfrm>
+          <a:prstGeom prst="roundRect">
+            <a:avLst/>
+          </a:prstGeom>
+          <a:solidFill>
+            <a:srgbClr val="FFF7E6"/>
+          </a:solidFill>
+          <a:ln w="12700">
+            <a:solidFill>
+              <a:srgbClr val="FF9F1C"/>
+            </a:solidFill>
+          </a:ln>
+          <a:effectLst/>
+        </p:spPr>
+        <p:style>
+          <a:lnRef idx="1">
+            <a:schemeClr val="accent1"/>
+          </a:lnRef>
+          <a:fillRef idx="3">
+            <a:schemeClr val="accent1"/>
+          </a:fillRef>
+          <a:effectRef idx="2">
+            <a:schemeClr val="accent1"/>
+          </a:effectRef>
+          <a:fontRef idx="minor">
+            <a:schemeClr val="lt1"/>
+          </a:fontRef>
+        </p:style>
+        <p:txBody>
+          <a:bodyPr rtlCol="0" anchor="ctr"/>
+          <a:lstStyle/>
+          <a:p>
+            <a:pPr algn="ctr"/>
+          </a:p>
+        </p:txBody>
+      </p:sp>
+      <p:sp>
+        <p:nvSpPr>
+          <p:cNvPr id="20" name="TextBox 19"/>
+          <p:cNvSpPr txBox="1"/>
+          <p:nvPr/>
+        </p:nvSpPr>
+        <p:spPr>
+          <a:xfrm>
+            <a:off x="594360" y="7680960"/>
+            <a:ext cx="5394960" cy="566928"/>
+          </a:xfrm>
+          <a:prstGeom prst="rect">
+            <a:avLst/>
+          </a:prstGeom>
+          <a:noFill/>
+        </p:spPr>
+        <p:txBody>
+          <a:bodyPr wrap="square" anchor="t">
+            <a:spAutoFit/>
+          </a:bodyPr>
+          <a:lstStyle/>
+          <a:p>
+            <a:pPr algn="l">
+              <a:lnSpc>
+                <a:spcPct val="105000"/>
+              </a:lnSpc>
+            </a:pPr>
+            <a:r>
+              <a:rPr sz="1050" b="0">
+                <a:solidFill>
+                  <a:srgbClr val="5B4A2A"/>
+                </a:solidFill>
+                <a:latin typeface="Malgun Gothic"/>
+              </a:rPr>
+              <a:t>💡 Tip · The more teachers you have, the more the status/group filters help. Keep your usual conditions filtered.</a:t>
+            </a:r>
+          </a:p>
+        </p:txBody>
+      </p:sp>
+      <p:sp>
+        <p:nvSpPr>
+          <p:cNvPr id="21" name="Rectangle 20"/>
+          <p:cNvSpPr/>
+          <p:nvPr/>
+        </p:nvSpPr>
+        <p:spPr>
+          <a:xfrm>
+            <a:off x="6300216" y="2345436"/>
+            <a:ext cx="5596128" cy="3538728"/>
+          </a:xfrm>
+          <a:prstGeom prst="rect">
+            <a:avLst/>
+          </a:prstGeom>
+          <a:solidFill>
+            <a:srgbClr val="FFFFFF"/>
+          </a:solidFill>
+          <a:ln w="12700">
+            <a:solidFill>
+              <a:srgbClr val="E2E8F0"/>
+            </a:solidFill>
+          </a:ln>
+          <a:effectLst/>
+        </p:spPr>
+        <p:style>
+          <a:lnRef idx="1">
+            <a:schemeClr val="accent1"/>
+          </a:lnRef>
+          <a:fillRef idx="3">
+            <a:schemeClr val="accent1"/>
+          </a:fillRef>
+          <a:effectRef idx="2">
+            <a:schemeClr val="accent1"/>
+          </a:effectRef>
+          <a:fontRef idx="minor">
+            <a:schemeClr val="lt1"/>
+          </a:fontRef>
+        </p:style>
+        <p:txBody>
+          <a:bodyPr rtlCol="0" anchor="ctr"/>
+          <a:lstStyle/>
+          <a:p>
+            <a:pPr algn="ctr"/>
+          </a:p>
+        </p:txBody>
+      </p:sp>
+      <p:pic>
+        <p:nvPicPr>
+          <p:cNvPr id="22" name="Picture 21" descr="admin_teachers.jpg"/>
+          <p:cNvPicPr>
+            <a:picLocks noChangeAspect="1"/>
+          </p:cNvPicPr>
+          <p:nvPr/>
+        </p:nvPicPr>
+        <p:blipFill>
+          <a:blip r:embed="rId2"/>
+          <a:stretch>
+            <a:fillRect/>
+          </a:stretch>
+        </p:blipFill>
+        <p:spPr>
+          <a:xfrm>
+            <a:off x="6355080" y="2400300"/>
+            <a:ext cx="5486400" cy="3429000"/>
+          </a:xfrm>
+          <a:prstGeom prst="rect">
+            <a:avLst/>
+          </a:prstGeom>
+        </p:spPr>
+      </p:pic>
+    </p:spTree>
+  </p:cSld>
+  <p:clrMapOvr>
+    <a:masterClrMapping/>
+  </p:clrMapOvr>
+</p:sld>
+</file>
+
+<file path=ppt/slides/slide42.xml><?xml version="1.0" encoding="utf-8"?>
+<p:sld xmlns:a="http://schemas.openxmlformats.org/drawingml/2006/main" xmlns:p="http://schemas.openxmlformats.org/presentationml/2006/main" xmlns:r="http://schemas.openxmlformats.org/officeDocument/2006/relationships">
+  <p:cSld>
+    <p:bg>
+      <p:bgPr>
+        <a:solidFill>
+          <a:srgbClr val="FFFFFF"/>
+        </a:solidFill>
+        <a:effectLst/>
+      </p:bgPr>
+    </p:bg>
+    <p:spTree>
+      <p:nvGrpSpPr>
+        <p:cNvPr id="1" name=""/>
+        <p:cNvGrpSpPr/>
+        <p:nvPr/>
+      </p:nvGrpSpPr>
+      <p:grpSpPr/>
+      <p:sp>
+        <p:nvSpPr>
+          <p:cNvPr id="2" name="Rectangle 1"/>
+          <p:cNvSpPr/>
+          <p:nvPr/>
+        </p:nvSpPr>
+        <p:spPr>
+          <a:xfrm>
+            <a:off x="0" y="0"/>
+            <a:ext cx="12191695" cy="566928"/>
+          </a:xfrm>
+          <a:prstGeom prst="rect">
+            <a:avLst/>
+          </a:prstGeom>
+          <a:solidFill>
+            <a:srgbClr val="4F46E5"/>
+          </a:solidFill>
+          <a:ln>
+            <a:noFill/>
+          </a:ln>
+          <a:effectLst/>
+        </p:spPr>
+        <p:style>
+          <a:lnRef idx="1">
+            <a:schemeClr val="accent1"/>
+          </a:lnRef>
+          <a:fillRef idx="3">
+            <a:schemeClr val="accent1"/>
+          </a:fillRef>
+          <a:effectRef idx="2">
+            <a:schemeClr val="accent1"/>
+          </a:effectRef>
+          <a:fontRef idx="minor">
+            <a:schemeClr val="lt1"/>
+          </a:fontRef>
+        </p:style>
+        <p:txBody>
+          <a:bodyPr rtlCol="0" anchor="ctr"/>
+          <a:lstStyle/>
+          <a:p>
+            <a:pPr algn="ctr"/>
+          </a:p>
+        </p:txBody>
+      </p:sp>
+      <p:sp>
+        <p:nvSpPr>
+          <p:cNvPr id="3" name="Rectangle 2"/>
+          <p:cNvSpPr/>
+          <p:nvPr/>
+        </p:nvSpPr>
+        <p:spPr>
+          <a:xfrm>
+            <a:off x="0" y="566928"/>
+            <a:ext cx="12191695" cy="54864"/>
+          </a:xfrm>
+          <a:prstGeom prst="rect">
+            <a:avLst/>
+          </a:prstGeom>
+          <a:solidFill>
+            <a:srgbClr val="FF9F1C"/>
+          </a:solidFill>
+          <a:ln>
+            <a:noFill/>
+          </a:ln>
+          <a:effectLst/>
+        </p:spPr>
+        <p:style>
+          <a:lnRef idx="1">
+            <a:schemeClr val="accent1"/>
+          </a:lnRef>
+          <a:fillRef idx="3">
+            <a:schemeClr val="accent1"/>
+          </a:fillRef>
+          <a:effectRef idx="2">
+            <a:schemeClr val="accent1"/>
+          </a:effectRef>
+          <a:fontRef idx="minor">
+            <a:schemeClr val="lt1"/>
+          </a:fontRef>
+        </p:style>
+        <p:txBody>
+          <a:bodyPr rtlCol="0" anchor="ctr"/>
+          <a:lstStyle/>
+          <a:p>
+            <a:pPr algn="ctr"/>
+          </a:p>
+        </p:txBody>
+      </p:sp>
+      <p:sp>
+        <p:nvSpPr>
+          <p:cNvPr id="4" name="TextBox 3"/>
+          <p:cNvSpPr txBox="1"/>
+          <p:nvPr/>
+        </p:nvSpPr>
+        <p:spPr>
+          <a:xfrm>
+            <a:off x="365760" y="27432"/>
+            <a:ext cx="7315200" cy="502920"/>
+          </a:xfrm>
+          <a:prstGeom prst="rect">
+            <a:avLst/>
+          </a:prstGeom>
+          <a:noFill/>
+        </p:spPr>
+        <p:txBody>
+          <a:bodyPr wrap="square" anchor="ctr">
+            <a:spAutoFit/>
+          </a:bodyPr>
+          <a:lstStyle/>
+          <a:p>
+            <a:pPr algn="l">
+              <a:lnSpc>
+                <a:spcPct val="100000"/>
+              </a:lnSpc>
+            </a:pPr>
+            <a:r>
+              <a:rPr sz="1500" b="1">
+                <a:solidFill>
+                  <a:srgbClr val="FFFFFF"/>
+                </a:solidFill>
+                <a:latin typeface="Malgun Gothic"/>
+              </a:rPr>
+              <a:t>🏫 Mangoi Admin User Guide</a:t>
+            </a:r>
+          </a:p>
+        </p:txBody>
+      </p:sp>
+      <p:sp>
+        <p:nvSpPr>
+          <p:cNvPr id="5" name="TextBox 4"/>
+          <p:cNvSpPr txBox="1"/>
+          <p:nvPr/>
+        </p:nvSpPr>
+        <p:spPr>
+          <a:xfrm>
+            <a:off x="8168335" y="27432"/>
+            <a:ext cx="3657600" cy="502920"/>
+          </a:xfrm>
+          <a:prstGeom prst="rect">
+            <a:avLst/>
+          </a:prstGeom>
+          <a:noFill/>
+        </p:spPr>
+        <p:txBody>
+          <a:bodyPr wrap="square" anchor="ctr">
+            <a:spAutoFit/>
+          </a:bodyPr>
+          <a:lstStyle/>
+          <a:p>
+            <a:pPr algn="r">
+              <a:lnSpc>
+                <a:spcPct val="100000"/>
+              </a:lnSpc>
+            </a:pPr>
+            <a:r>
+              <a:rPr sz="1300" b="1">
+                <a:solidFill>
+                  <a:srgbClr val="F1F5F9"/>
+                </a:solidFill>
+                <a:latin typeface="Malgun Gothic"/>
+              </a:rPr>
+              <a:t>How to Use the Main Features</a:t>
+            </a:r>
+          </a:p>
+        </p:txBody>
+      </p:sp>
+      <p:sp>
+        <p:nvSpPr>
+          <p:cNvPr id="6" name="Rounded Rectangle 5"/>
+          <p:cNvSpPr/>
+          <p:nvPr/>
+        </p:nvSpPr>
+        <p:spPr>
+          <a:xfrm>
+            <a:off x="365760" y="822960"/>
+            <a:ext cx="868680" cy="868680"/>
+          </a:xfrm>
+          <a:prstGeom prst="roundRect">
+            <a:avLst/>
+          </a:prstGeom>
+          <a:solidFill>
+            <a:srgbClr val="4F46E5"/>
+          </a:solidFill>
+          <a:ln>
+            <a:noFill/>
+          </a:ln>
+          <a:effectLst/>
+        </p:spPr>
+        <p:style>
+          <a:lnRef idx="1">
+            <a:schemeClr val="accent1"/>
+          </a:lnRef>
+          <a:fillRef idx="3">
+            <a:schemeClr val="accent1"/>
+          </a:fillRef>
+          <a:effectRef idx="2">
+            <a:schemeClr val="accent1"/>
+          </a:effectRef>
+          <a:fontRef idx="minor">
+            <a:schemeClr val="lt1"/>
+          </a:fontRef>
+        </p:style>
+        <p:txBody>
+          <a:bodyPr rtlCol="0" anchor="ctr"/>
+          <a:lstStyle/>
+          <a:p>
+            <a:pPr algn="ctr"/>
+          </a:p>
+        </p:txBody>
+      </p:sp>
+      <p:sp>
+        <p:nvSpPr>
+          <p:cNvPr id="7" name="TextBox 6"/>
+          <p:cNvSpPr txBox="1"/>
+          <p:nvPr/>
+        </p:nvSpPr>
+        <p:spPr>
+          <a:xfrm>
+            <a:off x="365760" y="822960"/>
+            <a:ext cx="868680" cy="868680"/>
+          </a:xfrm>
+          <a:prstGeom prst="rect">
+            <a:avLst/>
+          </a:prstGeom>
+          <a:noFill/>
+        </p:spPr>
+        <p:txBody>
+          <a:bodyPr wrap="square" anchor="ctr">
+            <a:spAutoFit/>
+          </a:bodyPr>
+          <a:lstStyle/>
+          <a:p>
+            <a:pPr algn="ctr">
+              <a:lnSpc>
+                <a:spcPct val="100000"/>
+              </a:lnSpc>
+            </a:pPr>
+            <a:r>
+              <a:rPr sz="2600" b="1">
+                <a:solidFill>
+                  <a:srgbClr val="FFFFFF"/>
+                </a:solidFill>
+                <a:latin typeface="Malgun Gothic"/>
+              </a:rPr>
+              <a:t>38</a:t>
+            </a:r>
+          </a:p>
+        </p:txBody>
+      </p:sp>
+      <p:sp>
+        <p:nvSpPr>
+          <p:cNvPr id="8" name="TextBox 7"/>
+          <p:cNvSpPr txBox="1"/>
+          <p:nvPr/>
+        </p:nvSpPr>
+        <p:spPr>
+          <a:xfrm>
+            <a:off x="1371600" y="822960"/>
+            <a:ext cx="10424160" cy="502920"/>
+          </a:xfrm>
+          <a:prstGeom prst="rect">
+            <a:avLst/>
+          </a:prstGeom>
+          <a:noFill/>
+        </p:spPr>
+        <p:txBody>
+          <a:bodyPr wrap="square" anchor="t">
+            <a:spAutoFit/>
+          </a:bodyPr>
+          <a:lstStyle/>
+          <a:p>
+            <a:pPr algn="l">
+              <a:lnSpc>
+                <a:spcPct val="100000"/>
+              </a:lnSpc>
+            </a:pPr>
+            <a:r>
+              <a:rPr sz="2300" b="1">
+                <a:solidFill>
+                  <a:srgbClr val="1E2340"/>
+                </a:solidFill>
+                <a:latin typeface="Malgun Gothic"/>
+              </a:rPr>
+              <a:t>🌟 Sending the Parent Monthly Report (pentagon)</a:t>
+            </a:r>
+          </a:p>
+        </p:txBody>
+      </p:sp>
+      <p:sp>
+        <p:nvSpPr>
+          <p:cNvPr id="9" name="TextBox 8"/>
+          <p:cNvSpPr txBox="1"/>
+          <p:nvPr/>
+        </p:nvSpPr>
+        <p:spPr>
+          <a:xfrm>
+            <a:off x="1417320" y="1353312"/>
+            <a:ext cx="10424160" cy="320040"/>
+          </a:xfrm>
+          <a:prstGeom prst="rect">
+            <a:avLst/>
+          </a:prstGeom>
+          <a:noFill/>
+        </p:spPr>
+        <p:txBody>
+          <a:bodyPr wrap="square" anchor="t">
+            <a:spAutoFit/>
+          </a:bodyPr>
+          <a:lstStyle/>
+          <a:p>
+            <a:pPr algn="l">
+              <a:lnSpc>
+                <a:spcPct val="100000"/>
+              </a:lnSpc>
+            </a:pPr>
+            <a:r>
+              <a:rPr sz="1300" b="0">
+                <a:solidFill>
+                  <a:srgbClr val="64748B"/>
+                </a:solidFill>
+                <a:latin typeface="Malgun Gothic"/>
+              </a:rPr>
+              <a:t>Preview the 5-axis report, then share the link</a:t>
+            </a:r>
+          </a:p>
+        </p:txBody>
+      </p:sp>
+      <p:sp>
+        <p:nvSpPr>
+          <p:cNvPr id="10" name="Rounded Rectangle 9"/>
+          <p:cNvSpPr/>
+          <p:nvPr/>
+        </p:nvSpPr>
+        <p:spPr>
+          <a:xfrm>
+            <a:off x="365760" y="1828800"/>
+            <a:ext cx="11430000" cy="777240"/>
+          </a:xfrm>
+          <a:prstGeom prst="roundRect">
+            <a:avLst/>
+          </a:prstGeom>
+          <a:solidFill>
+            <a:srgbClr val="EEF2FF"/>
+          </a:solidFill>
+          <a:ln>
+            <a:noFill/>
+          </a:ln>
+          <a:effectLst/>
+        </p:spPr>
+        <p:style>
+          <a:lnRef idx="1">
+            <a:schemeClr val="accent1"/>
+          </a:lnRef>
+          <a:fillRef idx="3">
+            <a:schemeClr val="accent1"/>
+          </a:fillRef>
+          <a:effectRef idx="2">
+            <a:schemeClr val="accent1"/>
+          </a:effectRef>
+          <a:fontRef idx="minor">
+            <a:schemeClr val="lt1"/>
+          </a:fontRef>
+        </p:style>
+        <p:txBody>
+          <a:bodyPr rtlCol="0" anchor="ctr"/>
+          <a:lstStyle/>
+          <a:p>
+            <a:pPr algn="ctr"/>
+          </a:p>
+        </p:txBody>
+      </p:sp>
+      <p:sp>
+        <p:nvSpPr>
+          <p:cNvPr id="11" name="TextBox 10"/>
+          <p:cNvSpPr txBox="1"/>
+          <p:nvPr/>
+        </p:nvSpPr>
+        <p:spPr>
+          <a:xfrm>
+            <a:off x="548640" y="1901952"/>
+            <a:ext cx="11064240" cy="640080"/>
+          </a:xfrm>
+          <a:prstGeom prst="rect">
+            <a:avLst/>
+          </a:prstGeom>
+          <a:noFill/>
+        </p:spPr>
+        <p:txBody>
+          <a:bodyPr wrap="square" anchor="t">
+            <a:spAutoFit/>
+          </a:bodyPr>
+          <a:lstStyle/>
+          <a:p>
+            <a:pPr algn="l">
+              <a:lnSpc>
+                <a:spcPct val="115000"/>
+              </a:lnSpc>
+            </a:pPr>
+            <a:r>
+              <a:rPr sz="1200" b="0">
+                <a:solidFill>
+                  <a:srgbClr val="334155"/>
+                </a:solidFill>
+                <a:latin typeface="Malgun Gothic"/>
+              </a:rPr>
+              <a:t>The monthly report sent to parents is renewed as a pentagon 5-axis graph — Pronunciation &amp; Fluency / Vocabulary / Sentence Building / Class Attitude / Participation — at a glance, with attendance, judgment and a teacher's note. Admins and teachers enter a student ID and month to preview, then send the KakaoTalk link.</a:t>
+            </a:r>
+          </a:p>
+        </p:txBody>
+      </p:sp>
+      <p:sp>
+        <p:nvSpPr>
+          <p:cNvPr id="12" name="TextBox 11"/>
+          <p:cNvSpPr txBox="1"/>
+          <p:nvPr/>
+        </p:nvSpPr>
+        <p:spPr>
+          <a:xfrm>
+            <a:off x="457200" y="2743200"/>
+            <a:ext cx="5669280" cy="320040"/>
+          </a:xfrm>
+          <a:prstGeom prst="rect">
+            <a:avLst/>
+          </a:prstGeom>
+          <a:noFill/>
+        </p:spPr>
+        <p:txBody>
+          <a:bodyPr wrap="square" anchor="t">
+            <a:spAutoFit/>
+          </a:bodyPr>
+          <a:lstStyle/>
+          <a:p>
+            <a:pPr algn="l">
+              <a:lnSpc>
+                <a:spcPct val="100000"/>
+              </a:lnSpc>
+            </a:pPr>
+            <a:r>
+              <a:rPr sz="1350" b="1">
+                <a:solidFill>
+                  <a:srgbClr val="4F46E5"/>
+                </a:solidFill>
+                <a:latin typeface="Malgun Gothic"/>
+              </a:rPr>
+              <a:t>How to use</a:t>
+            </a:r>
+          </a:p>
+        </p:txBody>
+      </p:sp>
+      <p:sp>
+        <p:nvSpPr>
+          <p:cNvPr id="13" name="TextBox 12"/>
+          <p:cNvSpPr txBox="1"/>
+          <p:nvPr/>
+        </p:nvSpPr>
+        <p:spPr>
+          <a:xfrm>
+            <a:off x="457200" y="3108960"/>
+            <a:ext cx="5669280" cy="2377440"/>
+          </a:xfrm>
+          <a:prstGeom prst="rect">
+            <a:avLst/>
+          </a:prstGeom>
+          <a:noFill/>
+        </p:spPr>
+        <p:txBody>
+          <a:bodyPr wrap="square">
+            <a:spAutoFit/>
+          </a:bodyPr>
+          <a:lstStyle/>
+          <a:p>
+            <a:pPr>
+              <a:lnSpc>
+                <a:spcPct val="115000"/>
+              </a:lnSpc>
+              <a:spcAft>
+                <a:spcPts val="600"/>
+              </a:spcAft>
+            </a:pPr>
+            <a:r>
+              <a:rPr sz="1050" b="1">
+                <a:solidFill>
+                  <a:srgbClr val="4F46E5"/>
+                </a:solidFill>
+                <a:latin typeface="Malgun Gothic"/>
+              </a:rPr>
+              <a:t>● </a:t>
+            </a:r>
+            <a:r>
+              <a:rPr sz="1250">
+                <a:solidFill>
+                  <a:srgbClr val="334155"/>
+                </a:solidFill>
+                <a:latin typeface="Malgun Gothic"/>
+              </a:rPr>
+              <a:t>Open the Monthly Report screen.</a:t>
+            </a:r>
+          </a:p>
+          <a:p>
+            <a:pPr>
+              <a:lnSpc>
+                <a:spcPct val="115000"/>
+              </a:lnSpc>
+              <a:spcAft>
+                <a:spcPts val="600"/>
+              </a:spcAft>
+            </a:pPr>
+            <a:r>
+              <a:rPr sz="1050" b="1">
+                <a:solidFill>
+                  <a:srgbClr val="4F46E5"/>
+                </a:solidFill>
+                <a:latin typeface="Malgun Gothic"/>
+              </a:rPr>
+              <a:t>● </a:t>
+            </a:r>
+            <a:r>
+              <a:rPr sz="1250">
+                <a:solidFill>
+                  <a:srgbClr val="334155"/>
+                </a:solidFill>
+                <a:latin typeface="Malgun Gothic"/>
+              </a:rPr>
+              <a:t>Enter a student ID and month, press View Report to preview.</a:t>
+            </a:r>
+          </a:p>
+          <a:p>
+            <a:pPr>
+              <a:lnSpc>
+                <a:spcPct val="115000"/>
+              </a:lnSpc>
+              <a:spcAft>
+                <a:spcPts val="600"/>
+              </a:spcAft>
+            </a:pPr>
+            <a:r>
+              <a:rPr sz="1050" b="1">
+                <a:solidFill>
+                  <a:srgbClr val="4F46E5"/>
+                </a:solidFill>
+                <a:latin typeface="Malgun Gothic"/>
+              </a:rPr>
+              <a:t>● </a:t>
+            </a:r>
+            <a:r>
+              <a:rPr sz="1250">
+                <a:solidFill>
+                  <a:srgbClr val="334155"/>
+                </a:solidFill>
+                <a:latin typeface="Malgun Gothic"/>
+              </a:rPr>
+              <a:t>Check the pentagon and teacher's note; top up evaluations if needed.</a:t>
+            </a:r>
+          </a:p>
+          <a:p>
+            <a:pPr>
+              <a:lnSpc>
+                <a:spcPct val="115000"/>
+              </a:lnSpc>
+              <a:spcAft>
+                <a:spcPts val="600"/>
+              </a:spcAft>
+            </a:pPr>
+            <a:r>
+              <a:rPr sz="1050" b="1">
+                <a:solidFill>
+                  <a:srgbClr val="4F46E5"/>
+                </a:solidFill>
+                <a:latin typeface="Malgun Gothic"/>
+              </a:rPr>
+              <a:t>● </a:t>
+            </a:r>
+            <a:r>
+              <a:rPr sz="1250">
+                <a:solidFill>
+                  <a:srgbClr val="334155"/>
+                </a:solidFill>
+                <a:latin typeface="Malgun Gothic"/>
+              </a:rPr>
+              <a:t>Append ?uid=ID&amp;period=YYYY-MM to the URL and send the KakaoTalk link.</a:t>
+            </a:r>
+          </a:p>
+        </p:txBody>
+      </p:sp>
+      <p:sp>
+        <p:nvSpPr>
+          <p:cNvPr id="14" name="Rounded Rectangle 13"/>
+          <p:cNvSpPr/>
+          <p:nvPr/>
+        </p:nvSpPr>
+        <p:spPr>
+          <a:xfrm>
+            <a:off x="457200" y="4782312"/>
+            <a:ext cx="5669280" cy="1316736"/>
+          </a:xfrm>
+          <a:prstGeom prst="roundRect">
+            <a:avLst/>
+          </a:prstGeom>
+          <a:solidFill>
+            <a:srgbClr val="F4F7FF"/>
+          </a:solidFill>
+          <a:ln w="12700">
+            <a:solidFill>
+              <a:srgbClr val="4F46E5"/>
+            </a:solidFill>
+          </a:ln>
+          <a:effectLst/>
+        </p:spPr>
+        <p:style>
+          <a:lnRef idx="1">
+            <a:schemeClr val="accent1"/>
+          </a:lnRef>
+          <a:fillRef idx="3">
+            <a:schemeClr val="accent1"/>
+          </a:fillRef>
+          <a:effectRef idx="2">
+            <a:schemeClr val="accent1"/>
+          </a:effectRef>
+          <a:fontRef idx="minor">
+            <a:schemeClr val="lt1"/>
+          </a:fontRef>
+        </p:style>
+        <p:txBody>
+          <a:bodyPr rtlCol="0" anchor="ctr"/>
+          <a:lstStyle/>
+          <a:p>
+            <a:pPr algn="ctr"/>
+          </a:p>
+        </p:txBody>
+      </p:sp>
+      <p:sp>
+        <p:nvSpPr>
+          <p:cNvPr id="15" name="TextBox 14"/>
+          <p:cNvSpPr txBox="1"/>
+          <p:nvPr/>
+        </p:nvSpPr>
+        <p:spPr>
+          <a:xfrm>
+            <a:off x="594360" y="4837175"/>
+            <a:ext cx="5394960" cy="274320"/>
+          </a:xfrm>
+          <a:prstGeom prst="rect">
+            <a:avLst/>
+          </a:prstGeom>
+          <a:noFill/>
+        </p:spPr>
+        <p:txBody>
+          <a:bodyPr wrap="square" anchor="t">
+            <a:spAutoFit/>
+          </a:bodyPr>
+          <a:lstStyle/>
+          <a:p>
+            <a:pPr algn="l">
+              <a:lnSpc>
+                <a:spcPct val="100000"/>
+              </a:lnSpc>
+            </a:pPr>
+            <a:r>
+              <a:rPr sz="1150" b="1">
+                <a:solidFill>
+                  <a:srgbClr val="4F46E5"/>
+                </a:solidFill>
+                <a:latin typeface="Malgun Gothic"/>
+              </a:rPr>
+              <a:t>✅ Key Points</a:t>
+            </a:r>
+          </a:p>
+        </p:txBody>
+      </p:sp>
+      <p:sp>
+        <p:nvSpPr>
+          <p:cNvPr id="16" name="TextBox 15"/>
+          <p:cNvSpPr txBox="1"/>
+          <p:nvPr/>
+        </p:nvSpPr>
+        <p:spPr>
+          <a:xfrm>
+            <a:off x="594360" y="5111496"/>
+            <a:ext cx="5394960" cy="950976"/>
+          </a:xfrm>
+          <a:prstGeom prst="rect">
+            <a:avLst/>
+          </a:prstGeom>
+          <a:noFill/>
+        </p:spPr>
+        <p:txBody>
+          <a:bodyPr wrap="square">
+            <a:spAutoFit/>
+          </a:bodyPr>
+          <a:lstStyle/>
+          <a:p>
+            <a:pPr>
+              <a:lnSpc>
+                <a:spcPct val="115000"/>
+              </a:lnSpc>
+              <a:spcAft>
+                <a:spcPts val="200"/>
+              </a:spcAft>
+            </a:pPr>
+            <a:r>
+              <a:rPr sz="900" b="1">
+                <a:solidFill>
+                  <a:srgbClr val="4F46E5"/>
+                </a:solidFill>
+                <a:latin typeface="Malgun Gothic"/>
+              </a:rPr>
+              <a:t>● </a:t>
+            </a:r>
+            <a:r>
+              <a:rPr sz="1100">
+                <a:solidFill>
+                  <a:srgbClr val="334155"/>
+                </a:solidFill>
+                <a:latin typeface="Malgun Gothic"/>
+              </a:rPr>
+              <a:t>Only axes with real records are filled, so it's trustworthy.</a:t>
+            </a:r>
+          </a:p>
+          <a:p>
+            <a:pPr>
+              <a:lnSpc>
+                <a:spcPct val="115000"/>
+              </a:lnSpc>
+              <a:spcAft>
+                <a:spcPts val="200"/>
+              </a:spcAft>
+            </a:pPr>
+            <a:r>
+              <a:rPr sz="900" b="1">
+                <a:solidFill>
+                  <a:srgbClr val="4F46E5"/>
+                </a:solidFill>
+                <a:latin typeface="Malgun Gothic"/>
+              </a:rPr>
+              <a:t>● </a:t>
+            </a:r>
+            <a:r>
+              <a:rPr sz="1100">
+                <a:solidFill>
+                  <a:srgbClr val="334155"/>
+                </a:solidFill>
+                <a:latin typeface="Malgun Gothic"/>
+              </a:rPr>
+              <a:t>Compiled on a two-month cycle — conveys change without tiring parents.</a:t>
+            </a:r>
+          </a:p>
+          <a:p>
+            <a:pPr>
+              <a:lnSpc>
+                <a:spcPct val="115000"/>
+              </a:lnSpc>
+              <a:spcAft>
+                <a:spcPts val="200"/>
+              </a:spcAft>
+            </a:pPr>
+            <a:r>
+              <a:rPr sz="900" b="1">
+                <a:solidFill>
+                  <a:srgbClr val="4F46E5"/>
+                </a:solidFill>
+                <a:latin typeface="Malgun Gothic"/>
+              </a:rPr>
+              <a:t>● </a:t>
+            </a:r>
+            <a:r>
+              <a:rPr sz="1100">
+                <a:solidFill>
+                  <a:srgbClr val="334155"/>
+                </a:solidFill>
+                <a:latin typeface="Malgun Gothic"/>
+              </a:rPr>
+              <a:t>The Print/PDF button makes a paper report for consultations instantly.</a:t>
+            </a:r>
+          </a:p>
+        </p:txBody>
+      </p:sp>
+      <p:sp>
+        <p:nvSpPr>
+          <p:cNvPr id="17" name="Rounded Rectangle 16"/>
+          <p:cNvSpPr/>
+          <p:nvPr/>
+        </p:nvSpPr>
+        <p:spPr>
+          <a:xfrm>
+            <a:off x="457200" y="6208775"/>
+            <a:ext cx="5669280" cy="640080"/>
+          </a:xfrm>
+          <a:prstGeom prst="roundRect">
+            <a:avLst/>
+          </a:prstGeom>
+          <a:solidFill>
+            <a:srgbClr val="FFFBEB"/>
+          </a:solidFill>
+          <a:ln w="12700">
+            <a:solidFill>
+              <a:srgbClr val="F59E0B"/>
+            </a:solidFill>
+          </a:ln>
+          <a:effectLst/>
+        </p:spPr>
+        <p:style>
+          <a:lnRef idx="1">
+            <a:schemeClr val="accent1"/>
+          </a:lnRef>
+          <a:fillRef idx="3">
+            <a:schemeClr val="accent1"/>
+          </a:fillRef>
+          <a:effectRef idx="2">
+            <a:schemeClr val="accent1"/>
+          </a:effectRef>
+          <a:fontRef idx="minor">
+            <a:schemeClr val="lt1"/>
+          </a:fontRef>
+        </p:style>
+        <p:txBody>
+          <a:bodyPr rtlCol="0" anchor="ctr"/>
+          <a:lstStyle/>
+          <a:p>
+            <a:pPr algn="ctr"/>
+          </a:p>
+        </p:txBody>
+      </p:sp>
+      <p:sp>
+        <p:nvSpPr>
+          <p:cNvPr id="18" name="TextBox 17"/>
+          <p:cNvSpPr txBox="1"/>
+          <p:nvPr/>
+        </p:nvSpPr>
+        <p:spPr>
+          <a:xfrm>
+            <a:off x="594360" y="6254495"/>
+            <a:ext cx="5394960" cy="548640"/>
+          </a:xfrm>
+          <a:prstGeom prst="rect">
+            <a:avLst/>
+          </a:prstGeom>
+          <a:noFill/>
+        </p:spPr>
+        <p:txBody>
+          <a:bodyPr wrap="square" anchor="t">
+            <a:spAutoFit/>
+          </a:bodyPr>
+          <a:lstStyle/>
+          <a:p>
+            <a:pPr algn="l">
+              <a:lnSpc>
+                <a:spcPct val="105000"/>
+              </a:lnSpc>
+            </a:pPr>
+            <a:r>
+              <a:rPr sz="1050" b="0">
+                <a:solidFill>
+                  <a:srgbClr val="92670A"/>
+                </a:solidFill>
+                <a:latin typeface="Malgun Gothic"/>
+              </a:rPr>
+              <a:t>⚠️ Good to know · Report access passes an approval gate — admins via their login session, parents only via the issued link (token).</a:t>
+            </a:r>
+          </a:p>
+        </p:txBody>
+      </p:sp>
+      <p:sp>
+        <p:nvSpPr>
+          <p:cNvPr id="19" name="Rounded Rectangle 18"/>
+          <p:cNvSpPr/>
+          <p:nvPr/>
+        </p:nvSpPr>
+        <p:spPr>
+          <a:xfrm>
+            <a:off x="457200" y="6940295"/>
+            <a:ext cx="5669280" cy="658368"/>
+          </a:xfrm>
+          <a:prstGeom prst="roundRect">
+            <a:avLst/>
+          </a:prstGeom>
+          <a:solidFill>
+            <a:srgbClr val="FFF7E6"/>
+          </a:solidFill>
+          <a:ln w="12700">
+            <a:solidFill>
+              <a:srgbClr val="FF9F1C"/>
+            </a:solidFill>
+          </a:ln>
+          <a:effectLst/>
+        </p:spPr>
+        <p:style>
+          <a:lnRef idx="1">
+            <a:schemeClr val="accent1"/>
+          </a:lnRef>
+          <a:fillRef idx="3">
+            <a:schemeClr val="accent1"/>
+          </a:fillRef>
+          <a:effectRef idx="2">
+            <a:schemeClr val="accent1"/>
+          </a:effectRef>
+          <a:fontRef idx="minor">
+            <a:schemeClr val="lt1"/>
+          </a:fontRef>
+        </p:style>
+        <p:txBody>
+          <a:bodyPr rtlCol="0" anchor="ctr"/>
+          <a:lstStyle/>
+          <a:p>
+            <a:pPr algn="ctr"/>
+          </a:p>
+        </p:txBody>
+      </p:sp>
+      <p:sp>
+        <p:nvSpPr>
+          <p:cNvPr id="20" name="TextBox 19"/>
+          <p:cNvSpPr txBox="1"/>
+          <p:nvPr/>
+        </p:nvSpPr>
+        <p:spPr>
+          <a:xfrm>
+            <a:off x="594360" y="6986015"/>
+            <a:ext cx="5394960" cy="566928"/>
+          </a:xfrm>
+          <a:prstGeom prst="rect">
+            <a:avLst/>
+          </a:prstGeom>
+          <a:noFill/>
+        </p:spPr>
+        <p:txBody>
+          <a:bodyPr wrap="square" anchor="t">
+            <a:spAutoFit/>
+          </a:bodyPr>
+          <a:lstStyle/>
+          <a:p>
+            <a:pPr algn="l">
+              <a:lnSpc>
+                <a:spcPct val="105000"/>
+              </a:lnSpc>
+            </a:pPr>
+            <a:r>
+              <a:rPr sz="1050" b="0">
+                <a:solidFill>
+                  <a:srgbClr val="5B4A2A"/>
+                </a:solidFill>
+                <a:latin typeface="Malgun Gothic"/>
+              </a:rPr>
+              <a:t>💡 Tip · Sending the report link ahead of a booked consultation makes the meeting much smoother.</a:t>
+            </a:r>
+          </a:p>
+        </p:txBody>
+      </p:sp>
+      <p:sp>
+        <p:nvSpPr>
+          <p:cNvPr id="21" name="Rectangle 20"/>
+          <p:cNvSpPr/>
+          <p:nvPr/>
+        </p:nvSpPr>
+        <p:spPr>
+          <a:xfrm>
+            <a:off x="6300216" y="2345436"/>
+            <a:ext cx="5596128" cy="3538728"/>
+          </a:xfrm>
+          <a:prstGeom prst="rect">
+            <a:avLst/>
+          </a:prstGeom>
+          <a:solidFill>
+            <a:srgbClr val="FFFFFF"/>
+          </a:solidFill>
+          <a:ln w="12700">
+            <a:solidFill>
+              <a:srgbClr val="E2E8F0"/>
+            </a:solidFill>
+          </a:ln>
+          <a:effectLst/>
+        </p:spPr>
+        <p:style>
+          <a:lnRef idx="1">
+            <a:schemeClr val="accent1"/>
+          </a:lnRef>
+          <a:fillRef idx="3">
+            <a:schemeClr val="accent1"/>
+          </a:fillRef>
+          <a:effectRef idx="2">
+            <a:schemeClr val="accent1"/>
+          </a:effectRef>
+          <a:fontRef idx="minor">
+            <a:schemeClr val="lt1"/>
+          </a:fontRef>
+        </p:style>
+        <p:txBody>
+          <a:bodyPr rtlCol="0" anchor="ctr"/>
+          <a:lstStyle/>
+          <a:p>
+            <a:pPr algn="ctr"/>
+          </a:p>
+        </p:txBody>
+      </p:sp>
+      <p:pic>
+        <p:nvPicPr>
+          <p:cNvPr id="22" name="Picture 21" descr="student_report_pentagon.jpg"/>
+          <p:cNvPicPr>
+            <a:picLocks noChangeAspect="1"/>
+          </p:cNvPicPr>
+          <p:nvPr/>
+        </p:nvPicPr>
+        <p:blipFill>
+          <a:blip r:embed="rId2"/>
+          <a:stretch>
+            <a:fillRect/>
+          </a:stretch>
+        </p:blipFill>
+        <p:spPr>
+          <a:xfrm>
+            <a:off x="6355080" y="2400300"/>
+            <a:ext cx="5486400" cy="3429000"/>
+          </a:xfrm>
+          <a:prstGeom prst="rect">
+            <a:avLst/>
+          </a:prstGeom>
+        </p:spPr>
+      </p:pic>
+    </p:spTree>
+  </p:cSld>
+  <p:clrMapOvr>
+    <a:masterClrMapping/>
+  </p:clrMapOvr>
+</p:sld>
+</file>
+
+<file path=ppt/slides/slide43.xml><?xml version="1.0" encoding="utf-8"?>
+<p:sld xmlns:a="http://schemas.openxmlformats.org/drawingml/2006/main" xmlns:p="http://schemas.openxmlformats.org/presentationml/2006/main" xmlns:r="http://schemas.openxmlformats.org/officeDocument/2006/relationships">
+  <p:cSld>
+    <p:bg>
+      <p:bgPr>
+        <a:solidFill>
+          <a:srgbClr val="FFFFFF"/>
+        </a:solidFill>
+        <a:effectLst/>
+      </p:bgPr>
+    </p:bg>
+    <p:spTree>
+      <p:nvGrpSpPr>
+        <p:cNvPr id="1" name=""/>
+        <p:cNvGrpSpPr/>
+        <p:nvPr/>
+      </p:nvGrpSpPr>
+      <p:grpSpPr/>
+      <p:sp>
+        <p:nvSpPr>
+          <p:cNvPr id="2" name="Rectangle 1"/>
+          <p:cNvSpPr/>
+          <p:nvPr/>
+        </p:nvSpPr>
+        <p:spPr>
+          <a:xfrm>
+            <a:off x="0" y="0"/>
+            <a:ext cx="12191695" cy="566928"/>
+          </a:xfrm>
+          <a:prstGeom prst="rect">
+            <a:avLst/>
+          </a:prstGeom>
+          <a:solidFill>
+            <a:srgbClr val="4F46E5"/>
+          </a:solidFill>
+          <a:ln>
+            <a:noFill/>
+          </a:ln>
+          <a:effectLst/>
+        </p:spPr>
+        <p:style>
+          <a:lnRef idx="1">
+            <a:schemeClr val="accent1"/>
+          </a:lnRef>
+          <a:fillRef idx="3">
+            <a:schemeClr val="accent1"/>
+          </a:fillRef>
+          <a:effectRef idx="2">
+            <a:schemeClr val="accent1"/>
+          </a:effectRef>
+          <a:fontRef idx="minor">
+            <a:schemeClr val="lt1"/>
+          </a:fontRef>
+        </p:style>
+        <p:txBody>
+          <a:bodyPr rtlCol="0" anchor="ctr"/>
+          <a:lstStyle/>
+          <a:p>
+            <a:pPr algn="ctr"/>
+          </a:p>
+        </p:txBody>
+      </p:sp>
+      <p:sp>
+        <p:nvSpPr>
+          <p:cNvPr id="3" name="Rectangle 2"/>
+          <p:cNvSpPr/>
+          <p:nvPr/>
+        </p:nvSpPr>
+        <p:spPr>
+          <a:xfrm>
+            <a:off x="0" y="566928"/>
+            <a:ext cx="12191695" cy="54864"/>
+          </a:xfrm>
+          <a:prstGeom prst="rect">
+            <a:avLst/>
+          </a:prstGeom>
+          <a:solidFill>
+            <a:srgbClr val="FF9F1C"/>
+          </a:solidFill>
+          <a:ln>
+            <a:noFill/>
+          </a:ln>
+          <a:effectLst/>
+        </p:spPr>
+        <p:style>
+          <a:lnRef idx="1">
+            <a:schemeClr val="accent1"/>
+          </a:lnRef>
+          <a:fillRef idx="3">
+            <a:schemeClr val="accent1"/>
+          </a:fillRef>
+          <a:effectRef idx="2">
+            <a:schemeClr val="accent1"/>
+          </a:effectRef>
+          <a:fontRef idx="minor">
+            <a:schemeClr val="lt1"/>
+          </a:fontRef>
+        </p:style>
+        <p:txBody>
+          <a:bodyPr rtlCol="0" anchor="ctr"/>
+          <a:lstStyle/>
+          <a:p>
+            <a:pPr algn="ctr"/>
+          </a:p>
+        </p:txBody>
+      </p:sp>
+      <p:sp>
+        <p:nvSpPr>
+          <p:cNvPr id="4" name="TextBox 3"/>
+          <p:cNvSpPr txBox="1"/>
+          <p:nvPr/>
+        </p:nvSpPr>
+        <p:spPr>
+          <a:xfrm>
+            <a:off x="365760" y="27432"/>
+            <a:ext cx="7315200" cy="502920"/>
+          </a:xfrm>
+          <a:prstGeom prst="rect">
+            <a:avLst/>
+          </a:prstGeom>
+          <a:noFill/>
+        </p:spPr>
+        <p:txBody>
+          <a:bodyPr wrap="square" anchor="ctr">
+            <a:spAutoFit/>
+          </a:bodyPr>
+          <a:lstStyle/>
+          <a:p>
+            <a:pPr algn="l">
+              <a:lnSpc>
+                <a:spcPct val="100000"/>
+              </a:lnSpc>
+            </a:pPr>
+            <a:r>
+              <a:rPr sz="1500" b="1">
+                <a:solidFill>
+                  <a:srgbClr val="FFFFFF"/>
+                </a:solidFill>
+                <a:latin typeface="Malgun Gothic"/>
+              </a:rPr>
+              <a:t>🏫 Mangoi Admin User Guide</a:t>
+            </a:r>
+          </a:p>
+        </p:txBody>
+      </p:sp>
+      <p:sp>
+        <p:nvSpPr>
+          <p:cNvPr id="5" name="TextBox 4"/>
+          <p:cNvSpPr txBox="1"/>
+          <p:nvPr/>
+        </p:nvSpPr>
+        <p:spPr>
+          <a:xfrm>
+            <a:off x="8168335" y="27432"/>
+            <a:ext cx="3657600" cy="502920"/>
+          </a:xfrm>
+          <a:prstGeom prst="rect">
+            <a:avLst/>
+          </a:prstGeom>
+          <a:noFill/>
+        </p:spPr>
+        <p:txBody>
+          <a:bodyPr wrap="square" anchor="ctr">
+            <a:spAutoFit/>
+          </a:bodyPr>
+          <a:lstStyle/>
+          <a:p>
+            <a:pPr algn="r">
+              <a:lnSpc>
+                <a:spcPct val="100000"/>
+              </a:lnSpc>
+            </a:pPr>
+            <a:r>
+              <a:rPr sz="1300" b="1">
+                <a:solidFill>
+                  <a:srgbClr val="F1F5F9"/>
+                </a:solidFill>
+                <a:latin typeface="Malgun Gothic"/>
+              </a:rPr>
+              <a:t>Feature Summary · Data</a:t>
+            </a:r>
+          </a:p>
+        </p:txBody>
+      </p:sp>
+      <p:sp>
+        <p:nvSpPr>
+          <p:cNvPr id="6" name="Rounded Rectangle 5"/>
+          <p:cNvSpPr/>
+          <p:nvPr/>
+        </p:nvSpPr>
+        <p:spPr>
+          <a:xfrm>
             <a:off x="365760" y="841248"/>
             <a:ext cx="658368" cy="512064"/>
           </a:xfrm>
+          <a:prstGeom prst="roundRect">
+            <a:avLst/>
+          </a:prstGeom>
+          <a:solidFill>
+            <a:srgbClr val="4F46E5"/>
+          </a:solidFill>
+          <a:ln>
+            <a:noFill/>
+          </a:ln>
+          <a:effectLst/>
+        </p:spPr>
+        <p:style>
+          <a:lnRef idx="1">
+            <a:schemeClr val="accent1"/>
+          </a:lnRef>
+          <a:fillRef idx="3">
+            <a:schemeClr val="accent1"/>
+          </a:fillRef>
+          <a:effectRef idx="2">
+            <a:schemeClr val="accent1"/>
+          </a:effectRef>
+          <a:fontRef idx="minor">
+            <a:schemeClr val="lt1"/>
+          </a:fontRef>
+        </p:style>
+        <p:txBody>
+          <a:bodyPr rtlCol="0" anchor="ctr"/>
+          <a:lstStyle/>
+          <a:p>
+            <a:pPr algn="ctr"/>
+          </a:p>
+        </p:txBody>
+      </p:sp>
+      <p:sp>
+        <p:nvSpPr>
+          <p:cNvPr id="7" name="TextBox 6"/>
+          <p:cNvSpPr txBox="1"/>
+          <p:nvPr/>
+        </p:nvSpPr>
+        <p:spPr>
+          <a:xfrm>
+            <a:off x="365760" y="841248"/>
+            <a:ext cx="658368" cy="512064"/>
+          </a:xfrm>
           <a:prstGeom prst="rect">
             <a:avLst/>
           </a:prstGeom>
@@ -42871,7 +45335,7 @@
                 </a:solidFill>
                 <a:latin typeface="Malgun Gothic"/>
               </a:rPr>
-              <a:t>37</a:t>
+              <a:t>39</a:t>
             </a:r>
           </a:p>
         </p:txBody>
@@ -43609,7 +46073,7 @@
 </p:sld>
 </file>
 
-<file path=ppt/slides/slide42.xml><?xml version="1.0" encoding="utf-8"?>
+<file path=ppt/slides/slide44.xml><?xml version="1.0" encoding="utf-8"?>
 <p:sld xmlns:a="http://schemas.openxmlformats.org/drawingml/2006/main" xmlns:p="http://schemas.openxmlformats.org/presentationml/2006/main" xmlns:r="http://schemas.openxmlformats.org/officeDocument/2006/relationships">
   <p:cSld>
     <p:bg>
@@ -43871,7 +46335,7 @@
                 </a:solidFill>
                 <a:latin typeface="Malgun Gothic"/>
               </a:rPr>
-              <a:t>38</a:t>
+              <a:t>40</a:t>
             </a:r>
           </a:p>
         </p:txBody>
@@ -44029,1997 +46493,6 @@
           </a:graphicData>
         </a:graphic>
       </p:graphicFrame>
-    </p:spTree>
-  </p:cSld>
-  <p:clrMapOvr>
-    <a:masterClrMapping/>
-  </p:clrMapOvr>
-</p:sld>
-</file>
-
-<file path=ppt/slides/slide43.xml><?xml version="1.0" encoding="utf-8"?>
-<p:sld xmlns:a="http://schemas.openxmlformats.org/drawingml/2006/main" xmlns:p="http://schemas.openxmlformats.org/presentationml/2006/main" xmlns:r="http://schemas.openxmlformats.org/officeDocument/2006/relationships">
-  <p:cSld>
-    <p:bg>
-      <p:bgPr>
-        <a:solidFill>
-          <a:srgbClr val="FFFFFF"/>
-        </a:solidFill>
-        <a:effectLst/>
-      </p:bgPr>
-    </p:bg>
-    <p:spTree>
-      <p:nvGrpSpPr>
-        <p:cNvPr id="1" name=""/>
-        <p:cNvGrpSpPr/>
-        <p:nvPr/>
-      </p:nvGrpSpPr>
-      <p:grpSpPr/>
-      <p:sp>
-        <p:nvSpPr>
-          <p:cNvPr id="2" name="Rectangle 1"/>
-          <p:cNvSpPr/>
-          <p:nvPr/>
-        </p:nvSpPr>
-        <p:spPr>
-          <a:xfrm>
-            <a:off x="0" y="0"/>
-            <a:ext cx="12191695" cy="566928"/>
-          </a:xfrm>
-          <a:prstGeom prst="rect">
-            <a:avLst/>
-          </a:prstGeom>
-          <a:solidFill>
-            <a:srgbClr val="4F46E5"/>
-          </a:solidFill>
-          <a:ln>
-            <a:noFill/>
-          </a:ln>
-          <a:effectLst/>
-        </p:spPr>
-        <p:style>
-          <a:lnRef idx="1">
-            <a:schemeClr val="accent1"/>
-          </a:lnRef>
-          <a:fillRef idx="3">
-            <a:schemeClr val="accent1"/>
-          </a:fillRef>
-          <a:effectRef idx="2">
-            <a:schemeClr val="accent1"/>
-          </a:effectRef>
-          <a:fontRef idx="minor">
-            <a:schemeClr val="lt1"/>
-          </a:fontRef>
-        </p:style>
-        <p:txBody>
-          <a:bodyPr rtlCol="0" anchor="ctr"/>
-          <a:lstStyle/>
-          <a:p>
-            <a:pPr algn="ctr"/>
-          </a:p>
-        </p:txBody>
-      </p:sp>
-      <p:sp>
-        <p:nvSpPr>
-          <p:cNvPr id="3" name="Rectangle 2"/>
-          <p:cNvSpPr/>
-          <p:nvPr/>
-        </p:nvSpPr>
-        <p:spPr>
-          <a:xfrm>
-            <a:off x="0" y="566928"/>
-            <a:ext cx="12191695" cy="54864"/>
-          </a:xfrm>
-          <a:prstGeom prst="rect">
-            <a:avLst/>
-          </a:prstGeom>
-          <a:solidFill>
-            <a:srgbClr val="FF9F1C"/>
-          </a:solidFill>
-          <a:ln>
-            <a:noFill/>
-          </a:ln>
-          <a:effectLst/>
-        </p:spPr>
-        <p:style>
-          <a:lnRef idx="1">
-            <a:schemeClr val="accent1"/>
-          </a:lnRef>
-          <a:fillRef idx="3">
-            <a:schemeClr val="accent1"/>
-          </a:fillRef>
-          <a:effectRef idx="2">
-            <a:schemeClr val="accent1"/>
-          </a:effectRef>
-          <a:fontRef idx="minor">
-            <a:schemeClr val="lt1"/>
-          </a:fontRef>
-        </p:style>
-        <p:txBody>
-          <a:bodyPr rtlCol="0" anchor="ctr"/>
-          <a:lstStyle/>
-          <a:p>
-            <a:pPr algn="ctr"/>
-          </a:p>
-        </p:txBody>
-      </p:sp>
-      <p:sp>
-        <p:nvSpPr>
-          <p:cNvPr id="4" name="TextBox 3"/>
-          <p:cNvSpPr txBox="1"/>
-          <p:nvPr/>
-        </p:nvSpPr>
-        <p:spPr>
-          <a:xfrm>
-            <a:off x="365760" y="27432"/>
-            <a:ext cx="7315200" cy="502920"/>
-          </a:xfrm>
-          <a:prstGeom prst="rect">
-            <a:avLst/>
-          </a:prstGeom>
-          <a:noFill/>
-        </p:spPr>
-        <p:txBody>
-          <a:bodyPr wrap="square" anchor="ctr">
-            <a:spAutoFit/>
-          </a:bodyPr>
-          <a:lstStyle/>
-          <a:p>
-            <a:pPr algn="l">
-              <a:lnSpc>
-                <a:spcPct val="100000"/>
-              </a:lnSpc>
-            </a:pPr>
-            <a:r>
-              <a:rPr sz="1500" b="1">
-                <a:solidFill>
-                  <a:srgbClr val="FFFFFF"/>
-                </a:solidFill>
-                <a:latin typeface="Malgun Gothic"/>
-              </a:rPr>
-              <a:t>🏫 Mangoi Admin User Guide</a:t>
-            </a:r>
-          </a:p>
-        </p:txBody>
-      </p:sp>
-      <p:sp>
-        <p:nvSpPr>
-          <p:cNvPr id="5" name="TextBox 4"/>
-          <p:cNvSpPr txBox="1"/>
-          <p:nvPr/>
-        </p:nvSpPr>
-        <p:spPr>
-          <a:xfrm>
-            <a:off x="8168335" y="27432"/>
-            <a:ext cx="3657600" cy="502920"/>
-          </a:xfrm>
-          <a:prstGeom prst="rect">
-            <a:avLst/>
-          </a:prstGeom>
-          <a:noFill/>
-        </p:spPr>
-        <p:txBody>
-          <a:bodyPr wrap="square" anchor="ctr">
-            <a:spAutoFit/>
-          </a:bodyPr>
-          <a:lstStyle/>
-          <a:p>
-            <a:pPr algn="r">
-              <a:lnSpc>
-                <a:spcPct val="100000"/>
-              </a:lnSpc>
-            </a:pPr>
-            <a:r>
-              <a:rPr sz="1300" b="1">
-                <a:solidFill>
-                  <a:srgbClr val="F1F5F9"/>
-                </a:solidFill>
-                <a:latin typeface="Malgun Gothic"/>
-              </a:rPr>
-              <a:t>Frequently Asked Questions (FAQ)</a:t>
-            </a:r>
-          </a:p>
-        </p:txBody>
-      </p:sp>
-      <p:sp>
-        <p:nvSpPr>
-          <p:cNvPr id="6" name="Rounded Rectangle 5"/>
-          <p:cNvSpPr/>
-          <p:nvPr/>
-        </p:nvSpPr>
-        <p:spPr>
-          <a:xfrm>
-            <a:off x="365760" y="841248"/>
-            <a:ext cx="658368" cy="512064"/>
-          </a:xfrm>
-          <a:prstGeom prst="roundRect">
-            <a:avLst/>
-          </a:prstGeom>
-          <a:solidFill>
-            <a:srgbClr val="4F46E5"/>
-          </a:solidFill>
-          <a:ln>
-            <a:noFill/>
-          </a:ln>
-          <a:effectLst/>
-        </p:spPr>
-        <p:style>
-          <a:lnRef idx="1">
-            <a:schemeClr val="accent1"/>
-          </a:lnRef>
-          <a:fillRef idx="3">
-            <a:schemeClr val="accent1"/>
-          </a:fillRef>
-          <a:effectRef idx="2">
-            <a:schemeClr val="accent1"/>
-          </a:effectRef>
-          <a:fontRef idx="minor">
-            <a:schemeClr val="lt1"/>
-          </a:fontRef>
-        </p:style>
-        <p:txBody>
-          <a:bodyPr rtlCol="0" anchor="ctr"/>
-          <a:lstStyle/>
-          <a:p>
-            <a:pPr algn="ctr"/>
-          </a:p>
-        </p:txBody>
-      </p:sp>
-      <p:sp>
-        <p:nvSpPr>
-          <p:cNvPr id="7" name="TextBox 6"/>
-          <p:cNvSpPr txBox="1"/>
-          <p:nvPr/>
-        </p:nvSpPr>
-        <p:spPr>
-          <a:xfrm>
-            <a:off x="365760" y="841248"/>
-            <a:ext cx="658368" cy="512064"/>
-          </a:xfrm>
-          <a:prstGeom prst="rect">
-            <a:avLst/>
-          </a:prstGeom>
-          <a:noFill/>
-        </p:spPr>
-        <p:txBody>
-          <a:bodyPr wrap="square" anchor="ctr">
-            <a:spAutoFit/>
-          </a:bodyPr>
-          <a:lstStyle/>
-          <a:p>
-            <a:pPr algn="ctr">
-              <a:lnSpc>
-                <a:spcPct val="100000"/>
-              </a:lnSpc>
-            </a:pPr>
-            <a:r>
-              <a:rPr sz="1700" b="1">
-                <a:solidFill>
-                  <a:srgbClr val="FFFFFF"/>
-                </a:solidFill>
-                <a:latin typeface="Malgun Gothic"/>
-              </a:rPr>
-              <a:t>39</a:t>
-            </a:r>
-          </a:p>
-        </p:txBody>
-      </p:sp>
-      <p:sp>
-        <p:nvSpPr>
-          <p:cNvPr id="8" name="TextBox 7"/>
-          <p:cNvSpPr txBox="1"/>
-          <p:nvPr/>
-        </p:nvSpPr>
-        <p:spPr>
-          <a:xfrm>
-            <a:off x="1143000" y="868680"/>
-            <a:ext cx="9144000" cy="457200"/>
-          </a:xfrm>
-          <a:prstGeom prst="rect">
-            <a:avLst/>
-          </a:prstGeom>
-          <a:noFill/>
-        </p:spPr>
-        <p:txBody>
-          <a:bodyPr wrap="square" anchor="t">
-            <a:spAutoFit/>
-          </a:bodyPr>
-          <a:lstStyle/>
-          <a:p>
-            <a:pPr algn="l">
-              <a:lnSpc>
-                <a:spcPct val="100000"/>
-              </a:lnSpc>
-            </a:pPr>
-            <a:r>
-              <a:rPr sz="2200" b="1">
-                <a:solidFill>
-                  <a:srgbClr val="4F46E5"/>
-                </a:solidFill>
-                <a:latin typeface="Malgun Gothic"/>
-              </a:rPr>
-              <a:t>❓ Frequently Asked Questions (FAQ)</a:t>
-            </a:r>
-          </a:p>
-        </p:txBody>
-      </p:sp>
-      <p:sp>
-        <p:nvSpPr>
-          <p:cNvPr id="9" name="Rounded Rectangle 8"/>
-          <p:cNvSpPr/>
-          <p:nvPr/>
-        </p:nvSpPr>
-        <p:spPr>
-          <a:xfrm>
-            <a:off x="365760" y="1554480"/>
-            <a:ext cx="11460175" cy="868680"/>
-          </a:xfrm>
-          <a:prstGeom prst="roundRect">
-            <a:avLst/>
-          </a:prstGeom>
-          <a:solidFill>
-            <a:srgbClr val="F8FAFC"/>
-          </a:solidFill>
-          <a:ln w="12700">
-            <a:solidFill>
-              <a:srgbClr val="E2E8F0"/>
-            </a:solidFill>
-          </a:ln>
-          <a:effectLst/>
-        </p:spPr>
-        <p:style>
-          <a:lnRef idx="1">
-            <a:schemeClr val="accent1"/>
-          </a:lnRef>
-          <a:fillRef idx="3">
-            <a:schemeClr val="accent1"/>
-          </a:fillRef>
-          <a:effectRef idx="2">
-            <a:schemeClr val="accent1"/>
-          </a:effectRef>
-          <a:fontRef idx="minor">
-            <a:schemeClr val="lt1"/>
-          </a:fontRef>
-        </p:style>
-        <p:txBody>
-          <a:bodyPr rtlCol="0" anchor="ctr"/>
-          <a:lstStyle/>
-          <a:p>
-            <a:pPr algn="ctr"/>
-          </a:p>
-        </p:txBody>
-      </p:sp>
-      <p:sp>
-        <p:nvSpPr>
-          <p:cNvPr id="10" name="TextBox 9"/>
-          <p:cNvSpPr txBox="1"/>
-          <p:nvPr/>
-        </p:nvSpPr>
-        <p:spPr>
-          <a:xfrm>
-            <a:off x="548640" y="1627632"/>
-            <a:ext cx="11094415" cy="365760"/>
-          </a:xfrm>
-          <a:prstGeom prst="rect">
-            <a:avLst/>
-          </a:prstGeom>
-          <a:noFill/>
-        </p:spPr>
-        <p:txBody>
-          <a:bodyPr wrap="square" anchor="t">
-            <a:spAutoFit/>
-          </a:bodyPr>
-          <a:lstStyle/>
-          <a:p>
-            <a:pPr algn="l">
-              <a:lnSpc>
-                <a:spcPct val="100000"/>
-              </a:lnSpc>
-            </a:pPr>
-            <a:r>
-              <a:rPr sz="1350" b="1">
-                <a:solidFill>
-                  <a:srgbClr val="4F46E5"/>
-                </a:solidFill>
-                <a:latin typeface="Malgun Gothic"/>
-              </a:rPr>
-              <a:t>Q. Where do I log in?</a:t>
-            </a:r>
-          </a:p>
-        </p:txBody>
-      </p:sp>
-      <p:sp>
-        <p:nvSpPr>
-          <p:cNvPr id="11" name="TextBox 10"/>
-          <p:cNvSpPr txBox="1"/>
-          <p:nvPr/>
-        </p:nvSpPr>
-        <p:spPr>
-          <a:xfrm>
-            <a:off x="548640" y="1965960"/>
-            <a:ext cx="11094415" cy="411480"/>
-          </a:xfrm>
-          <a:prstGeom prst="rect">
-            <a:avLst/>
-          </a:prstGeom>
-          <a:noFill/>
-        </p:spPr>
-        <p:txBody>
-          <a:bodyPr wrap="square" anchor="t">
-            <a:spAutoFit/>
-          </a:bodyPr>
-          <a:lstStyle/>
-          <a:p>
-            <a:pPr algn="l">
-              <a:lnSpc>
-                <a:spcPct val="105000"/>
-              </a:lnSpc>
-            </a:pPr>
-            <a:r>
-              <a:rPr sz="1150" b="0">
-                <a:solidFill>
-                  <a:srgbClr val="475569"/>
-                </a:solidFill>
-                <a:latin typeface="Malgun Gothic"/>
-              </a:rPr>
-              <a:t>A. Log in at admin.mangoi.co.kr. Phone, tablet and PC all connect right from the web.</a:t>
-            </a:r>
-          </a:p>
-        </p:txBody>
-      </p:sp>
-      <p:sp>
-        <p:nvSpPr>
-          <p:cNvPr id="12" name="Rounded Rectangle 11"/>
-          <p:cNvSpPr/>
-          <p:nvPr/>
-        </p:nvSpPr>
-        <p:spPr>
-          <a:xfrm>
-            <a:off x="365760" y="2542032"/>
-            <a:ext cx="11460175" cy="868680"/>
-          </a:xfrm>
-          <a:prstGeom prst="roundRect">
-            <a:avLst/>
-          </a:prstGeom>
-          <a:solidFill>
-            <a:srgbClr val="F8FAFC"/>
-          </a:solidFill>
-          <a:ln w="12700">
-            <a:solidFill>
-              <a:srgbClr val="E2E8F0"/>
-            </a:solidFill>
-          </a:ln>
-          <a:effectLst/>
-        </p:spPr>
-        <p:style>
-          <a:lnRef idx="1">
-            <a:schemeClr val="accent1"/>
-          </a:lnRef>
-          <a:fillRef idx="3">
-            <a:schemeClr val="accent1"/>
-          </a:fillRef>
-          <a:effectRef idx="2">
-            <a:schemeClr val="accent1"/>
-          </a:effectRef>
-          <a:fontRef idx="minor">
-            <a:schemeClr val="lt1"/>
-          </a:fontRef>
-        </p:style>
-        <p:txBody>
-          <a:bodyPr rtlCol="0" anchor="ctr"/>
-          <a:lstStyle/>
-          <a:p>
-            <a:pPr algn="ctr"/>
-          </a:p>
-        </p:txBody>
-      </p:sp>
-      <p:sp>
-        <p:nvSpPr>
-          <p:cNvPr id="13" name="TextBox 12"/>
-          <p:cNvSpPr txBox="1"/>
-          <p:nvPr/>
-        </p:nvSpPr>
-        <p:spPr>
-          <a:xfrm>
-            <a:off x="548640" y="2615184"/>
-            <a:ext cx="11094415" cy="365760"/>
-          </a:xfrm>
-          <a:prstGeom prst="rect">
-            <a:avLst/>
-          </a:prstGeom>
-          <a:noFill/>
-        </p:spPr>
-        <p:txBody>
-          <a:bodyPr wrap="square" anchor="t">
-            <a:spAutoFit/>
-          </a:bodyPr>
-          <a:lstStyle/>
-          <a:p>
-            <a:pPr algn="l">
-              <a:lnSpc>
-                <a:spcPct val="100000"/>
-              </a:lnSpc>
-            </a:pPr>
-            <a:r>
-              <a:rPr sz="1350" b="1">
-                <a:solidFill>
-                  <a:srgbClr val="4F46E5"/>
-                </a:solidFill>
-                <a:latin typeface="Malgun Gothic"/>
-              </a:rPr>
-              <a:t>Q. I can't see a feature.</a:t>
-            </a:r>
-          </a:p>
-        </p:txBody>
-      </p:sp>
-      <p:sp>
-        <p:nvSpPr>
-          <p:cNvPr id="14" name="TextBox 13"/>
-          <p:cNvSpPr txBox="1"/>
-          <p:nvPr/>
-        </p:nvSpPr>
-        <p:spPr>
-          <a:xfrm>
-            <a:off x="548640" y="2953512"/>
-            <a:ext cx="11094415" cy="411480"/>
-          </a:xfrm>
-          <a:prstGeom prst="rect">
-            <a:avLst/>
-          </a:prstGeom>
-          <a:noFill/>
-        </p:spPr>
-        <p:txBody>
-          <a:bodyPr wrap="square" anchor="t">
-            <a:spAutoFit/>
-          </a:bodyPr>
-          <a:lstStyle/>
-          <a:p>
-            <a:pPr algn="l">
-              <a:lnSpc>
-                <a:spcPct val="105000"/>
-              </a:lnSpc>
-            </a:pPr>
-            <a:r>
-              <a:rPr sz="1150" b="0">
-                <a:solidFill>
-                  <a:srgbClr val="475569"/>
-                </a:solidFill>
-                <a:latin typeface="Malgun Gothic"/>
-              </a:rPr>
-              <a:t>A. Menus vary by role. Use the top feature search or ask the AI assistant by name.</a:t>
-            </a:r>
-          </a:p>
-        </p:txBody>
-      </p:sp>
-      <p:sp>
-        <p:nvSpPr>
-          <p:cNvPr id="15" name="Rounded Rectangle 14"/>
-          <p:cNvSpPr/>
-          <p:nvPr/>
-        </p:nvSpPr>
-        <p:spPr>
-          <a:xfrm>
-            <a:off x="365760" y="3529584"/>
-            <a:ext cx="11460175" cy="868680"/>
-          </a:xfrm>
-          <a:prstGeom prst="roundRect">
-            <a:avLst/>
-          </a:prstGeom>
-          <a:solidFill>
-            <a:srgbClr val="F8FAFC"/>
-          </a:solidFill>
-          <a:ln w="12700">
-            <a:solidFill>
-              <a:srgbClr val="E2E8F0"/>
-            </a:solidFill>
-          </a:ln>
-          <a:effectLst/>
-        </p:spPr>
-        <p:style>
-          <a:lnRef idx="1">
-            <a:schemeClr val="accent1"/>
-          </a:lnRef>
-          <a:fillRef idx="3">
-            <a:schemeClr val="accent1"/>
-          </a:fillRef>
-          <a:effectRef idx="2">
-            <a:schemeClr val="accent1"/>
-          </a:effectRef>
-          <a:fontRef idx="minor">
-            <a:schemeClr val="lt1"/>
-          </a:fontRef>
-        </p:style>
-        <p:txBody>
-          <a:bodyPr rtlCol="0" anchor="ctr"/>
-          <a:lstStyle/>
-          <a:p>
-            <a:pPr algn="ctr"/>
-          </a:p>
-        </p:txBody>
-      </p:sp>
-      <p:sp>
-        <p:nvSpPr>
-          <p:cNvPr id="16" name="TextBox 15"/>
-          <p:cNvSpPr txBox="1"/>
-          <p:nvPr/>
-        </p:nvSpPr>
-        <p:spPr>
-          <a:xfrm>
-            <a:off x="548640" y="3602736"/>
-            <a:ext cx="11094415" cy="365760"/>
-          </a:xfrm>
-          <a:prstGeom prst="rect">
-            <a:avLst/>
-          </a:prstGeom>
-          <a:noFill/>
-        </p:spPr>
-        <p:txBody>
-          <a:bodyPr wrap="square" anchor="t">
-            <a:spAutoFit/>
-          </a:bodyPr>
-          <a:lstStyle/>
-          <a:p>
-            <a:pPr algn="l">
-              <a:lnSpc>
-                <a:spcPct val="100000"/>
-              </a:lnSpc>
-            </a:pPr>
-            <a:r>
-              <a:rPr sz="1350" b="1">
-                <a:solidFill>
-                  <a:srgbClr val="4F46E5"/>
-                </a:solidFill>
-                <a:latin typeface="Malgun Gothic"/>
-              </a:rPr>
-              <a:t>Q. A student can't enter a lesson.</a:t>
-            </a:r>
-          </a:p>
-        </p:txBody>
-      </p:sp>
-      <p:sp>
-        <p:nvSpPr>
-          <p:cNvPr id="17" name="TextBox 16"/>
-          <p:cNvSpPr txBox="1"/>
-          <p:nvPr/>
-        </p:nvSpPr>
-        <p:spPr>
-          <a:xfrm>
-            <a:off x="548640" y="3941064"/>
-            <a:ext cx="11094415" cy="411480"/>
-          </a:xfrm>
-          <a:prstGeom prst="rect">
-            <a:avLst/>
-          </a:prstGeom>
-          <a:noFill/>
-        </p:spPr>
-        <p:txBody>
-          <a:bodyPr wrap="square" anchor="t">
-            <a:spAutoFit/>
-          </a:bodyPr>
-          <a:lstStyle/>
-          <a:p>
-            <a:pPr algn="l">
-              <a:lnSpc>
-                <a:spcPct val="105000"/>
-              </a:lnSpc>
-            </a:pPr>
-            <a:r>
-              <a:rPr sz="1150" b="0">
-                <a:solidFill>
-                  <a:srgbClr val="475569"/>
-                </a:solidFill>
-                <a:latin typeface="Malgun Gothic"/>
-              </a:rPr>
-              <a:t>A. Usually a browser permission issue. Advise reconnecting in Chrome/Edge and allowing camera/mic. Inside KakaoTalk, open in an external browser.</a:t>
-            </a:r>
-          </a:p>
-        </p:txBody>
-      </p:sp>
-      <p:sp>
-        <p:nvSpPr>
-          <p:cNvPr id="18" name="Rounded Rectangle 17"/>
-          <p:cNvSpPr/>
-          <p:nvPr/>
-        </p:nvSpPr>
-        <p:spPr>
-          <a:xfrm>
-            <a:off x="365760" y="4517136"/>
-            <a:ext cx="11460175" cy="868680"/>
-          </a:xfrm>
-          <a:prstGeom prst="roundRect">
-            <a:avLst/>
-          </a:prstGeom>
-          <a:solidFill>
-            <a:srgbClr val="F8FAFC"/>
-          </a:solidFill>
-          <a:ln w="12700">
-            <a:solidFill>
-              <a:srgbClr val="E2E8F0"/>
-            </a:solidFill>
-          </a:ln>
-          <a:effectLst/>
-        </p:spPr>
-        <p:style>
-          <a:lnRef idx="1">
-            <a:schemeClr val="accent1"/>
-          </a:lnRef>
-          <a:fillRef idx="3">
-            <a:schemeClr val="accent1"/>
-          </a:fillRef>
-          <a:effectRef idx="2">
-            <a:schemeClr val="accent1"/>
-          </a:effectRef>
-          <a:fontRef idx="minor">
-            <a:schemeClr val="lt1"/>
-          </a:fontRef>
-        </p:style>
-        <p:txBody>
-          <a:bodyPr rtlCol="0" anchor="ctr"/>
-          <a:lstStyle/>
-          <a:p>
-            <a:pPr algn="ctr"/>
-          </a:p>
-        </p:txBody>
-      </p:sp>
-      <p:sp>
-        <p:nvSpPr>
-          <p:cNvPr id="19" name="TextBox 18"/>
-          <p:cNvSpPr txBox="1"/>
-          <p:nvPr/>
-        </p:nvSpPr>
-        <p:spPr>
-          <a:xfrm>
-            <a:off x="548640" y="4590288"/>
-            <a:ext cx="11094415" cy="365760"/>
-          </a:xfrm>
-          <a:prstGeom prst="rect">
-            <a:avLst/>
-          </a:prstGeom>
-          <a:noFill/>
-        </p:spPr>
-        <p:txBody>
-          <a:bodyPr wrap="square" anchor="t">
-            <a:spAutoFit/>
-          </a:bodyPr>
-          <a:lstStyle/>
-          <a:p>
-            <a:pPr algn="l">
-              <a:lnSpc>
-                <a:spcPct val="100000"/>
-              </a:lnSpc>
-            </a:pPr>
-            <a:r>
-              <a:rPr sz="1350" b="1">
-                <a:solidFill>
-                  <a:srgbClr val="4F46E5"/>
-                </a:solidFill>
-                <a:latin typeface="Malgun Gothic"/>
-              </a:rPr>
-              <a:t>Q. Does the AI assistant execute tasks?</a:t>
-            </a:r>
-          </a:p>
-        </p:txBody>
-      </p:sp>
-      <p:sp>
-        <p:nvSpPr>
-          <p:cNvPr id="20" name="TextBox 19"/>
-          <p:cNvSpPr txBox="1"/>
-          <p:nvPr/>
-        </p:nvSpPr>
-        <p:spPr>
-          <a:xfrm>
-            <a:off x="548640" y="4928616"/>
-            <a:ext cx="11094415" cy="411480"/>
-          </a:xfrm>
-          <a:prstGeom prst="rect">
-            <a:avLst/>
-          </a:prstGeom>
-          <a:noFill/>
-        </p:spPr>
-        <p:txBody>
-          <a:bodyPr wrap="square" anchor="t">
-            <a:spAutoFit/>
-          </a:bodyPr>
-          <a:lstStyle/>
-          <a:p>
-            <a:pPr algn="l">
-              <a:lnSpc>
-                <a:spcPct val="105000"/>
-              </a:lnSpc>
-            </a:pPr>
-            <a:r>
-              <a:rPr sz="1150" b="0">
-                <a:solidFill>
-                  <a:srgbClr val="475569"/>
-                </a:solidFill>
-                <a:latin typeface="Malgun Gothic"/>
-              </a:rPr>
-              <a:t>A. Look-ups happen instantly; important actions are confirmed with 'Shall I?' It only does what you have permission for.</a:t>
-            </a:r>
-          </a:p>
-        </p:txBody>
-      </p:sp>
-      <p:sp>
-        <p:nvSpPr>
-          <p:cNvPr id="21" name="Rounded Rectangle 20"/>
-          <p:cNvSpPr/>
-          <p:nvPr/>
-        </p:nvSpPr>
-        <p:spPr>
-          <a:xfrm>
-            <a:off x="365760" y="5504688"/>
-            <a:ext cx="11460175" cy="868680"/>
-          </a:xfrm>
-          <a:prstGeom prst="roundRect">
-            <a:avLst/>
-          </a:prstGeom>
-          <a:solidFill>
-            <a:srgbClr val="F8FAFC"/>
-          </a:solidFill>
-          <a:ln w="12700">
-            <a:solidFill>
-              <a:srgbClr val="E2E8F0"/>
-            </a:solidFill>
-          </a:ln>
-          <a:effectLst/>
-        </p:spPr>
-        <p:style>
-          <a:lnRef idx="1">
-            <a:schemeClr val="accent1"/>
-          </a:lnRef>
-          <a:fillRef idx="3">
-            <a:schemeClr val="accent1"/>
-          </a:fillRef>
-          <a:effectRef idx="2">
-            <a:schemeClr val="accent1"/>
-          </a:effectRef>
-          <a:fontRef idx="minor">
-            <a:schemeClr val="lt1"/>
-          </a:fontRef>
-        </p:style>
-        <p:txBody>
-          <a:bodyPr rtlCol="0" anchor="ctr"/>
-          <a:lstStyle/>
-          <a:p>
-            <a:pPr algn="ctr"/>
-          </a:p>
-        </p:txBody>
-      </p:sp>
-      <p:sp>
-        <p:nvSpPr>
-          <p:cNvPr id="22" name="TextBox 21"/>
-          <p:cNvSpPr txBox="1"/>
-          <p:nvPr/>
-        </p:nvSpPr>
-        <p:spPr>
-          <a:xfrm>
-            <a:off x="548640" y="5577840"/>
-            <a:ext cx="11094415" cy="365760"/>
-          </a:xfrm>
-          <a:prstGeom prst="rect">
-            <a:avLst/>
-          </a:prstGeom>
-          <a:noFill/>
-        </p:spPr>
-        <p:txBody>
-          <a:bodyPr wrap="square" anchor="t">
-            <a:spAutoFit/>
-          </a:bodyPr>
-          <a:lstStyle/>
-          <a:p>
-            <a:pPr algn="l">
-              <a:lnSpc>
-                <a:spcPct val="100000"/>
-              </a:lnSpc>
-            </a:pPr>
-            <a:r>
-              <a:rPr sz="1350" b="1">
-                <a:solidFill>
-                  <a:srgbClr val="4F46E5"/>
-                </a:solidFill>
-                <a:latin typeface="Malgun Gothic"/>
-              </a:rPr>
-              <a:t>Q. Refund math is confusing.</a:t>
-            </a:r>
-          </a:p>
-        </p:txBody>
-      </p:sp>
-      <p:sp>
-        <p:nvSpPr>
-          <p:cNvPr id="23" name="TextBox 22"/>
-          <p:cNvSpPr txBox="1"/>
-          <p:nvPr/>
-        </p:nvSpPr>
-        <p:spPr>
-          <a:xfrm>
-            <a:off x="548640" y="5916168"/>
-            <a:ext cx="11094415" cy="411480"/>
-          </a:xfrm>
-          <a:prstGeom prst="rect">
-            <a:avLst/>
-          </a:prstGeom>
-          <a:noFill/>
-        </p:spPr>
-        <p:txBody>
-          <a:bodyPr wrap="square" anchor="t">
-            <a:spAutoFit/>
-          </a:bodyPr>
-          <a:lstStyle/>
-          <a:p>
-            <a:pPr algn="l">
-              <a:lnSpc>
-                <a:spcPct val="105000"/>
-              </a:lnSpc>
-            </a:pPr>
-            <a:r>
-              <a:rPr sz="1150" b="0">
-                <a:solidFill>
-                  <a:srgbClr val="475569"/>
-                </a:solidFill>
-                <a:latin typeface="Malgun Gothic"/>
-              </a:rPr>
-              <a:t>A. It's auto-calculated by the refund table; discounted payments are recalculated at list price.</a:t>
-            </a:r>
-          </a:p>
-        </p:txBody>
-      </p:sp>
-      <p:sp>
-        <p:nvSpPr>
-          <p:cNvPr id="24" name="Rounded Rectangle 23"/>
-          <p:cNvSpPr/>
-          <p:nvPr/>
-        </p:nvSpPr>
-        <p:spPr>
-          <a:xfrm>
-            <a:off x="365760" y="6492240"/>
-            <a:ext cx="11460175" cy="868680"/>
-          </a:xfrm>
-          <a:prstGeom prst="roundRect">
-            <a:avLst/>
-          </a:prstGeom>
-          <a:solidFill>
-            <a:srgbClr val="F8FAFC"/>
-          </a:solidFill>
-          <a:ln w="12700">
-            <a:solidFill>
-              <a:srgbClr val="E2E8F0"/>
-            </a:solidFill>
-          </a:ln>
-          <a:effectLst/>
-        </p:spPr>
-        <p:style>
-          <a:lnRef idx="1">
-            <a:schemeClr val="accent1"/>
-          </a:lnRef>
-          <a:fillRef idx="3">
-            <a:schemeClr val="accent1"/>
-          </a:fillRef>
-          <a:effectRef idx="2">
-            <a:schemeClr val="accent1"/>
-          </a:effectRef>
-          <a:fontRef idx="minor">
-            <a:schemeClr val="lt1"/>
-          </a:fontRef>
-        </p:style>
-        <p:txBody>
-          <a:bodyPr rtlCol="0" anchor="ctr"/>
-          <a:lstStyle/>
-          <a:p>
-            <a:pPr algn="ctr"/>
-          </a:p>
-        </p:txBody>
-      </p:sp>
-      <p:sp>
-        <p:nvSpPr>
-          <p:cNvPr id="25" name="TextBox 24"/>
-          <p:cNvSpPr txBox="1"/>
-          <p:nvPr/>
-        </p:nvSpPr>
-        <p:spPr>
-          <a:xfrm>
-            <a:off x="548640" y="6565392"/>
-            <a:ext cx="11094415" cy="365760"/>
-          </a:xfrm>
-          <a:prstGeom prst="rect">
-            <a:avLst/>
-          </a:prstGeom>
-          <a:noFill/>
-        </p:spPr>
-        <p:txBody>
-          <a:bodyPr wrap="square" anchor="t">
-            <a:spAutoFit/>
-          </a:bodyPr>
-          <a:lstStyle/>
-          <a:p>
-            <a:pPr algn="l">
-              <a:lnSpc>
-                <a:spcPct val="100000"/>
-              </a:lnSpc>
-            </a:pPr>
-            <a:r>
-              <a:rPr sz="1350" b="1">
-                <a:solidFill>
-                  <a:srgbClr val="4F46E5"/>
-                </a:solidFill>
-                <a:latin typeface="Malgun Gothic"/>
-              </a:rPr>
-              <a:t>Q. I'm worried about churn.</a:t>
-            </a:r>
-          </a:p>
-        </p:txBody>
-      </p:sp>
-      <p:sp>
-        <p:nvSpPr>
-          <p:cNvPr id="26" name="TextBox 25"/>
-          <p:cNvSpPr txBox="1"/>
-          <p:nvPr/>
-        </p:nvSpPr>
-        <p:spPr>
-          <a:xfrm>
-            <a:off x="548640" y="6903720"/>
-            <a:ext cx="11094415" cy="411480"/>
-          </a:xfrm>
-          <a:prstGeom prst="rect">
-            <a:avLst/>
-          </a:prstGeom>
-          <a:noFill/>
-        </p:spPr>
-        <p:txBody>
-          <a:bodyPr wrap="square" anchor="t">
-            <a:spAutoFit/>
-          </a:bodyPr>
-          <a:lstStyle/>
-          <a:p>
-            <a:pPr algn="l">
-              <a:lnSpc>
-                <a:spcPct val="105000"/>
-              </a:lnSpc>
-            </a:pPr>
-            <a:r>
-              <a:rPr sz="1150" b="0">
-                <a:solidFill>
-                  <a:srgbClr val="475569"/>
-                </a:solidFill>
-                <a:latin typeface="Malgun Gothic"/>
-              </a:rPr>
-              <a:t>A. Find at-risk students early with the Retention Center's churn-risk/contagion network and intervene via alert-talk/counseling.</a:t>
-            </a:r>
-          </a:p>
-        </p:txBody>
-      </p:sp>
-    </p:spTree>
-  </p:cSld>
-  <p:clrMapOvr>
-    <a:masterClrMapping/>
-  </p:clrMapOvr>
-</p:sld>
-</file>
-
-<file path=ppt/slides/slide44.xml><?xml version="1.0" encoding="utf-8"?>
-<p:sld xmlns:a="http://schemas.openxmlformats.org/drawingml/2006/main" xmlns:p="http://schemas.openxmlformats.org/presentationml/2006/main" xmlns:r="http://schemas.openxmlformats.org/officeDocument/2006/relationships">
-  <p:cSld>
-    <p:bg>
-      <p:bgPr>
-        <a:solidFill>
-          <a:srgbClr val="EEF2FF"/>
-        </a:solidFill>
-        <a:effectLst/>
-      </p:bgPr>
-    </p:bg>
-    <p:spTree>
-      <p:nvGrpSpPr>
-        <p:cNvPr id="1" name=""/>
-        <p:cNvGrpSpPr/>
-        <p:nvPr/>
-      </p:nvGrpSpPr>
-      <p:grpSpPr/>
-      <p:sp>
-        <p:nvSpPr>
-          <p:cNvPr id="2" name="Rectangle 1"/>
-          <p:cNvSpPr/>
-          <p:nvPr/>
-        </p:nvSpPr>
-        <p:spPr>
-          <a:xfrm>
-            <a:off x="0" y="0"/>
-            <a:ext cx="12191695" cy="566928"/>
-          </a:xfrm>
-          <a:prstGeom prst="rect">
-            <a:avLst/>
-          </a:prstGeom>
-          <a:solidFill>
-            <a:srgbClr val="4F46E5"/>
-          </a:solidFill>
-          <a:ln>
-            <a:noFill/>
-          </a:ln>
-          <a:effectLst/>
-        </p:spPr>
-        <p:style>
-          <a:lnRef idx="1">
-            <a:schemeClr val="accent1"/>
-          </a:lnRef>
-          <a:fillRef idx="3">
-            <a:schemeClr val="accent1"/>
-          </a:fillRef>
-          <a:effectRef idx="2">
-            <a:schemeClr val="accent1"/>
-          </a:effectRef>
-          <a:fontRef idx="minor">
-            <a:schemeClr val="lt1"/>
-          </a:fontRef>
-        </p:style>
-        <p:txBody>
-          <a:bodyPr rtlCol="0" anchor="ctr"/>
-          <a:lstStyle/>
-          <a:p>
-            <a:pPr algn="ctr"/>
-          </a:p>
-        </p:txBody>
-      </p:sp>
-      <p:sp>
-        <p:nvSpPr>
-          <p:cNvPr id="3" name="Rectangle 2"/>
-          <p:cNvSpPr/>
-          <p:nvPr/>
-        </p:nvSpPr>
-        <p:spPr>
-          <a:xfrm>
-            <a:off x="0" y="566928"/>
-            <a:ext cx="12191695" cy="54864"/>
-          </a:xfrm>
-          <a:prstGeom prst="rect">
-            <a:avLst/>
-          </a:prstGeom>
-          <a:solidFill>
-            <a:srgbClr val="FF9F1C"/>
-          </a:solidFill>
-          <a:ln>
-            <a:noFill/>
-          </a:ln>
-          <a:effectLst/>
-        </p:spPr>
-        <p:style>
-          <a:lnRef idx="1">
-            <a:schemeClr val="accent1"/>
-          </a:lnRef>
-          <a:fillRef idx="3">
-            <a:schemeClr val="accent1"/>
-          </a:fillRef>
-          <a:effectRef idx="2">
-            <a:schemeClr val="accent1"/>
-          </a:effectRef>
-          <a:fontRef idx="minor">
-            <a:schemeClr val="lt1"/>
-          </a:fontRef>
-        </p:style>
-        <p:txBody>
-          <a:bodyPr rtlCol="0" anchor="ctr"/>
-          <a:lstStyle/>
-          <a:p>
-            <a:pPr algn="ctr"/>
-          </a:p>
-        </p:txBody>
-      </p:sp>
-      <p:sp>
-        <p:nvSpPr>
-          <p:cNvPr id="4" name="TextBox 3"/>
-          <p:cNvSpPr txBox="1"/>
-          <p:nvPr/>
-        </p:nvSpPr>
-        <p:spPr>
-          <a:xfrm>
-            <a:off x="365760" y="27432"/>
-            <a:ext cx="7315200" cy="502920"/>
-          </a:xfrm>
-          <a:prstGeom prst="rect">
-            <a:avLst/>
-          </a:prstGeom>
-          <a:noFill/>
-        </p:spPr>
-        <p:txBody>
-          <a:bodyPr wrap="square" anchor="ctr">
-            <a:spAutoFit/>
-          </a:bodyPr>
-          <a:lstStyle/>
-          <a:p>
-            <a:pPr algn="l">
-              <a:lnSpc>
-                <a:spcPct val="100000"/>
-              </a:lnSpc>
-            </a:pPr>
-            <a:r>
-              <a:rPr sz="1500" b="1">
-                <a:solidFill>
-                  <a:srgbClr val="FFFFFF"/>
-                </a:solidFill>
-                <a:latin typeface="Malgun Gothic"/>
-              </a:rPr>
-              <a:t>🏫 Mangoi Admin User Guide</a:t>
-            </a:r>
-          </a:p>
-        </p:txBody>
-      </p:sp>
-      <p:sp>
-        <p:nvSpPr>
-          <p:cNvPr id="5" name="TextBox 4"/>
-          <p:cNvSpPr txBox="1"/>
-          <p:nvPr/>
-        </p:nvSpPr>
-        <p:spPr>
-          <a:xfrm>
-            <a:off x="8168335" y="27432"/>
-            <a:ext cx="3657600" cy="502920"/>
-          </a:xfrm>
-          <a:prstGeom prst="rect">
-            <a:avLst/>
-          </a:prstGeom>
-          <a:noFill/>
-        </p:spPr>
-        <p:txBody>
-          <a:bodyPr wrap="square" anchor="ctr">
-            <a:spAutoFit/>
-          </a:bodyPr>
-          <a:lstStyle/>
-          <a:p>
-            <a:pPr algn="r">
-              <a:lnSpc>
-                <a:spcPct val="100000"/>
-              </a:lnSpc>
-            </a:pPr>
-            <a:r>
-              <a:rPr sz="1300" b="1">
-                <a:solidFill>
-                  <a:srgbClr val="F1F5F9"/>
-                </a:solidFill>
-                <a:latin typeface="Malgun Gothic"/>
-              </a:rPr>
-              <a:t>Checklist</a:t>
-            </a:r>
-          </a:p>
-        </p:txBody>
-      </p:sp>
-      <p:sp>
-        <p:nvSpPr>
-          <p:cNvPr id="6" name="Rounded Rectangle 5"/>
-          <p:cNvSpPr/>
-          <p:nvPr/>
-        </p:nvSpPr>
-        <p:spPr>
-          <a:xfrm>
-            <a:off x="365760" y="841248"/>
-            <a:ext cx="658368" cy="512064"/>
-          </a:xfrm>
-          <a:prstGeom prst="roundRect">
-            <a:avLst/>
-          </a:prstGeom>
-          <a:solidFill>
-            <a:srgbClr val="4F46E5"/>
-          </a:solidFill>
-          <a:ln>
-            <a:noFill/>
-          </a:ln>
-          <a:effectLst/>
-        </p:spPr>
-        <p:style>
-          <a:lnRef idx="1">
-            <a:schemeClr val="accent1"/>
-          </a:lnRef>
-          <a:fillRef idx="3">
-            <a:schemeClr val="accent1"/>
-          </a:fillRef>
-          <a:effectRef idx="2">
-            <a:schemeClr val="accent1"/>
-          </a:effectRef>
-          <a:fontRef idx="minor">
-            <a:schemeClr val="lt1"/>
-          </a:fontRef>
-        </p:style>
-        <p:txBody>
-          <a:bodyPr rtlCol="0" anchor="ctr"/>
-          <a:lstStyle/>
-          <a:p>
-            <a:pPr algn="ctr"/>
-          </a:p>
-        </p:txBody>
-      </p:sp>
-      <p:sp>
-        <p:nvSpPr>
-          <p:cNvPr id="7" name="TextBox 6"/>
-          <p:cNvSpPr txBox="1"/>
-          <p:nvPr/>
-        </p:nvSpPr>
-        <p:spPr>
-          <a:xfrm>
-            <a:off x="365760" y="841248"/>
-            <a:ext cx="658368" cy="512064"/>
-          </a:xfrm>
-          <a:prstGeom prst="rect">
-            <a:avLst/>
-          </a:prstGeom>
-          <a:noFill/>
-        </p:spPr>
-        <p:txBody>
-          <a:bodyPr wrap="square" anchor="ctr">
-            <a:spAutoFit/>
-          </a:bodyPr>
-          <a:lstStyle/>
-          <a:p>
-            <a:pPr algn="ctr">
-              <a:lnSpc>
-                <a:spcPct val="100000"/>
-              </a:lnSpc>
-            </a:pPr>
-            <a:r>
-              <a:rPr sz="1700" b="1">
-                <a:solidFill>
-                  <a:srgbClr val="FFFFFF"/>
-                </a:solidFill>
-                <a:latin typeface="Malgun Gothic"/>
-              </a:rPr>
-              <a:t>40</a:t>
-            </a:r>
-          </a:p>
-        </p:txBody>
-      </p:sp>
-      <p:sp>
-        <p:nvSpPr>
-          <p:cNvPr id="8" name="TextBox 7"/>
-          <p:cNvSpPr txBox="1"/>
-          <p:nvPr/>
-        </p:nvSpPr>
-        <p:spPr>
-          <a:xfrm>
-            <a:off x="1143000" y="868680"/>
-            <a:ext cx="9144000" cy="457200"/>
-          </a:xfrm>
-          <a:prstGeom prst="rect">
-            <a:avLst/>
-          </a:prstGeom>
-          <a:noFill/>
-        </p:spPr>
-        <p:txBody>
-          <a:bodyPr wrap="square" anchor="t">
-            <a:spAutoFit/>
-          </a:bodyPr>
-          <a:lstStyle/>
-          <a:p>
-            <a:pPr algn="l">
-              <a:lnSpc>
-                <a:spcPct val="100000"/>
-              </a:lnSpc>
-            </a:pPr>
-            <a:r>
-              <a:rPr sz="2200" b="1">
-                <a:solidFill>
-                  <a:srgbClr val="4F46E5"/>
-                </a:solidFill>
-                <a:latin typeface="Malgun Gothic"/>
-              </a:rPr>
-              <a:t>✅ Daily Operations Checklist</a:t>
-            </a:r>
-          </a:p>
-        </p:txBody>
-      </p:sp>
-      <p:sp>
-        <p:nvSpPr>
-          <p:cNvPr id="9" name="Rounded Rectangle 8"/>
-          <p:cNvSpPr/>
-          <p:nvPr/>
-        </p:nvSpPr>
-        <p:spPr>
-          <a:xfrm>
-            <a:off x="457200" y="1645920"/>
-            <a:ext cx="292608" cy="292608"/>
-          </a:xfrm>
-          <a:prstGeom prst="roundRect">
-            <a:avLst/>
-          </a:prstGeom>
-          <a:solidFill>
-            <a:srgbClr val="FFFFFF"/>
-          </a:solidFill>
-          <a:ln w="12700">
-            <a:solidFill>
-              <a:srgbClr val="4F46E5"/>
-            </a:solidFill>
-          </a:ln>
-          <a:effectLst/>
-        </p:spPr>
-        <p:style>
-          <a:lnRef idx="1">
-            <a:schemeClr val="accent1"/>
-          </a:lnRef>
-          <a:fillRef idx="3">
-            <a:schemeClr val="accent1"/>
-          </a:fillRef>
-          <a:effectRef idx="2">
-            <a:schemeClr val="accent1"/>
-          </a:effectRef>
-          <a:fontRef idx="minor">
-            <a:schemeClr val="lt1"/>
-          </a:fontRef>
-        </p:style>
-        <p:txBody>
-          <a:bodyPr rtlCol="0" anchor="ctr"/>
-          <a:lstStyle/>
-          <a:p>
-            <a:pPr algn="ctr"/>
-          </a:p>
-        </p:txBody>
-      </p:sp>
-      <p:sp>
-        <p:nvSpPr>
-          <p:cNvPr id="10" name="TextBox 9"/>
-          <p:cNvSpPr txBox="1"/>
-          <p:nvPr/>
-        </p:nvSpPr>
-        <p:spPr>
-          <a:xfrm>
-            <a:off x="914400" y="1581912"/>
-            <a:ext cx="10058400" cy="411480"/>
-          </a:xfrm>
-          <a:prstGeom prst="rect">
-            <a:avLst/>
-          </a:prstGeom>
-          <a:noFill/>
-        </p:spPr>
-        <p:txBody>
-          <a:bodyPr wrap="square" anchor="t">
-            <a:spAutoFit/>
-          </a:bodyPr>
-          <a:lstStyle/>
-          <a:p>
-            <a:pPr algn="l">
-              <a:lnSpc>
-                <a:spcPct val="100000"/>
-              </a:lnSpc>
-            </a:pPr>
-            <a:r>
-              <a:rPr sz="1500" b="1">
-                <a:solidFill>
-                  <a:srgbClr val="334155"/>
-                </a:solidFill>
-                <a:latin typeface="Malgun Gothic"/>
-              </a:rPr>
-              <a:t>Did you check today's revenue, enrollment and attendance?</a:t>
-            </a:r>
-          </a:p>
-        </p:txBody>
-      </p:sp>
-      <p:sp>
-        <p:nvSpPr>
-          <p:cNvPr id="11" name="Rounded Rectangle 10"/>
-          <p:cNvSpPr/>
-          <p:nvPr/>
-        </p:nvSpPr>
-        <p:spPr>
-          <a:xfrm>
-            <a:off x="457200" y="2212848"/>
-            <a:ext cx="292608" cy="292608"/>
-          </a:xfrm>
-          <a:prstGeom prst="roundRect">
-            <a:avLst/>
-          </a:prstGeom>
-          <a:solidFill>
-            <a:srgbClr val="FFFFFF"/>
-          </a:solidFill>
-          <a:ln w="12700">
-            <a:solidFill>
-              <a:srgbClr val="4F46E5"/>
-            </a:solidFill>
-          </a:ln>
-          <a:effectLst/>
-        </p:spPr>
-        <p:style>
-          <a:lnRef idx="1">
-            <a:schemeClr val="accent1"/>
-          </a:lnRef>
-          <a:fillRef idx="3">
-            <a:schemeClr val="accent1"/>
-          </a:fillRef>
-          <a:effectRef idx="2">
-            <a:schemeClr val="accent1"/>
-          </a:effectRef>
-          <a:fontRef idx="minor">
-            <a:schemeClr val="lt1"/>
-          </a:fontRef>
-        </p:style>
-        <p:txBody>
-          <a:bodyPr rtlCol="0" anchor="ctr"/>
-          <a:lstStyle/>
-          <a:p>
-            <a:pPr algn="ctr"/>
-          </a:p>
-        </p:txBody>
-      </p:sp>
-      <p:sp>
-        <p:nvSpPr>
-          <p:cNvPr id="12" name="TextBox 11"/>
-          <p:cNvSpPr txBox="1"/>
-          <p:nvPr/>
-        </p:nvSpPr>
-        <p:spPr>
-          <a:xfrm>
-            <a:off x="914400" y="2148840"/>
-            <a:ext cx="10058400" cy="411480"/>
-          </a:xfrm>
-          <a:prstGeom prst="rect">
-            <a:avLst/>
-          </a:prstGeom>
-          <a:noFill/>
-        </p:spPr>
-        <p:txBody>
-          <a:bodyPr wrap="square" anchor="t">
-            <a:spAutoFit/>
-          </a:bodyPr>
-          <a:lstStyle/>
-          <a:p>
-            <a:pPr algn="l">
-              <a:lnSpc>
-                <a:spcPct val="100000"/>
-              </a:lnSpc>
-            </a:pPr>
-            <a:r>
-              <a:rPr sz="1500" b="1">
-                <a:solidFill>
-                  <a:srgbClr val="334155"/>
-                </a:solidFill>
-                <a:latin typeface="Malgun Gothic"/>
-              </a:rPr>
-              <a:t>Did you handle new counseling/inquiries?</a:t>
-            </a:r>
-          </a:p>
-        </p:txBody>
-      </p:sp>
-      <p:sp>
-        <p:nvSpPr>
-          <p:cNvPr id="13" name="Rounded Rectangle 12"/>
-          <p:cNvSpPr/>
-          <p:nvPr/>
-        </p:nvSpPr>
-        <p:spPr>
-          <a:xfrm>
-            <a:off x="457200" y="2779776"/>
-            <a:ext cx="292608" cy="292608"/>
-          </a:xfrm>
-          <a:prstGeom prst="roundRect">
-            <a:avLst/>
-          </a:prstGeom>
-          <a:solidFill>
-            <a:srgbClr val="FFFFFF"/>
-          </a:solidFill>
-          <a:ln w="12700">
-            <a:solidFill>
-              <a:srgbClr val="4F46E5"/>
-            </a:solidFill>
-          </a:ln>
-          <a:effectLst/>
-        </p:spPr>
-        <p:style>
-          <a:lnRef idx="1">
-            <a:schemeClr val="accent1"/>
-          </a:lnRef>
-          <a:fillRef idx="3">
-            <a:schemeClr val="accent1"/>
-          </a:fillRef>
-          <a:effectRef idx="2">
-            <a:schemeClr val="accent1"/>
-          </a:effectRef>
-          <a:fontRef idx="minor">
-            <a:schemeClr val="lt1"/>
-          </a:fontRef>
-        </p:style>
-        <p:txBody>
-          <a:bodyPr rtlCol="0" anchor="ctr"/>
-          <a:lstStyle/>
-          <a:p>
-            <a:pPr algn="ctr"/>
-          </a:p>
-        </p:txBody>
-      </p:sp>
-      <p:sp>
-        <p:nvSpPr>
-          <p:cNvPr id="14" name="TextBox 13"/>
-          <p:cNvSpPr txBox="1"/>
-          <p:nvPr/>
-        </p:nvSpPr>
-        <p:spPr>
-          <a:xfrm>
-            <a:off x="914400" y="2715768"/>
-            <a:ext cx="10058400" cy="411480"/>
-          </a:xfrm>
-          <a:prstGeom prst="rect">
-            <a:avLst/>
-          </a:prstGeom>
-          <a:noFill/>
-        </p:spPr>
-        <p:txBody>
-          <a:bodyPr wrap="square" anchor="t">
-            <a:spAutoFit/>
-          </a:bodyPr>
-          <a:lstStyle/>
-          <a:p>
-            <a:pPr algn="l">
-              <a:lnSpc>
-                <a:spcPct val="100000"/>
-              </a:lnSpc>
-            </a:pPr>
-            <a:r>
-              <a:rPr sz="1500" b="1">
-                <a:solidFill>
-                  <a:srgbClr val="334155"/>
-                </a:solidFill>
-                <a:latin typeface="Malgun Gothic"/>
-              </a:rPr>
-              <a:t>Did you check overdue and refund items?</a:t>
-            </a:r>
-          </a:p>
-        </p:txBody>
-      </p:sp>
-      <p:sp>
-        <p:nvSpPr>
-          <p:cNvPr id="15" name="Rounded Rectangle 14"/>
-          <p:cNvSpPr/>
-          <p:nvPr/>
-        </p:nvSpPr>
-        <p:spPr>
-          <a:xfrm>
-            <a:off x="457200" y="3346704"/>
-            <a:ext cx="292608" cy="292608"/>
-          </a:xfrm>
-          <a:prstGeom prst="roundRect">
-            <a:avLst/>
-          </a:prstGeom>
-          <a:solidFill>
-            <a:srgbClr val="FFFFFF"/>
-          </a:solidFill>
-          <a:ln w="12700">
-            <a:solidFill>
-              <a:srgbClr val="4F46E5"/>
-            </a:solidFill>
-          </a:ln>
-          <a:effectLst/>
-        </p:spPr>
-        <p:style>
-          <a:lnRef idx="1">
-            <a:schemeClr val="accent1"/>
-          </a:lnRef>
-          <a:fillRef idx="3">
-            <a:schemeClr val="accent1"/>
-          </a:fillRef>
-          <a:effectRef idx="2">
-            <a:schemeClr val="accent1"/>
-          </a:effectRef>
-          <a:fontRef idx="minor">
-            <a:schemeClr val="lt1"/>
-          </a:fontRef>
-        </p:style>
-        <p:txBody>
-          <a:bodyPr rtlCol="0" anchor="ctr"/>
-          <a:lstStyle/>
-          <a:p>
-            <a:pPr algn="ctr"/>
-          </a:p>
-        </p:txBody>
-      </p:sp>
-      <p:sp>
-        <p:nvSpPr>
-          <p:cNvPr id="16" name="TextBox 15"/>
-          <p:cNvSpPr txBox="1"/>
-          <p:nvPr/>
-        </p:nvSpPr>
-        <p:spPr>
-          <a:xfrm>
-            <a:off x="914400" y="3282696"/>
-            <a:ext cx="10058400" cy="411480"/>
-          </a:xfrm>
-          <a:prstGeom prst="rect">
-            <a:avLst/>
-          </a:prstGeom>
-          <a:noFill/>
-        </p:spPr>
-        <p:txBody>
-          <a:bodyPr wrap="square" anchor="t">
-            <a:spAutoFit/>
-          </a:bodyPr>
-          <a:lstStyle/>
-          <a:p>
-            <a:pPr algn="l">
-              <a:lnSpc>
-                <a:spcPct val="100000"/>
-              </a:lnSpc>
-            </a:pPr>
-            <a:r>
-              <a:rPr sz="1500" b="1">
-                <a:solidFill>
-                  <a:srgbClr val="334155"/>
-                </a:solidFill>
-                <a:latin typeface="Malgun Gothic"/>
-              </a:rPr>
-              <a:t>Did you check the live (LIVE) lesson status?</a:t>
-            </a:r>
-          </a:p>
-        </p:txBody>
-      </p:sp>
-      <p:sp>
-        <p:nvSpPr>
-          <p:cNvPr id="17" name="Rounded Rectangle 16"/>
-          <p:cNvSpPr/>
-          <p:nvPr/>
-        </p:nvSpPr>
-        <p:spPr>
-          <a:xfrm>
-            <a:off x="457200" y="3913632"/>
-            <a:ext cx="292608" cy="292608"/>
-          </a:xfrm>
-          <a:prstGeom prst="roundRect">
-            <a:avLst/>
-          </a:prstGeom>
-          <a:solidFill>
-            <a:srgbClr val="FFFFFF"/>
-          </a:solidFill>
-          <a:ln w="12700">
-            <a:solidFill>
-              <a:srgbClr val="4F46E5"/>
-            </a:solidFill>
-          </a:ln>
-          <a:effectLst/>
-        </p:spPr>
-        <p:style>
-          <a:lnRef idx="1">
-            <a:schemeClr val="accent1"/>
-          </a:lnRef>
-          <a:fillRef idx="3">
-            <a:schemeClr val="accent1"/>
-          </a:fillRef>
-          <a:effectRef idx="2">
-            <a:schemeClr val="accent1"/>
-          </a:effectRef>
-          <a:fontRef idx="minor">
-            <a:schemeClr val="lt1"/>
-          </a:fontRef>
-        </p:style>
-        <p:txBody>
-          <a:bodyPr rtlCol="0" anchor="ctr"/>
-          <a:lstStyle/>
-          <a:p>
-            <a:pPr algn="ctr"/>
-          </a:p>
-        </p:txBody>
-      </p:sp>
-      <p:sp>
-        <p:nvSpPr>
-          <p:cNvPr id="18" name="TextBox 17"/>
-          <p:cNvSpPr txBox="1"/>
-          <p:nvPr/>
-        </p:nvSpPr>
-        <p:spPr>
-          <a:xfrm>
-            <a:off x="914400" y="3849624"/>
-            <a:ext cx="10058400" cy="411480"/>
-          </a:xfrm>
-          <a:prstGeom prst="rect">
-            <a:avLst/>
-          </a:prstGeom>
-          <a:noFill/>
-        </p:spPr>
-        <p:txBody>
-          <a:bodyPr wrap="square" anchor="t">
-            <a:spAutoFit/>
-          </a:bodyPr>
-          <a:lstStyle/>
-          <a:p>
-            <a:pPr algn="l">
-              <a:lnSpc>
-                <a:spcPct val="100000"/>
-              </a:lnSpc>
-            </a:pPr>
-            <a:r>
-              <a:rPr sz="1500" b="1">
-                <a:solidFill>
-                  <a:srgbClr val="334155"/>
-                </a:solidFill>
-                <a:latin typeface="Malgun Gothic"/>
-              </a:rPr>
-              <a:t>Did you care for students whose churn risk rose?</a:t>
-            </a:r>
-          </a:p>
-        </p:txBody>
-      </p:sp>
-      <p:sp>
-        <p:nvSpPr>
-          <p:cNvPr id="19" name="Rounded Rectangle 18"/>
-          <p:cNvSpPr/>
-          <p:nvPr/>
-        </p:nvSpPr>
-        <p:spPr>
-          <a:xfrm>
-            <a:off x="457200" y="4480560"/>
-            <a:ext cx="292608" cy="292608"/>
-          </a:xfrm>
-          <a:prstGeom prst="roundRect">
-            <a:avLst/>
-          </a:prstGeom>
-          <a:solidFill>
-            <a:srgbClr val="FFFFFF"/>
-          </a:solidFill>
-          <a:ln w="12700">
-            <a:solidFill>
-              <a:srgbClr val="4F46E5"/>
-            </a:solidFill>
-          </a:ln>
-          <a:effectLst/>
-        </p:spPr>
-        <p:style>
-          <a:lnRef idx="1">
-            <a:schemeClr val="accent1"/>
-          </a:lnRef>
-          <a:fillRef idx="3">
-            <a:schemeClr val="accent1"/>
-          </a:fillRef>
-          <a:effectRef idx="2">
-            <a:schemeClr val="accent1"/>
-          </a:effectRef>
-          <a:fontRef idx="minor">
-            <a:schemeClr val="lt1"/>
-          </a:fontRef>
-        </p:style>
-        <p:txBody>
-          <a:bodyPr rtlCol="0" anchor="ctr"/>
-          <a:lstStyle/>
-          <a:p>
-            <a:pPr algn="ctr"/>
-          </a:p>
-        </p:txBody>
-      </p:sp>
-      <p:sp>
-        <p:nvSpPr>
-          <p:cNvPr id="20" name="TextBox 19"/>
-          <p:cNvSpPr txBox="1"/>
-          <p:nvPr/>
-        </p:nvSpPr>
-        <p:spPr>
-          <a:xfrm>
-            <a:off x="914400" y="4416552"/>
-            <a:ext cx="10058400" cy="411480"/>
-          </a:xfrm>
-          <a:prstGeom prst="rect">
-            <a:avLst/>
-          </a:prstGeom>
-          <a:noFill/>
-        </p:spPr>
-        <p:txBody>
-          <a:bodyPr wrap="square" anchor="t">
-            <a:spAutoFit/>
-          </a:bodyPr>
-          <a:lstStyle/>
-          <a:p>
-            <a:pPr algn="l">
-              <a:lnSpc>
-                <a:spcPct val="100000"/>
-              </a:lnSpc>
-            </a:pPr>
-            <a:r>
-              <a:rPr sz="1500" b="1">
-                <a:solidFill>
-                  <a:srgbClr val="334155"/>
-                </a:solidFill>
-                <a:latin typeface="Malgun Gothic"/>
-              </a:rPr>
-              <a:t>Did you reflect teacher reviews/coaching feedback?</a:t>
-            </a:r>
-          </a:p>
-        </p:txBody>
-      </p:sp>
-      <p:sp>
-        <p:nvSpPr>
-          <p:cNvPr id="21" name="Rounded Rectangle 20"/>
-          <p:cNvSpPr/>
-          <p:nvPr/>
-        </p:nvSpPr>
-        <p:spPr>
-          <a:xfrm>
-            <a:off x="457200" y="5047488"/>
-            <a:ext cx="292608" cy="292608"/>
-          </a:xfrm>
-          <a:prstGeom prst="roundRect">
-            <a:avLst/>
-          </a:prstGeom>
-          <a:solidFill>
-            <a:srgbClr val="FFFFFF"/>
-          </a:solidFill>
-          <a:ln w="12700">
-            <a:solidFill>
-              <a:srgbClr val="4F46E5"/>
-            </a:solidFill>
-          </a:ln>
-          <a:effectLst/>
-        </p:spPr>
-        <p:style>
-          <a:lnRef idx="1">
-            <a:schemeClr val="accent1"/>
-          </a:lnRef>
-          <a:fillRef idx="3">
-            <a:schemeClr val="accent1"/>
-          </a:fillRef>
-          <a:effectRef idx="2">
-            <a:schemeClr val="accent1"/>
-          </a:effectRef>
-          <a:fontRef idx="minor">
-            <a:schemeClr val="lt1"/>
-          </a:fontRef>
-        </p:style>
-        <p:txBody>
-          <a:bodyPr rtlCol="0" anchor="ctr"/>
-          <a:lstStyle/>
-          <a:p>
-            <a:pPr algn="ctr"/>
-          </a:p>
-        </p:txBody>
-      </p:sp>
-      <p:sp>
-        <p:nvSpPr>
-          <p:cNvPr id="22" name="TextBox 21"/>
-          <p:cNvSpPr txBox="1"/>
-          <p:nvPr/>
-        </p:nvSpPr>
-        <p:spPr>
-          <a:xfrm>
-            <a:off x="914400" y="4983480"/>
-            <a:ext cx="10058400" cy="411480"/>
-          </a:xfrm>
-          <a:prstGeom prst="rect">
-            <a:avLst/>
-          </a:prstGeom>
-          <a:noFill/>
-        </p:spPr>
-        <p:txBody>
-          <a:bodyPr wrap="square" anchor="t">
-            <a:spAutoFit/>
-          </a:bodyPr>
-          <a:lstStyle/>
-          <a:p>
-            <a:pPr algn="l">
-              <a:lnSpc>
-                <a:spcPct val="100000"/>
-              </a:lnSpc>
-            </a:pPr>
-            <a:r>
-              <a:rPr sz="1500" b="1">
-                <a:solidFill>
-                  <a:srgbClr val="334155"/>
-                </a:solidFill>
-                <a:latin typeface="Malgun Gothic"/>
-              </a:rPr>
-              <a:t>Did you add repeat questions to the FAQ?</a:t>
-            </a:r>
-          </a:p>
-        </p:txBody>
-      </p:sp>
-      <p:pic>
-        <p:nvPicPr>
-          <p:cNvPr id="23" name="Picture 22" descr="mango_char.png"/>
-          <p:cNvPicPr>
-            <a:picLocks noChangeAspect="1"/>
-          </p:cNvPicPr>
-          <p:nvPr/>
-        </p:nvPicPr>
-        <p:blipFill>
-          <a:blip r:embed="rId2"/>
-          <a:stretch>
-            <a:fillRect/>
-          </a:stretch>
-        </p:blipFill>
-        <p:spPr>
-          <a:xfrm>
-            <a:off x="9153162" y="4480559"/>
-            <a:ext cx="2489892" cy="2011680"/>
-          </a:xfrm>
-          <a:prstGeom prst="rect">
-            <a:avLst/>
-          </a:prstGeom>
-        </p:spPr>
-      </p:pic>
     </p:spTree>
   </p:cSld>
   <p:clrMapOvr>
@@ -46207,7 +46680,7 @@
                 </a:solidFill>
                 <a:latin typeface="Malgun Gothic"/>
               </a:rPr>
-              <a:t>Conclusion</a:t>
+              <a:t>Frequently Asked Questions (FAQ)</a:t>
             </a:r>
           </a:p>
         </p:txBody>
@@ -46291,6 +46764,1997 @@
                 <a:latin typeface="Malgun Gothic"/>
               </a:rPr>
               <a:t>41</a:t>
+            </a:r>
+          </a:p>
+        </p:txBody>
+      </p:sp>
+      <p:sp>
+        <p:nvSpPr>
+          <p:cNvPr id="8" name="TextBox 7"/>
+          <p:cNvSpPr txBox="1"/>
+          <p:nvPr/>
+        </p:nvSpPr>
+        <p:spPr>
+          <a:xfrm>
+            <a:off x="1143000" y="868680"/>
+            <a:ext cx="9144000" cy="457200"/>
+          </a:xfrm>
+          <a:prstGeom prst="rect">
+            <a:avLst/>
+          </a:prstGeom>
+          <a:noFill/>
+        </p:spPr>
+        <p:txBody>
+          <a:bodyPr wrap="square" anchor="t">
+            <a:spAutoFit/>
+          </a:bodyPr>
+          <a:lstStyle/>
+          <a:p>
+            <a:pPr algn="l">
+              <a:lnSpc>
+                <a:spcPct val="100000"/>
+              </a:lnSpc>
+            </a:pPr>
+            <a:r>
+              <a:rPr sz="2200" b="1">
+                <a:solidFill>
+                  <a:srgbClr val="4F46E5"/>
+                </a:solidFill>
+                <a:latin typeface="Malgun Gothic"/>
+              </a:rPr>
+              <a:t>❓ Frequently Asked Questions (FAQ)</a:t>
+            </a:r>
+          </a:p>
+        </p:txBody>
+      </p:sp>
+      <p:sp>
+        <p:nvSpPr>
+          <p:cNvPr id="9" name="Rounded Rectangle 8"/>
+          <p:cNvSpPr/>
+          <p:nvPr/>
+        </p:nvSpPr>
+        <p:spPr>
+          <a:xfrm>
+            <a:off x="365760" y="1554480"/>
+            <a:ext cx="11460175" cy="868680"/>
+          </a:xfrm>
+          <a:prstGeom prst="roundRect">
+            <a:avLst/>
+          </a:prstGeom>
+          <a:solidFill>
+            <a:srgbClr val="F8FAFC"/>
+          </a:solidFill>
+          <a:ln w="12700">
+            <a:solidFill>
+              <a:srgbClr val="E2E8F0"/>
+            </a:solidFill>
+          </a:ln>
+          <a:effectLst/>
+        </p:spPr>
+        <p:style>
+          <a:lnRef idx="1">
+            <a:schemeClr val="accent1"/>
+          </a:lnRef>
+          <a:fillRef idx="3">
+            <a:schemeClr val="accent1"/>
+          </a:fillRef>
+          <a:effectRef idx="2">
+            <a:schemeClr val="accent1"/>
+          </a:effectRef>
+          <a:fontRef idx="minor">
+            <a:schemeClr val="lt1"/>
+          </a:fontRef>
+        </p:style>
+        <p:txBody>
+          <a:bodyPr rtlCol="0" anchor="ctr"/>
+          <a:lstStyle/>
+          <a:p>
+            <a:pPr algn="ctr"/>
+          </a:p>
+        </p:txBody>
+      </p:sp>
+      <p:sp>
+        <p:nvSpPr>
+          <p:cNvPr id="10" name="TextBox 9"/>
+          <p:cNvSpPr txBox="1"/>
+          <p:nvPr/>
+        </p:nvSpPr>
+        <p:spPr>
+          <a:xfrm>
+            <a:off x="548640" y="1627632"/>
+            <a:ext cx="11094415" cy="365760"/>
+          </a:xfrm>
+          <a:prstGeom prst="rect">
+            <a:avLst/>
+          </a:prstGeom>
+          <a:noFill/>
+        </p:spPr>
+        <p:txBody>
+          <a:bodyPr wrap="square" anchor="t">
+            <a:spAutoFit/>
+          </a:bodyPr>
+          <a:lstStyle/>
+          <a:p>
+            <a:pPr algn="l">
+              <a:lnSpc>
+                <a:spcPct val="100000"/>
+              </a:lnSpc>
+            </a:pPr>
+            <a:r>
+              <a:rPr sz="1350" b="1">
+                <a:solidFill>
+                  <a:srgbClr val="4F46E5"/>
+                </a:solidFill>
+                <a:latin typeface="Malgun Gothic"/>
+              </a:rPr>
+              <a:t>Q. Where do I log in?</a:t>
+            </a:r>
+          </a:p>
+        </p:txBody>
+      </p:sp>
+      <p:sp>
+        <p:nvSpPr>
+          <p:cNvPr id="11" name="TextBox 10"/>
+          <p:cNvSpPr txBox="1"/>
+          <p:nvPr/>
+        </p:nvSpPr>
+        <p:spPr>
+          <a:xfrm>
+            <a:off x="548640" y="1965960"/>
+            <a:ext cx="11094415" cy="411480"/>
+          </a:xfrm>
+          <a:prstGeom prst="rect">
+            <a:avLst/>
+          </a:prstGeom>
+          <a:noFill/>
+        </p:spPr>
+        <p:txBody>
+          <a:bodyPr wrap="square" anchor="t">
+            <a:spAutoFit/>
+          </a:bodyPr>
+          <a:lstStyle/>
+          <a:p>
+            <a:pPr algn="l">
+              <a:lnSpc>
+                <a:spcPct val="105000"/>
+              </a:lnSpc>
+            </a:pPr>
+            <a:r>
+              <a:rPr sz="1150" b="0">
+                <a:solidFill>
+                  <a:srgbClr val="475569"/>
+                </a:solidFill>
+                <a:latin typeface="Malgun Gothic"/>
+              </a:rPr>
+              <a:t>A. Log in at admin.mangoi.co.kr. Phone, tablet and PC all connect right from the web.</a:t>
+            </a:r>
+          </a:p>
+        </p:txBody>
+      </p:sp>
+      <p:sp>
+        <p:nvSpPr>
+          <p:cNvPr id="12" name="Rounded Rectangle 11"/>
+          <p:cNvSpPr/>
+          <p:nvPr/>
+        </p:nvSpPr>
+        <p:spPr>
+          <a:xfrm>
+            <a:off x="365760" y="2542032"/>
+            <a:ext cx="11460175" cy="868680"/>
+          </a:xfrm>
+          <a:prstGeom prst="roundRect">
+            <a:avLst/>
+          </a:prstGeom>
+          <a:solidFill>
+            <a:srgbClr val="F8FAFC"/>
+          </a:solidFill>
+          <a:ln w="12700">
+            <a:solidFill>
+              <a:srgbClr val="E2E8F0"/>
+            </a:solidFill>
+          </a:ln>
+          <a:effectLst/>
+        </p:spPr>
+        <p:style>
+          <a:lnRef idx="1">
+            <a:schemeClr val="accent1"/>
+          </a:lnRef>
+          <a:fillRef idx="3">
+            <a:schemeClr val="accent1"/>
+          </a:fillRef>
+          <a:effectRef idx="2">
+            <a:schemeClr val="accent1"/>
+          </a:effectRef>
+          <a:fontRef idx="minor">
+            <a:schemeClr val="lt1"/>
+          </a:fontRef>
+        </p:style>
+        <p:txBody>
+          <a:bodyPr rtlCol="0" anchor="ctr"/>
+          <a:lstStyle/>
+          <a:p>
+            <a:pPr algn="ctr"/>
+          </a:p>
+        </p:txBody>
+      </p:sp>
+      <p:sp>
+        <p:nvSpPr>
+          <p:cNvPr id="13" name="TextBox 12"/>
+          <p:cNvSpPr txBox="1"/>
+          <p:nvPr/>
+        </p:nvSpPr>
+        <p:spPr>
+          <a:xfrm>
+            <a:off x="548640" y="2615184"/>
+            <a:ext cx="11094415" cy="365760"/>
+          </a:xfrm>
+          <a:prstGeom prst="rect">
+            <a:avLst/>
+          </a:prstGeom>
+          <a:noFill/>
+        </p:spPr>
+        <p:txBody>
+          <a:bodyPr wrap="square" anchor="t">
+            <a:spAutoFit/>
+          </a:bodyPr>
+          <a:lstStyle/>
+          <a:p>
+            <a:pPr algn="l">
+              <a:lnSpc>
+                <a:spcPct val="100000"/>
+              </a:lnSpc>
+            </a:pPr>
+            <a:r>
+              <a:rPr sz="1350" b="1">
+                <a:solidFill>
+                  <a:srgbClr val="4F46E5"/>
+                </a:solidFill>
+                <a:latin typeface="Malgun Gothic"/>
+              </a:rPr>
+              <a:t>Q. I can't see a feature.</a:t>
+            </a:r>
+          </a:p>
+        </p:txBody>
+      </p:sp>
+      <p:sp>
+        <p:nvSpPr>
+          <p:cNvPr id="14" name="TextBox 13"/>
+          <p:cNvSpPr txBox="1"/>
+          <p:nvPr/>
+        </p:nvSpPr>
+        <p:spPr>
+          <a:xfrm>
+            <a:off x="548640" y="2953512"/>
+            <a:ext cx="11094415" cy="411480"/>
+          </a:xfrm>
+          <a:prstGeom prst="rect">
+            <a:avLst/>
+          </a:prstGeom>
+          <a:noFill/>
+        </p:spPr>
+        <p:txBody>
+          <a:bodyPr wrap="square" anchor="t">
+            <a:spAutoFit/>
+          </a:bodyPr>
+          <a:lstStyle/>
+          <a:p>
+            <a:pPr algn="l">
+              <a:lnSpc>
+                <a:spcPct val="105000"/>
+              </a:lnSpc>
+            </a:pPr>
+            <a:r>
+              <a:rPr sz="1150" b="0">
+                <a:solidFill>
+                  <a:srgbClr val="475569"/>
+                </a:solidFill>
+                <a:latin typeface="Malgun Gothic"/>
+              </a:rPr>
+              <a:t>A. Menus vary by role. Use the top feature search or ask the AI assistant by name.</a:t>
+            </a:r>
+          </a:p>
+        </p:txBody>
+      </p:sp>
+      <p:sp>
+        <p:nvSpPr>
+          <p:cNvPr id="15" name="Rounded Rectangle 14"/>
+          <p:cNvSpPr/>
+          <p:nvPr/>
+        </p:nvSpPr>
+        <p:spPr>
+          <a:xfrm>
+            <a:off x="365760" y="3529584"/>
+            <a:ext cx="11460175" cy="868680"/>
+          </a:xfrm>
+          <a:prstGeom prst="roundRect">
+            <a:avLst/>
+          </a:prstGeom>
+          <a:solidFill>
+            <a:srgbClr val="F8FAFC"/>
+          </a:solidFill>
+          <a:ln w="12700">
+            <a:solidFill>
+              <a:srgbClr val="E2E8F0"/>
+            </a:solidFill>
+          </a:ln>
+          <a:effectLst/>
+        </p:spPr>
+        <p:style>
+          <a:lnRef idx="1">
+            <a:schemeClr val="accent1"/>
+          </a:lnRef>
+          <a:fillRef idx="3">
+            <a:schemeClr val="accent1"/>
+          </a:fillRef>
+          <a:effectRef idx="2">
+            <a:schemeClr val="accent1"/>
+          </a:effectRef>
+          <a:fontRef idx="minor">
+            <a:schemeClr val="lt1"/>
+          </a:fontRef>
+        </p:style>
+        <p:txBody>
+          <a:bodyPr rtlCol="0" anchor="ctr"/>
+          <a:lstStyle/>
+          <a:p>
+            <a:pPr algn="ctr"/>
+          </a:p>
+        </p:txBody>
+      </p:sp>
+      <p:sp>
+        <p:nvSpPr>
+          <p:cNvPr id="16" name="TextBox 15"/>
+          <p:cNvSpPr txBox="1"/>
+          <p:nvPr/>
+        </p:nvSpPr>
+        <p:spPr>
+          <a:xfrm>
+            <a:off x="548640" y="3602736"/>
+            <a:ext cx="11094415" cy="365760"/>
+          </a:xfrm>
+          <a:prstGeom prst="rect">
+            <a:avLst/>
+          </a:prstGeom>
+          <a:noFill/>
+        </p:spPr>
+        <p:txBody>
+          <a:bodyPr wrap="square" anchor="t">
+            <a:spAutoFit/>
+          </a:bodyPr>
+          <a:lstStyle/>
+          <a:p>
+            <a:pPr algn="l">
+              <a:lnSpc>
+                <a:spcPct val="100000"/>
+              </a:lnSpc>
+            </a:pPr>
+            <a:r>
+              <a:rPr sz="1350" b="1">
+                <a:solidFill>
+                  <a:srgbClr val="4F46E5"/>
+                </a:solidFill>
+                <a:latin typeface="Malgun Gothic"/>
+              </a:rPr>
+              <a:t>Q. A student can't enter a lesson.</a:t>
+            </a:r>
+          </a:p>
+        </p:txBody>
+      </p:sp>
+      <p:sp>
+        <p:nvSpPr>
+          <p:cNvPr id="17" name="TextBox 16"/>
+          <p:cNvSpPr txBox="1"/>
+          <p:nvPr/>
+        </p:nvSpPr>
+        <p:spPr>
+          <a:xfrm>
+            <a:off x="548640" y="3941064"/>
+            <a:ext cx="11094415" cy="411480"/>
+          </a:xfrm>
+          <a:prstGeom prst="rect">
+            <a:avLst/>
+          </a:prstGeom>
+          <a:noFill/>
+        </p:spPr>
+        <p:txBody>
+          <a:bodyPr wrap="square" anchor="t">
+            <a:spAutoFit/>
+          </a:bodyPr>
+          <a:lstStyle/>
+          <a:p>
+            <a:pPr algn="l">
+              <a:lnSpc>
+                <a:spcPct val="105000"/>
+              </a:lnSpc>
+            </a:pPr>
+            <a:r>
+              <a:rPr sz="1150" b="0">
+                <a:solidFill>
+                  <a:srgbClr val="475569"/>
+                </a:solidFill>
+                <a:latin typeface="Malgun Gothic"/>
+              </a:rPr>
+              <a:t>A. Usually a browser permission issue. Advise reconnecting in Chrome/Edge and allowing camera/mic. Inside KakaoTalk, open in an external browser.</a:t>
+            </a:r>
+          </a:p>
+        </p:txBody>
+      </p:sp>
+      <p:sp>
+        <p:nvSpPr>
+          <p:cNvPr id="18" name="Rounded Rectangle 17"/>
+          <p:cNvSpPr/>
+          <p:nvPr/>
+        </p:nvSpPr>
+        <p:spPr>
+          <a:xfrm>
+            <a:off x="365760" y="4517136"/>
+            <a:ext cx="11460175" cy="868680"/>
+          </a:xfrm>
+          <a:prstGeom prst="roundRect">
+            <a:avLst/>
+          </a:prstGeom>
+          <a:solidFill>
+            <a:srgbClr val="F8FAFC"/>
+          </a:solidFill>
+          <a:ln w="12700">
+            <a:solidFill>
+              <a:srgbClr val="E2E8F0"/>
+            </a:solidFill>
+          </a:ln>
+          <a:effectLst/>
+        </p:spPr>
+        <p:style>
+          <a:lnRef idx="1">
+            <a:schemeClr val="accent1"/>
+          </a:lnRef>
+          <a:fillRef idx="3">
+            <a:schemeClr val="accent1"/>
+          </a:fillRef>
+          <a:effectRef idx="2">
+            <a:schemeClr val="accent1"/>
+          </a:effectRef>
+          <a:fontRef idx="minor">
+            <a:schemeClr val="lt1"/>
+          </a:fontRef>
+        </p:style>
+        <p:txBody>
+          <a:bodyPr rtlCol="0" anchor="ctr"/>
+          <a:lstStyle/>
+          <a:p>
+            <a:pPr algn="ctr"/>
+          </a:p>
+        </p:txBody>
+      </p:sp>
+      <p:sp>
+        <p:nvSpPr>
+          <p:cNvPr id="19" name="TextBox 18"/>
+          <p:cNvSpPr txBox="1"/>
+          <p:nvPr/>
+        </p:nvSpPr>
+        <p:spPr>
+          <a:xfrm>
+            <a:off x="548640" y="4590288"/>
+            <a:ext cx="11094415" cy="365760"/>
+          </a:xfrm>
+          <a:prstGeom prst="rect">
+            <a:avLst/>
+          </a:prstGeom>
+          <a:noFill/>
+        </p:spPr>
+        <p:txBody>
+          <a:bodyPr wrap="square" anchor="t">
+            <a:spAutoFit/>
+          </a:bodyPr>
+          <a:lstStyle/>
+          <a:p>
+            <a:pPr algn="l">
+              <a:lnSpc>
+                <a:spcPct val="100000"/>
+              </a:lnSpc>
+            </a:pPr>
+            <a:r>
+              <a:rPr sz="1350" b="1">
+                <a:solidFill>
+                  <a:srgbClr val="4F46E5"/>
+                </a:solidFill>
+                <a:latin typeface="Malgun Gothic"/>
+              </a:rPr>
+              <a:t>Q. Does the AI assistant execute tasks?</a:t>
+            </a:r>
+          </a:p>
+        </p:txBody>
+      </p:sp>
+      <p:sp>
+        <p:nvSpPr>
+          <p:cNvPr id="20" name="TextBox 19"/>
+          <p:cNvSpPr txBox="1"/>
+          <p:nvPr/>
+        </p:nvSpPr>
+        <p:spPr>
+          <a:xfrm>
+            <a:off x="548640" y="4928616"/>
+            <a:ext cx="11094415" cy="411480"/>
+          </a:xfrm>
+          <a:prstGeom prst="rect">
+            <a:avLst/>
+          </a:prstGeom>
+          <a:noFill/>
+        </p:spPr>
+        <p:txBody>
+          <a:bodyPr wrap="square" anchor="t">
+            <a:spAutoFit/>
+          </a:bodyPr>
+          <a:lstStyle/>
+          <a:p>
+            <a:pPr algn="l">
+              <a:lnSpc>
+                <a:spcPct val="105000"/>
+              </a:lnSpc>
+            </a:pPr>
+            <a:r>
+              <a:rPr sz="1150" b="0">
+                <a:solidFill>
+                  <a:srgbClr val="475569"/>
+                </a:solidFill>
+                <a:latin typeface="Malgun Gothic"/>
+              </a:rPr>
+              <a:t>A. Look-ups happen instantly; important actions are confirmed with 'Shall I?' It only does what you have permission for.</a:t>
+            </a:r>
+          </a:p>
+        </p:txBody>
+      </p:sp>
+      <p:sp>
+        <p:nvSpPr>
+          <p:cNvPr id="21" name="Rounded Rectangle 20"/>
+          <p:cNvSpPr/>
+          <p:nvPr/>
+        </p:nvSpPr>
+        <p:spPr>
+          <a:xfrm>
+            <a:off x="365760" y="5504688"/>
+            <a:ext cx="11460175" cy="868680"/>
+          </a:xfrm>
+          <a:prstGeom prst="roundRect">
+            <a:avLst/>
+          </a:prstGeom>
+          <a:solidFill>
+            <a:srgbClr val="F8FAFC"/>
+          </a:solidFill>
+          <a:ln w="12700">
+            <a:solidFill>
+              <a:srgbClr val="E2E8F0"/>
+            </a:solidFill>
+          </a:ln>
+          <a:effectLst/>
+        </p:spPr>
+        <p:style>
+          <a:lnRef idx="1">
+            <a:schemeClr val="accent1"/>
+          </a:lnRef>
+          <a:fillRef idx="3">
+            <a:schemeClr val="accent1"/>
+          </a:fillRef>
+          <a:effectRef idx="2">
+            <a:schemeClr val="accent1"/>
+          </a:effectRef>
+          <a:fontRef idx="minor">
+            <a:schemeClr val="lt1"/>
+          </a:fontRef>
+        </p:style>
+        <p:txBody>
+          <a:bodyPr rtlCol="0" anchor="ctr"/>
+          <a:lstStyle/>
+          <a:p>
+            <a:pPr algn="ctr"/>
+          </a:p>
+        </p:txBody>
+      </p:sp>
+      <p:sp>
+        <p:nvSpPr>
+          <p:cNvPr id="22" name="TextBox 21"/>
+          <p:cNvSpPr txBox="1"/>
+          <p:nvPr/>
+        </p:nvSpPr>
+        <p:spPr>
+          <a:xfrm>
+            <a:off x="548640" y="5577840"/>
+            <a:ext cx="11094415" cy="365760"/>
+          </a:xfrm>
+          <a:prstGeom prst="rect">
+            <a:avLst/>
+          </a:prstGeom>
+          <a:noFill/>
+        </p:spPr>
+        <p:txBody>
+          <a:bodyPr wrap="square" anchor="t">
+            <a:spAutoFit/>
+          </a:bodyPr>
+          <a:lstStyle/>
+          <a:p>
+            <a:pPr algn="l">
+              <a:lnSpc>
+                <a:spcPct val="100000"/>
+              </a:lnSpc>
+            </a:pPr>
+            <a:r>
+              <a:rPr sz="1350" b="1">
+                <a:solidFill>
+                  <a:srgbClr val="4F46E5"/>
+                </a:solidFill>
+                <a:latin typeface="Malgun Gothic"/>
+              </a:rPr>
+              <a:t>Q. Refund math is confusing.</a:t>
+            </a:r>
+          </a:p>
+        </p:txBody>
+      </p:sp>
+      <p:sp>
+        <p:nvSpPr>
+          <p:cNvPr id="23" name="TextBox 22"/>
+          <p:cNvSpPr txBox="1"/>
+          <p:nvPr/>
+        </p:nvSpPr>
+        <p:spPr>
+          <a:xfrm>
+            <a:off x="548640" y="5916168"/>
+            <a:ext cx="11094415" cy="411480"/>
+          </a:xfrm>
+          <a:prstGeom prst="rect">
+            <a:avLst/>
+          </a:prstGeom>
+          <a:noFill/>
+        </p:spPr>
+        <p:txBody>
+          <a:bodyPr wrap="square" anchor="t">
+            <a:spAutoFit/>
+          </a:bodyPr>
+          <a:lstStyle/>
+          <a:p>
+            <a:pPr algn="l">
+              <a:lnSpc>
+                <a:spcPct val="105000"/>
+              </a:lnSpc>
+            </a:pPr>
+            <a:r>
+              <a:rPr sz="1150" b="0">
+                <a:solidFill>
+                  <a:srgbClr val="475569"/>
+                </a:solidFill>
+                <a:latin typeface="Malgun Gothic"/>
+              </a:rPr>
+              <a:t>A. It's auto-calculated by the refund table; discounted payments are recalculated at list price.</a:t>
+            </a:r>
+          </a:p>
+        </p:txBody>
+      </p:sp>
+      <p:sp>
+        <p:nvSpPr>
+          <p:cNvPr id="24" name="Rounded Rectangle 23"/>
+          <p:cNvSpPr/>
+          <p:nvPr/>
+        </p:nvSpPr>
+        <p:spPr>
+          <a:xfrm>
+            <a:off x="365760" y="6492240"/>
+            <a:ext cx="11460175" cy="868680"/>
+          </a:xfrm>
+          <a:prstGeom prst="roundRect">
+            <a:avLst/>
+          </a:prstGeom>
+          <a:solidFill>
+            <a:srgbClr val="F8FAFC"/>
+          </a:solidFill>
+          <a:ln w="12700">
+            <a:solidFill>
+              <a:srgbClr val="E2E8F0"/>
+            </a:solidFill>
+          </a:ln>
+          <a:effectLst/>
+        </p:spPr>
+        <p:style>
+          <a:lnRef idx="1">
+            <a:schemeClr val="accent1"/>
+          </a:lnRef>
+          <a:fillRef idx="3">
+            <a:schemeClr val="accent1"/>
+          </a:fillRef>
+          <a:effectRef idx="2">
+            <a:schemeClr val="accent1"/>
+          </a:effectRef>
+          <a:fontRef idx="minor">
+            <a:schemeClr val="lt1"/>
+          </a:fontRef>
+        </p:style>
+        <p:txBody>
+          <a:bodyPr rtlCol="0" anchor="ctr"/>
+          <a:lstStyle/>
+          <a:p>
+            <a:pPr algn="ctr"/>
+          </a:p>
+        </p:txBody>
+      </p:sp>
+      <p:sp>
+        <p:nvSpPr>
+          <p:cNvPr id="25" name="TextBox 24"/>
+          <p:cNvSpPr txBox="1"/>
+          <p:nvPr/>
+        </p:nvSpPr>
+        <p:spPr>
+          <a:xfrm>
+            <a:off x="548640" y="6565392"/>
+            <a:ext cx="11094415" cy="365760"/>
+          </a:xfrm>
+          <a:prstGeom prst="rect">
+            <a:avLst/>
+          </a:prstGeom>
+          <a:noFill/>
+        </p:spPr>
+        <p:txBody>
+          <a:bodyPr wrap="square" anchor="t">
+            <a:spAutoFit/>
+          </a:bodyPr>
+          <a:lstStyle/>
+          <a:p>
+            <a:pPr algn="l">
+              <a:lnSpc>
+                <a:spcPct val="100000"/>
+              </a:lnSpc>
+            </a:pPr>
+            <a:r>
+              <a:rPr sz="1350" b="1">
+                <a:solidFill>
+                  <a:srgbClr val="4F46E5"/>
+                </a:solidFill>
+                <a:latin typeface="Malgun Gothic"/>
+              </a:rPr>
+              <a:t>Q. I'm worried about churn.</a:t>
+            </a:r>
+          </a:p>
+        </p:txBody>
+      </p:sp>
+      <p:sp>
+        <p:nvSpPr>
+          <p:cNvPr id="26" name="TextBox 25"/>
+          <p:cNvSpPr txBox="1"/>
+          <p:nvPr/>
+        </p:nvSpPr>
+        <p:spPr>
+          <a:xfrm>
+            <a:off x="548640" y="6903720"/>
+            <a:ext cx="11094415" cy="411480"/>
+          </a:xfrm>
+          <a:prstGeom prst="rect">
+            <a:avLst/>
+          </a:prstGeom>
+          <a:noFill/>
+        </p:spPr>
+        <p:txBody>
+          <a:bodyPr wrap="square" anchor="t">
+            <a:spAutoFit/>
+          </a:bodyPr>
+          <a:lstStyle/>
+          <a:p>
+            <a:pPr algn="l">
+              <a:lnSpc>
+                <a:spcPct val="105000"/>
+              </a:lnSpc>
+            </a:pPr>
+            <a:r>
+              <a:rPr sz="1150" b="0">
+                <a:solidFill>
+                  <a:srgbClr val="475569"/>
+                </a:solidFill>
+                <a:latin typeface="Malgun Gothic"/>
+              </a:rPr>
+              <a:t>A. Find at-risk students early with the Retention Center's churn-risk/contagion network and intervene via alert-talk/counseling.</a:t>
+            </a:r>
+          </a:p>
+        </p:txBody>
+      </p:sp>
+    </p:spTree>
+  </p:cSld>
+  <p:clrMapOvr>
+    <a:masterClrMapping/>
+  </p:clrMapOvr>
+</p:sld>
+</file>
+
+<file path=ppt/slides/slide46.xml><?xml version="1.0" encoding="utf-8"?>
+<p:sld xmlns:a="http://schemas.openxmlformats.org/drawingml/2006/main" xmlns:p="http://schemas.openxmlformats.org/presentationml/2006/main" xmlns:r="http://schemas.openxmlformats.org/officeDocument/2006/relationships">
+  <p:cSld>
+    <p:bg>
+      <p:bgPr>
+        <a:solidFill>
+          <a:srgbClr val="EEF2FF"/>
+        </a:solidFill>
+        <a:effectLst/>
+      </p:bgPr>
+    </p:bg>
+    <p:spTree>
+      <p:nvGrpSpPr>
+        <p:cNvPr id="1" name=""/>
+        <p:cNvGrpSpPr/>
+        <p:nvPr/>
+      </p:nvGrpSpPr>
+      <p:grpSpPr/>
+      <p:sp>
+        <p:nvSpPr>
+          <p:cNvPr id="2" name="Rectangle 1"/>
+          <p:cNvSpPr/>
+          <p:nvPr/>
+        </p:nvSpPr>
+        <p:spPr>
+          <a:xfrm>
+            <a:off x="0" y="0"/>
+            <a:ext cx="12191695" cy="566928"/>
+          </a:xfrm>
+          <a:prstGeom prst="rect">
+            <a:avLst/>
+          </a:prstGeom>
+          <a:solidFill>
+            <a:srgbClr val="4F46E5"/>
+          </a:solidFill>
+          <a:ln>
+            <a:noFill/>
+          </a:ln>
+          <a:effectLst/>
+        </p:spPr>
+        <p:style>
+          <a:lnRef idx="1">
+            <a:schemeClr val="accent1"/>
+          </a:lnRef>
+          <a:fillRef idx="3">
+            <a:schemeClr val="accent1"/>
+          </a:fillRef>
+          <a:effectRef idx="2">
+            <a:schemeClr val="accent1"/>
+          </a:effectRef>
+          <a:fontRef idx="minor">
+            <a:schemeClr val="lt1"/>
+          </a:fontRef>
+        </p:style>
+        <p:txBody>
+          <a:bodyPr rtlCol="0" anchor="ctr"/>
+          <a:lstStyle/>
+          <a:p>
+            <a:pPr algn="ctr"/>
+          </a:p>
+        </p:txBody>
+      </p:sp>
+      <p:sp>
+        <p:nvSpPr>
+          <p:cNvPr id="3" name="Rectangle 2"/>
+          <p:cNvSpPr/>
+          <p:nvPr/>
+        </p:nvSpPr>
+        <p:spPr>
+          <a:xfrm>
+            <a:off x="0" y="566928"/>
+            <a:ext cx="12191695" cy="54864"/>
+          </a:xfrm>
+          <a:prstGeom prst="rect">
+            <a:avLst/>
+          </a:prstGeom>
+          <a:solidFill>
+            <a:srgbClr val="FF9F1C"/>
+          </a:solidFill>
+          <a:ln>
+            <a:noFill/>
+          </a:ln>
+          <a:effectLst/>
+        </p:spPr>
+        <p:style>
+          <a:lnRef idx="1">
+            <a:schemeClr val="accent1"/>
+          </a:lnRef>
+          <a:fillRef idx="3">
+            <a:schemeClr val="accent1"/>
+          </a:fillRef>
+          <a:effectRef idx="2">
+            <a:schemeClr val="accent1"/>
+          </a:effectRef>
+          <a:fontRef idx="minor">
+            <a:schemeClr val="lt1"/>
+          </a:fontRef>
+        </p:style>
+        <p:txBody>
+          <a:bodyPr rtlCol="0" anchor="ctr"/>
+          <a:lstStyle/>
+          <a:p>
+            <a:pPr algn="ctr"/>
+          </a:p>
+        </p:txBody>
+      </p:sp>
+      <p:sp>
+        <p:nvSpPr>
+          <p:cNvPr id="4" name="TextBox 3"/>
+          <p:cNvSpPr txBox="1"/>
+          <p:nvPr/>
+        </p:nvSpPr>
+        <p:spPr>
+          <a:xfrm>
+            <a:off x="365760" y="27432"/>
+            <a:ext cx="7315200" cy="502920"/>
+          </a:xfrm>
+          <a:prstGeom prst="rect">
+            <a:avLst/>
+          </a:prstGeom>
+          <a:noFill/>
+        </p:spPr>
+        <p:txBody>
+          <a:bodyPr wrap="square" anchor="ctr">
+            <a:spAutoFit/>
+          </a:bodyPr>
+          <a:lstStyle/>
+          <a:p>
+            <a:pPr algn="l">
+              <a:lnSpc>
+                <a:spcPct val="100000"/>
+              </a:lnSpc>
+            </a:pPr>
+            <a:r>
+              <a:rPr sz="1500" b="1">
+                <a:solidFill>
+                  <a:srgbClr val="FFFFFF"/>
+                </a:solidFill>
+                <a:latin typeface="Malgun Gothic"/>
+              </a:rPr>
+              <a:t>🏫 Mangoi Admin User Guide</a:t>
+            </a:r>
+          </a:p>
+        </p:txBody>
+      </p:sp>
+      <p:sp>
+        <p:nvSpPr>
+          <p:cNvPr id="5" name="TextBox 4"/>
+          <p:cNvSpPr txBox="1"/>
+          <p:nvPr/>
+        </p:nvSpPr>
+        <p:spPr>
+          <a:xfrm>
+            <a:off x="8168335" y="27432"/>
+            <a:ext cx="3657600" cy="502920"/>
+          </a:xfrm>
+          <a:prstGeom prst="rect">
+            <a:avLst/>
+          </a:prstGeom>
+          <a:noFill/>
+        </p:spPr>
+        <p:txBody>
+          <a:bodyPr wrap="square" anchor="ctr">
+            <a:spAutoFit/>
+          </a:bodyPr>
+          <a:lstStyle/>
+          <a:p>
+            <a:pPr algn="r">
+              <a:lnSpc>
+                <a:spcPct val="100000"/>
+              </a:lnSpc>
+            </a:pPr>
+            <a:r>
+              <a:rPr sz="1300" b="1">
+                <a:solidFill>
+                  <a:srgbClr val="F1F5F9"/>
+                </a:solidFill>
+                <a:latin typeface="Malgun Gothic"/>
+              </a:rPr>
+              <a:t>Checklist</a:t>
+            </a:r>
+          </a:p>
+        </p:txBody>
+      </p:sp>
+      <p:sp>
+        <p:nvSpPr>
+          <p:cNvPr id="6" name="Rounded Rectangle 5"/>
+          <p:cNvSpPr/>
+          <p:nvPr/>
+        </p:nvSpPr>
+        <p:spPr>
+          <a:xfrm>
+            <a:off x="365760" y="841248"/>
+            <a:ext cx="658368" cy="512064"/>
+          </a:xfrm>
+          <a:prstGeom prst="roundRect">
+            <a:avLst/>
+          </a:prstGeom>
+          <a:solidFill>
+            <a:srgbClr val="4F46E5"/>
+          </a:solidFill>
+          <a:ln>
+            <a:noFill/>
+          </a:ln>
+          <a:effectLst/>
+        </p:spPr>
+        <p:style>
+          <a:lnRef idx="1">
+            <a:schemeClr val="accent1"/>
+          </a:lnRef>
+          <a:fillRef idx="3">
+            <a:schemeClr val="accent1"/>
+          </a:fillRef>
+          <a:effectRef idx="2">
+            <a:schemeClr val="accent1"/>
+          </a:effectRef>
+          <a:fontRef idx="minor">
+            <a:schemeClr val="lt1"/>
+          </a:fontRef>
+        </p:style>
+        <p:txBody>
+          <a:bodyPr rtlCol="0" anchor="ctr"/>
+          <a:lstStyle/>
+          <a:p>
+            <a:pPr algn="ctr"/>
+          </a:p>
+        </p:txBody>
+      </p:sp>
+      <p:sp>
+        <p:nvSpPr>
+          <p:cNvPr id="7" name="TextBox 6"/>
+          <p:cNvSpPr txBox="1"/>
+          <p:nvPr/>
+        </p:nvSpPr>
+        <p:spPr>
+          <a:xfrm>
+            <a:off x="365760" y="841248"/>
+            <a:ext cx="658368" cy="512064"/>
+          </a:xfrm>
+          <a:prstGeom prst="rect">
+            <a:avLst/>
+          </a:prstGeom>
+          <a:noFill/>
+        </p:spPr>
+        <p:txBody>
+          <a:bodyPr wrap="square" anchor="ctr">
+            <a:spAutoFit/>
+          </a:bodyPr>
+          <a:lstStyle/>
+          <a:p>
+            <a:pPr algn="ctr">
+              <a:lnSpc>
+                <a:spcPct val="100000"/>
+              </a:lnSpc>
+            </a:pPr>
+            <a:r>
+              <a:rPr sz="1700" b="1">
+                <a:solidFill>
+                  <a:srgbClr val="FFFFFF"/>
+                </a:solidFill>
+                <a:latin typeface="Malgun Gothic"/>
+              </a:rPr>
+              <a:t>42</a:t>
+            </a:r>
+          </a:p>
+        </p:txBody>
+      </p:sp>
+      <p:sp>
+        <p:nvSpPr>
+          <p:cNvPr id="8" name="TextBox 7"/>
+          <p:cNvSpPr txBox="1"/>
+          <p:nvPr/>
+        </p:nvSpPr>
+        <p:spPr>
+          <a:xfrm>
+            <a:off x="1143000" y="868680"/>
+            <a:ext cx="9144000" cy="457200"/>
+          </a:xfrm>
+          <a:prstGeom prst="rect">
+            <a:avLst/>
+          </a:prstGeom>
+          <a:noFill/>
+        </p:spPr>
+        <p:txBody>
+          <a:bodyPr wrap="square" anchor="t">
+            <a:spAutoFit/>
+          </a:bodyPr>
+          <a:lstStyle/>
+          <a:p>
+            <a:pPr algn="l">
+              <a:lnSpc>
+                <a:spcPct val="100000"/>
+              </a:lnSpc>
+            </a:pPr>
+            <a:r>
+              <a:rPr sz="2200" b="1">
+                <a:solidFill>
+                  <a:srgbClr val="4F46E5"/>
+                </a:solidFill>
+                <a:latin typeface="Malgun Gothic"/>
+              </a:rPr>
+              <a:t>✅ Daily Operations Checklist</a:t>
+            </a:r>
+          </a:p>
+        </p:txBody>
+      </p:sp>
+      <p:sp>
+        <p:nvSpPr>
+          <p:cNvPr id="9" name="Rounded Rectangle 8"/>
+          <p:cNvSpPr/>
+          <p:nvPr/>
+        </p:nvSpPr>
+        <p:spPr>
+          <a:xfrm>
+            <a:off x="457200" y="1645920"/>
+            <a:ext cx="292608" cy="292608"/>
+          </a:xfrm>
+          <a:prstGeom prst="roundRect">
+            <a:avLst/>
+          </a:prstGeom>
+          <a:solidFill>
+            <a:srgbClr val="FFFFFF"/>
+          </a:solidFill>
+          <a:ln w="12700">
+            <a:solidFill>
+              <a:srgbClr val="4F46E5"/>
+            </a:solidFill>
+          </a:ln>
+          <a:effectLst/>
+        </p:spPr>
+        <p:style>
+          <a:lnRef idx="1">
+            <a:schemeClr val="accent1"/>
+          </a:lnRef>
+          <a:fillRef idx="3">
+            <a:schemeClr val="accent1"/>
+          </a:fillRef>
+          <a:effectRef idx="2">
+            <a:schemeClr val="accent1"/>
+          </a:effectRef>
+          <a:fontRef idx="minor">
+            <a:schemeClr val="lt1"/>
+          </a:fontRef>
+        </p:style>
+        <p:txBody>
+          <a:bodyPr rtlCol="0" anchor="ctr"/>
+          <a:lstStyle/>
+          <a:p>
+            <a:pPr algn="ctr"/>
+          </a:p>
+        </p:txBody>
+      </p:sp>
+      <p:sp>
+        <p:nvSpPr>
+          <p:cNvPr id="10" name="TextBox 9"/>
+          <p:cNvSpPr txBox="1"/>
+          <p:nvPr/>
+        </p:nvSpPr>
+        <p:spPr>
+          <a:xfrm>
+            <a:off x="914400" y="1581912"/>
+            <a:ext cx="10058400" cy="411480"/>
+          </a:xfrm>
+          <a:prstGeom prst="rect">
+            <a:avLst/>
+          </a:prstGeom>
+          <a:noFill/>
+        </p:spPr>
+        <p:txBody>
+          <a:bodyPr wrap="square" anchor="t">
+            <a:spAutoFit/>
+          </a:bodyPr>
+          <a:lstStyle/>
+          <a:p>
+            <a:pPr algn="l">
+              <a:lnSpc>
+                <a:spcPct val="100000"/>
+              </a:lnSpc>
+            </a:pPr>
+            <a:r>
+              <a:rPr sz="1500" b="1">
+                <a:solidFill>
+                  <a:srgbClr val="334155"/>
+                </a:solidFill>
+                <a:latin typeface="Malgun Gothic"/>
+              </a:rPr>
+              <a:t>Did you check today's revenue, enrollment and attendance?</a:t>
+            </a:r>
+          </a:p>
+        </p:txBody>
+      </p:sp>
+      <p:sp>
+        <p:nvSpPr>
+          <p:cNvPr id="11" name="Rounded Rectangle 10"/>
+          <p:cNvSpPr/>
+          <p:nvPr/>
+        </p:nvSpPr>
+        <p:spPr>
+          <a:xfrm>
+            <a:off x="457200" y="2212848"/>
+            <a:ext cx="292608" cy="292608"/>
+          </a:xfrm>
+          <a:prstGeom prst="roundRect">
+            <a:avLst/>
+          </a:prstGeom>
+          <a:solidFill>
+            <a:srgbClr val="FFFFFF"/>
+          </a:solidFill>
+          <a:ln w="12700">
+            <a:solidFill>
+              <a:srgbClr val="4F46E5"/>
+            </a:solidFill>
+          </a:ln>
+          <a:effectLst/>
+        </p:spPr>
+        <p:style>
+          <a:lnRef idx="1">
+            <a:schemeClr val="accent1"/>
+          </a:lnRef>
+          <a:fillRef idx="3">
+            <a:schemeClr val="accent1"/>
+          </a:fillRef>
+          <a:effectRef idx="2">
+            <a:schemeClr val="accent1"/>
+          </a:effectRef>
+          <a:fontRef idx="minor">
+            <a:schemeClr val="lt1"/>
+          </a:fontRef>
+        </p:style>
+        <p:txBody>
+          <a:bodyPr rtlCol="0" anchor="ctr"/>
+          <a:lstStyle/>
+          <a:p>
+            <a:pPr algn="ctr"/>
+          </a:p>
+        </p:txBody>
+      </p:sp>
+      <p:sp>
+        <p:nvSpPr>
+          <p:cNvPr id="12" name="TextBox 11"/>
+          <p:cNvSpPr txBox="1"/>
+          <p:nvPr/>
+        </p:nvSpPr>
+        <p:spPr>
+          <a:xfrm>
+            <a:off x="914400" y="2148840"/>
+            <a:ext cx="10058400" cy="411480"/>
+          </a:xfrm>
+          <a:prstGeom prst="rect">
+            <a:avLst/>
+          </a:prstGeom>
+          <a:noFill/>
+        </p:spPr>
+        <p:txBody>
+          <a:bodyPr wrap="square" anchor="t">
+            <a:spAutoFit/>
+          </a:bodyPr>
+          <a:lstStyle/>
+          <a:p>
+            <a:pPr algn="l">
+              <a:lnSpc>
+                <a:spcPct val="100000"/>
+              </a:lnSpc>
+            </a:pPr>
+            <a:r>
+              <a:rPr sz="1500" b="1">
+                <a:solidFill>
+                  <a:srgbClr val="334155"/>
+                </a:solidFill>
+                <a:latin typeface="Malgun Gothic"/>
+              </a:rPr>
+              <a:t>Did you handle new counseling/inquiries?</a:t>
+            </a:r>
+          </a:p>
+        </p:txBody>
+      </p:sp>
+      <p:sp>
+        <p:nvSpPr>
+          <p:cNvPr id="13" name="Rounded Rectangle 12"/>
+          <p:cNvSpPr/>
+          <p:nvPr/>
+        </p:nvSpPr>
+        <p:spPr>
+          <a:xfrm>
+            <a:off x="457200" y="2779776"/>
+            <a:ext cx="292608" cy="292608"/>
+          </a:xfrm>
+          <a:prstGeom prst="roundRect">
+            <a:avLst/>
+          </a:prstGeom>
+          <a:solidFill>
+            <a:srgbClr val="FFFFFF"/>
+          </a:solidFill>
+          <a:ln w="12700">
+            <a:solidFill>
+              <a:srgbClr val="4F46E5"/>
+            </a:solidFill>
+          </a:ln>
+          <a:effectLst/>
+        </p:spPr>
+        <p:style>
+          <a:lnRef idx="1">
+            <a:schemeClr val="accent1"/>
+          </a:lnRef>
+          <a:fillRef idx="3">
+            <a:schemeClr val="accent1"/>
+          </a:fillRef>
+          <a:effectRef idx="2">
+            <a:schemeClr val="accent1"/>
+          </a:effectRef>
+          <a:fontRef idx="minor">
+            <a:schemeClr val="lt1"/>
+          </a:fontRef>
+        </p:style>
+        <p:txBody>
+          <a:bodyPr rtlCol="0" anchor="ctr"/>
+          <a:lstStyle/>
+          <a:p>
+            <a:pPr algn="ctr"/>
+          </a:p>
+        </p:txBody>
+      </p:sp>
+      <p:sp>
+        <p:nvSpPr>
+          <p:cNvPr id="14" name="TextBox 13"/>
+          <p:cNvSpPr txBox="1"/>
+          <p:nvPr/>
+        </p:nvSpPr>
+        <p:spPr>
+          <a:xfrm>
+            <a:off x="914400" y="2715768"/>
+            <a:ext cx="10058400" cy="411480"/>
+          </a:xfrm>
+          <a:prstGeom prst="rect">
+            <a:avLst/>
+          </a:prstGeom>
+          <a:noFill/>
+        </p:spPr>
+        <p:txBody>
+          <a:bodyPr wrap="square" anchor="t">
+            <a:spAutoFit/>
+          </a:bodyPr>
+          <a:lstStyle/>
+          <a:p>
+            <a:pPr algn="l">
+              <a:lnSpc>
+                <a:spcPct val="100000"/>
+              </a:lnSpc>
+            </a:pPr>
+            <a:r>
+              <a:rPr sz="1500" b="1">
+                <a:solidFill>
+                  <a:srgbClr val="334155"/>
+                </a:solidFill>
+                <a:latin typeface="Malgun Gothic"/>
+              </a:rPr>
+              <a:t>Did you check overdue and refund items?</a:t>
+            </a:r>
+          </a:p>
+        </p:txBody>
+      </p:sp>
+      <p:sp>
+        <p:nvSpPr>
+          <p:cNvPr id="15" name="Rounded Rectangle 14"/>
+          <p:cNvSpPr/>
+          <p:nvPr/>
+        </p:nvSpPr>
+        <p:spPr>
+          <a:xfrm>
+            <a:off x="457200" y="3346704"/>
+            <a:ext cx="292608" cy="292608"/>
+          </a:xfrm>
+          <a:prstGeom prst="roundRect">
+            <a:avLst/>
+          </a:prstGeom>
+          <a:solidFill>
+            <a:srgbClr val="FFFFFF"/>
+          </a:solidFill>
+          <a:ln w="12700">
+            <a:solidFill>
+              <a:srgbClr val="4F46E5"/>
+            </a:solidFill>
+          </a:ln>
+          <a:effectLst/>
+        </p:spPr>
+        <p:style>
+          <a:lnRef idx="1">
+            <a:schemeClr val="accent1"/>
+          </a:lnRef>
+          <a:fillRef idx="3">
+            <a:schemeClr val="accent1"/>
+          </a:fillRef>
+          <a:effectRef idx="2">
+            <a:schemeClr val="accent1"/>
+          </a:effectRef>
+          <a:fontRef idx="minor">
+            <a:schemeClr val="lt1"/>
+          </a:fontRef>
+        </p:style>
+        <p:txBody>
+          <a:bodyPr rtlCol="0" anchor="ctr"/>
+          <a:lstStyle/>
+          <a:p>
+            <a:pPr algn="ctr"/>
+          </a:p>
+        </p:txBody>
+      </p:sp>
+      <p:sp>
+        <p:nvSpPr>
+          <p:cNvPr id="16" name="TextBox 15"/>
+          <p:cNvSpPr txBox="1"/>
+          <p:nvPr/>
+        </p:nvSpPr>
+        <p:spPr>
+          <a:xfrm>
+            <a:off x="914400" y="3282696"/>
+            <a:ext cx="10058400" cy="411480"/>
+          </a:xfrm>
+          <a:prstGeom prst="rect">
+            <a:avLst/>
+          </a:prstGeom>
+          <a:noFill/>
+        </p:spPr>
+        <p:txBody>
+          <a:bodyPr wrap="square" anchor="t">
+            <a:spAutoFit/>
+          </a:bodyPr>
+          <a:lstStyle/>
+          <a:p>
+            <a:pPr algn="l">
+              <a:lnSpc>
+                <a:spcPct val="100000"/>
+              </a:lnSpc>
+            </a:pPr>
+            <a:r>
+              <a:rPr sz="1500" b="1">
+                <a:solidFill>
+                  <a:srgbClr val="334155"/>
+                </a:solidFill>
+                <a:latin typeface="Malgun Gothic"/>
+              </a:rPr>
+              <a:t>Did you check the live (LIVE) lesson status?</a:t>
+            </a:r>
+          </a:p>
+        </p:txBody>
+      </p:sp>
+      <p:sp>
+        <p:nvSpPr>
+          <p:cNvPr id="17" name="Rounded Rectangle 16"/>
+          <p:cNvSpPr/>
+          <p:nvPr/>
+        </p:nvSpPr>
+        <p:spPr>
+          <a:xfrm>
+            <a:off x="457200" y="3913632"/>
+            <a:ext cx="292608" cy="292608"/>
+          </a:xfrm>
+          <a:prstGeom prst="roundRect">
+            <a:avLst/>
+          </a:prstGeom>
+          <a:solidFill>
+            <a:srgbClr val="FFFFFF"/>
+          </a:solidFill>
+          <a:ln w="12700">
+            <a:solidFill>
+              <a:srgbClr val="4F46E5"/>
+            </a:solidFill>
+          </a:ln>
+          <a:effectLst/>
+        </p:spPr>
+        <p:style>
+          <a:lnRef idx="1">
+            <a:schemeClr val="accent1"/>
+          </a:lnRef>
+          <a:fillRef idx="3">
+            <a:schemeClr val="accent1"/>
+          </a:fillRef>
+          <a:effectRef idx="2">
+            <a:schemeClr val="accent1"/>
+          </a:effectRef>
+          <a:fontRef idx="minor">
+            <a:schemeClr val="lt1"/>
+          </a:fontRef>
+        </p:style>
+        <p:txBody>
+          <a:bodyPr rtlCol="0" anchor="ctr"/>
+          <a:lstStyle/>
+          <a:p>
+            <a:pPr algn="ctr"/>
+          </a:p>
+        </p:txBody>
+      </p:sp>
+      <p:sp>
+        <p:nvSpPr>
+          <p:cNvPr id="18" name="TextBox 17"/>
+          <p:cNvSpPr txBox="1"/>
+          <p:nvPr/>
+        </p:nvSpPr>
+        <p:spPr>
+          <a:xfrm>
+            <a:off x="914400" y="3849624"/>
+            <a:ext cx="10058400" cy="411480"/>
+          </a:xfrm>
+          <a:prstGeom prst="rect">
+            <a:avLst/>
+          </a:prstGeom>
+          <a:noFill/>
+        </p:spPr>
+        <p:txBody>
+          <a:bodyPr wrap="square" anchor="t">
+            <a:spAutoFit/>
+          </a:bodyPr>
+          <a:lstStyle/>
+          <a:p>
+            <a:pPr algn="l">
+              <a:lnSpc>
+                <a:spcPct val="100000"/>
+              </a:lnSpc>
+            </a:pPr>
+            <a:r>
+              <a:rPr sz="1500" b="1">
+                <a:solidFill>
+                  <a:srgbClr val="334155"/>
+                </a:solidFill>
+                <a:latin typeface="Malgun Gothic"/>
+              </a:rPr>
+              <a:t>Did you care for students whose churn risk rose?</a:t>
+            </a:r>
+          </a:p>
+        </p:txBody>
+      </p:sp>
+      <p:sp>
+        <p:nvSpPr>
+          <p:cNvPr id="19" name="Rounded Rectangle 18"/>
+          <p:cNvSpPr/>
+          <p:nvPr/>
+        </p:nvSpPr>
+        <p:spPr>
+          <a:xfrm>
+            <a:off x="457200" y="4480560"/>
+            <a:ext cx="292608" cy="292608"/>
+          </a:xfrm>
+          <a:prstGeom prst="roundRect">
+            <a:avLst/>
+          </a:prstGeom>
+          <a:solidFill>
+            <a:srgbClr val="FFFFFF"/>
+          </a:solidFill>
+          <a:ln w="12700">
+            <a:solidFill>
+              <a:srgbClr val="4F46E5"/>
+            </a:solidFill>
+          </a:ln>
+          <a:effectLst/>
+        </p:spPr>
+        <p:style>
+          <a:lnRef idx="1">
+            <a:schemeClr val="accent1"/>
+          </a:lnRef>
+          <a:fillRef idx="3">
+            <a:schemeClr val="accent1"/>
+          </a:fillRef>
+          <a:effectRef idx="2">
+            <a:schemeClr val="accent1"/>
+          </a:effectRef>
+          <a:fontRef idx="minor">
+            <a:schemeClr val="lt1"/>
+          </a:fontRef>
+        </p:style>
+        <p:txBody>
+          <a:bodyPr rtlCol="0" anchor="ctr"/>
+          <a:lstStyle/>
+          <a:p>
+            <a:pPr algn="ctr"/>
+          </a:p>
+        </p:txBody>
+      </p:sp>
+      <p:sp>
+        <p:nvSpPr>
+          <p:cNvPr id="20" name="TextBox 19"/>
+          <p:cNvSpPr txBox="1"/>
+          <p:nvPr/>
+        </p:nvSpPr>
+        <p:spPr>
+          <a:xfrm>
+            <a:off x="914400" y="4416552"/>
+            <a:ext cx="10058400" cy="411480"/>
+          </a:xfrm>
+          <a:prstGeom prst="rect">
+            <a:avLst/>
+          </a:prstGeom>
+          <a:noFill/>
+        </p:spPr>
+        <p:txBody>
+          <a:bodyPr wrap="square" anchor="t">
+            <a:spAutoFit/>
+          </a:bodyPr>
+          <a:lstStyle/>
+          <a:p>
+            <a:pPr algn="l">
+              <a:lnSpc>
+                <a:spcPct val="100000"/>
+              </a:lnSpc>
+            </a:pPr>
+            <a:r>
+              <a:rPr sz="1500" b="1">
+                <a:solidFill>
+                  <a:srgbClr val="334155"/>
+                </a:solidFill>
+                <a:latin typeface="Malgun Gothic"/>
+              </a:rPr>
+              <a:t>Did you reflect teacher reviews/coaching feedback?</a:t>
+            </a:r>
+          </a:p>
+        </p:txBody>
+      </p:sp>
+      <p:sp>
+        <p:nvSpPr>
+          <p:cNvPr id="21" name="Rounded Rectangle 20"/>
+          <p:cNvSpPr/>
+          <p:nvPr/>
+        </p:nvSpPr>
+        <p:spPr>
+          <a:xfrm>
+            <a:off x="457200" y="5047488"/>
+            <a:ext cx="292608" cy="292608"/>
+          </a:xfrm>
+          <a:prstGeom prst="roundRect">
+            <a:avLst/>
+          </a:prstGeom>
+          <a:solidFill>
+            <a:srgbClr val="FFFFFF"/>
+          </a:solidFill>
+          <a:ln w="12700">
+            <a:solidFill>
+              <a:srgbClr val="4F46E5"/>
+            </a:solidFill>
+          </a:ln>
+          <a:effectLst/>
+        </p:spPr>
+        <p:style>
+          <a:lnRef idx="1">
+            <a:schemeClr val="accent1"/>
+          </a:lnRef>
+          <a:fillRef idx="3">
+            <a:schemeClr val="accent1"/>
+          </a:fillRef>
+          <a:effectRef idx="2">
+            <a:schemeClr val="accent1"/>
+          </a:effectRef>
+          <a:fontRef idx="minor">
+            <a:schemeClr val="lt1"/>
+          </a:fontRef>
+        </p:style>
+        <p:txBody>
+          <a:bodyPr rtlCol="0" anchor="ctr"/>
+          <a:lstStyle/>
+          <a:p>
+            <a:pPr algn="ctr"/>
+          </a:p>
+        </p:txBody>
+      </p:sp>
+      <p:sp>
+        <p:nvSpPr>
+          <p:cNvPr id="22" name="TextBox 21"/>
+          <p:cNvSpPr txBox="1"/>
+          <p:nvPr/>
+        </p:nvSpPr>
+        <p:spPr>
+          <a:xfrm>
+            <a:off x="914400" y="4983480"/>
+            <a:ext cx="10058400" cy="411480"/>
+          </a:xfrm>
+          <a:prstGeom prst="rect">
+            <a:avLst/>
+          </a:prstGeom>
+          <a:noFill/>
+        </p:spPr>
+        <p:txBody>
+          <a:bodyPr wrap="square" anchor="t">
+            <a:spAutoFit/>
+          </a:bodyPr>
+          <a:lstStyle/>
+          <a:p>
+            <a:pPr algn="l">
+              <a:lnSpc>
+                <a:spcPct val="100000"/>
+              </a:lnSpc>
+            </a:pPr>
+            <a:r>
+              <a:rPr sz="1500" b="1">
+                <a:solidFill>
+                  <a:srgbClr val="334155"/>
+                </a:solidFill>
+                <a:latin typeface="Malgun Gothic"/>
+              </a:rPr>
+              <a:t>Did you add repeat questions to the FAQ?</a:t>
+            </a:r>
+          </a:p>
+        </p:txBody>
+      </p:sp>
+      <p:pic>
+        <p:nvPicPr>
+          <p:cNvPr id="23" name="Picture 22" descr="mango_char.png"/>
+          <p:cNvPicPr>
+            <a:picLocks noChangeAspect="1"/>
+          </p:cNvPicPr>
+          <p:nvPr/>
+        </p:nvPicPr>
+        <p:blipFill>
+          <a:blip r:embed="rId2"/>
+          <a:stretch>
+            <a:fillRect/>
+          </a:stretch>
+        </p:blipFill>
+        <p:spPr>
+          <a:xfrm>
+            <a:off x="9153162" y="4480559"/>
+            <a:ext cx="2489892" cy="2011680"/>
+          </a:xfrm>
+          <a:prstGeom prst="rect">
+            <a:avLst/>
+          </a:prstGeom>
+        </p:spPr>
+      </p:pic>
+    </p:spTree>
+  </p:cSld>
+  <p:clrMapOvr>
+    <a:masterClrMapping/>
+  </p:clrMapOvr>
+</p:sld>
+</file>
+
+<file path=ppt/slides/slide47.xml><?xml version="1.0" encoding="utf-8"?>
+<p:sld xmlns:a="http://schemas.openxmlformats.org/drawingml/2006/main" xmlns:p="http://schemas.openxmlformats.org/presentationml/2006/main" xmlns:r="http://schemas.openxmlformats.org/officeDocument/2006/relationships">
+  <p:cSld>
+    <p:bg>
+      <p:bgPr>
+        <a:solidFill>
+          <a:srgbClr val="FFFFFF"/>
+        </a:solidFill>
+        <a:effectLst/>
+      </p:bgPr>
+    </p:bg>
+    <p:spTree>
+      <p:nvGrpSpPr>
+        <p:cNvPr id="1" name=""/>
+        <p:cNvGrpSpPr/>
+        <p:nvPr/>
+      </p:nvGrpSpPr>
+      <p:grpSpPr/>
+      <p:sp>
+        <p:nvSpPr>
+          <p:cNvPr id="2" name="Rectangle 1"/>
+          <p:cNvSpPr/>
+          <p:nvPr/>
+        </p:nvSpPr>
+        <p:spPr>
+          <a:xfrm>
+            <a:off x="0" y="0"/>
+            <a:ext cx="12191695" cy="566928"/>
+          </a:xfrm>
+          <a:prstGeom prst="rect">
+            <a:avLst/>
+          </a:prstGeom>
+          <a:solidFill>
+            <a:srgbClr val="4F46E5"/>
+          </a:solidFill>
+          <a:ln>
+            <a:noFill/>
+          </a:ln>
+          <a:effectLst/>
+        </p:spPr>
+        <p:style>
+          <a:lnRef idx="1">
+            <a:schemeClr val="accent1"/>
+          </a:lnRef>
+          <a:fillRef idx="3">
+            <a:schemeClr val="accent1"/>
+          </a:fillRef>
+          <a:effectRef idx="2">
+            <a:schemeClr val="accent1"/>
+          </a:effectRef>
+          <a:fontRef idx="minor">
+            <a:schemeClr val="lt1"/>
+          </a:fontRef>
+        </p:style>
+        <p:txBody>
+          <a:bodyPr rtlCol="0" anchor="ctr"/>
+          <a:lstStyle/>
+          <a:p>
+            <a:pPr algn="ctr"/>
+          </a:p>
+        </p:txBody>
+      </p:sp>
+      <p:sp>
+        <p:nvSpPr>
+          <p:cNvPr id="3" name="Rectangle 2"/>
+          <p:cNvSpPr/>
+          <p:nvPr/>
+        </p:nvSpPr>
+        <p:spPr>
+          <a:xfrm>
+            <a:off x="0" y="566928"/>
+            <a:ext cx="12191695" cy="54864"/>
+          </a:xfrm>
+          <a:prstGeom prst="rect">
+            <a:avLst/>
+          </a:prstGeom>
+          <a:solidFill>
+            <a:srgbClr val="FF9F1C"/>
+          </a:solidFill>
+          <a:ln>
+            <a:noFill/>
+          </a:ln>
+          <a:effectLst/>
+        </p:spPr>
+        <p:style>
+          <a:lnRef idx="1">
+            <a:schemeClr val="accent1"/>
+          </a:lnRef>
+          <a:fillRef idx="3">
+            <a:schemeClr val="accent1"/>
+          </a:fillRef>
+          <a:effectRef idx="2">
+            <a:schemeClr val="accent1"/>
+          </a:effectRef>
+          <a:fontRef idx="minor">
+            <a:schemeClr val="lt1"/>
+          </a:fontRef>
+        </p:style>
+        <p:txBody>
+          <a:bodyPr rtlCol="0" anchor="ctr"/>
+          <a:lstStyle/>
+          <a:p>
+            <a:pPr algn="ctr"/>
+          </a:p>
+        </p:txBody>
+      </p:sp>
+      <p:sp>
+        <p:nvSpPr>
+          <p:cNvPr id="4" name="TextBox 3"/>
+          <p:cNvSpPr txBox="1"/>
+          <p:nvPr/>
+        </p:nvSpPr>
+        <p:spPr>
+          <a:xfrm>
+            <a:off x="365760" y="27432"/>
+            <a:ext cx="7315200" cy="502920"/>
+          </a:xfrm>
+          <a:prstGeom prst="rect">
+            <a:avLst/>
+          </a:prstGeom>
+          <a:noFill/>
+        </p:spPr>
+        <p:txBody>
+          <a:bodyPr wrap="square" anchor="ctr">
+            <a:spAutoFit/>
+          </a:bodyPr>
+          <a:lstStyle/>
+          <a:p>
+            <a:pPr algn="l">
+              <a:lnSpc>
+                <a:spcPct val="100000"/>
+              </a:lnSpc>
+            </a:pPr>
+            <a:r>
+              <a:rPr sz="1500" b="1">
+                <a:solidFill>
+                  <a:srgbClr val="FFFFFF"/>
+                </a:solidFill>
+                <a:latin typeface="Malgun Gothic"/>
+              </a:rPr>
+              <a:t>🏫 Mangoi Admin User Guide</a:t>
+            </a:r>
+          </a:p>
+        </p:txBody>
+      </p:sp>
+      <p:sp>
+        <p:nvSpPr>
+          <p:cNvPr id="5" name="TextBox 4"/>
+          <p:cNvSpPr txBox="1"/>
+          <p:nvPr/>
+        </p:nvSpPr>
+        <p:spPr>
+          <a:xfrm>
+            <a:off x="8168335" y="27432"/>
+            <a:ext cx="3657600" cy="502920"/>
+          </a:xfrm>
+          <a:prstGeom prst="rect">
+            <a:avLst/>
+          </a:prstGeom>
+          <a:noFill/>
+        </p:spPr>
+        <p:txBody>
+          <a:bodyPr wrap="square" anchor="ctr">
+            <a:spAutoFit/>
+          </a:bodyPr>
+          <a:lstStyle/>
+          <a:p>
+            <a:pPr algn="r">
+              <a:lnSpc>
+                <a:spcPct val="100000"/>
+              </a:lnSpc>
+            </a:pPr>
+            <a:r>
+              <a:rPr sz="1300" b="1">
+                <a:solidFill>
+                  <a:srgbClr val="F1F5F9"/>
+                </a:solidFill>
+                <a:latin typeface="Malgun Gothic"/>
+              </a:rPr>
+              <a:t>Conclusion</a:t>
+            </a:r>
+          </a:p>
+        </p:txBody>
+      </p:sp>
+      <p:sp>
+        <p:nvSpPr>
+          <p:cNvPr id="6" name="Rounded Rectangle 5"/>
+          <p:cNvSpPr/>
+          <p:nvPr/>
+        </p:nvSpPr>
+        <p:spPr>
+          <a:xfrm>
+            <a:off x="365760" y="841248"/>
+            <a:ext cx="658368" cy="512064"/>
+          </a:xfrm>
+          <a:prstGeom prst="roundRect">
+            <a:avLst/>
+          </a:prstGeom>
+          <a:solidFill>
+            <a:srgbClr val="4F46E5"/>
+          </a:solidFill>
+          <a:ln>
+            <a:noFill/>
+          </a:ln>
+          <a:effectLst/>
+        </p:spPr>
+        <p:style>
+          <a:lnRef idx="1">
+            <a:schemeClr val="accent1"/>
+          </a:lnRef>
+          <a:fillRef idx="3">
+            <a:schemeClr val="accent1"/>
+          </a:fillRef>
+          <a:effectRef idx="2">
+            <a:schemeClr val="accent1"/>
+          </a:effectRef>
+          <a:fontRef idx="minor">
+            <a:schemeClr val="lt1"/>
+          </a:fontRef>
+        </p:style>
+        <p:txBody>
+          <a:bodyPr rtlCol="0" anchor="ctr"/>
+          <a:lstStyle/>
+          <a:p>
+            <a:pPr algn="ctr"/>
+          </a:p>
+        </p:txBody>
+      </p:sp>
+      <p:sp>
+        <p:nvSpPr>
+          <p:cNvPr id="7" name="TextBox 6"/>
+          <p:cNvSpPr txBox="1"/>
+          <p:nvPr/>
+        </p:nvSpPr>
+        <p:spPr>
+          <a:xfrm>
+            <a:off x="365760" y="841248"/>
+            <a:ext cx="658368" cy="512064"/>
+          </a:xfrm>
+          <a:prstGeom prst="rect">
+            <a:avLst/>
+          </a:prstGeom>
+          <a:noFill/>
+        </p:spPr>
+        <p:txBody>
+          <a:bodyPr wrap="square" anchor="ctr">
+            <a:spAutoFit/>
+          </a:bodyPr>
+          <a:lstStyle/>
+          <a:p>
+            <a:pPr algn="ctr">
+              <a:lnSpc>
+                <a:spcPct val="100000"/>
+              </a:lnSpc>
+            </a:pPr>
+            <a:r>
+              <a:rPr sz="1700" b="1">
+                <a:solidFill>
+                  <a:srgbClr val="FFFFFF"/>
+                </a:solidFill>
+                <a:latin typeface="Malgun Gothic"/>
+              </a:rPr>
+              <a:t>43</a:t>
             </a:r>
           </a:p>
         </p:txBody>
@@ -47535,7 +49999,7 @@
 </p:sld>
 </file>
 
-<file path=ppt/slides/slide46.xml><?xml version="1.0" encoding="utf-8"?>
+<file path=ppt/slides/slide48.xml><?xml version="1.0" encoding="utf-8"?>
 <p:sld xmlns:a="http://schemas.openxmlformats.org/drawingml/2006/main" xmlns:p="http://schemas.openxmlformats.org/presentationml/2006/main" xmlns:r="http://schemas.openxmlformats.org/officeDocument/2006/relationships">
   <p:cSld>
     <p:bg>

--- a/cloudflare-deploy/public/library/admin/admin-en.pptx
+++ b/cloudflare-deploy/public/library/admin/admin-en.pptx
@@ -56,6 +56,13 @@
     <p:sldId id="304" r:id="rId55"/>
     <p:sldId id="305" r:id="rId56"/>
     <p:sldId id="306" r:id="rId57"/>
+    <p:sldId id="307" r:id="rId58"/>
+    <p:sldId id="308" r:id="rId59"/>
+    <p:sldId id="309" r:id="rId60"/>
+    <p:sldId id="310" r:id="rId61"/>
+    <p:sldId id="311" r:id="rId62"/>
+    <p:sldId id="312" r:id="rId63"/>
+    <p:sldId id="313" r:id="rId64"/>
   </p:sldIdLst>
   <p:sldSz cx="12191695" cy="6858000" type="screen4x3"/>
   <p:notesSz cx="6858000" cy="9144000"/>
@@ -3232,7 +3239,7 @@
                   <a:srgbClr val="F59E0B"/>
                 </a:solidFill>
               </a:rPr>
-              <a:t>As of 2026-10-09 · current screens</a:t>
+              <a:t>2026-10-28 edition · screens: ch. 1–9 2026-10-09 · ch. 10 2026-10-28</a:t>
             </a:r>
           </a:p>
         </p:txBody>
@@ -4727,6 +4734,14 @@
               <a:t>9. Approvals · Daily handover</a:t>
             </a:r>
           </a:p>
+          <a:p>
+            <a:pPr>
+              <a:defRPr sz="1600"/>
+            </a:pPr>
+            <a:r>
+              <a:t>10. A.i content payment (agencies)</a:t>
+            </a:r>
+          </a:p>
         </p:txBody>
       </p:sp>
     </p:spTree>
@@ -6191,7 +6206,7 @@
               <a:defRPr sz="1600"/>
             </a:pPr>
             <a:r>
-              <a:t>• The students, teachers (Emma Kim, Teacher Anna …) and numbers in the screenshots are sample data. Your screen shows real ones.</a:t>
+              <a:t>• The students, teachers and academies (Emma Kim, Teacher Anna, Sample English Academy, demo001 …) and numbers in the screenshots are sample data. Your screen shows real ones.</a:t>
             </a:r>
           </a:p>
           <a:p>
@@ -6199,7 +6214,7 @@
               <a:defRPr sz="1600"/>
             </a:pPr>
             <a:r>
-              <a:t>• Red box = the place to press.</a:t>
+              <a:t>• Red box = the place to press. In chapter 10 the numbers on the pictures (④⑤ …) match the numbers in the text.</a:t>
             </a:r>
           </a:p>
         </p:txBody>
@@ -9357,6 +9372,952 @@
             </a:pPr>
             <a:r>
               <a:t>• If you skip a workday, you and the CEO get a reminder next morning (holidays excluded).</a:t>
+            </a:r>
+          </a:p>
+        </p:txBody>
+      </p:sp>
+    </p:spTree>
+  </p:cSld>
+  <p:clrMapOvr>
+    <a:masterClrMapping/>
+  </p:clrMapOvr>
+</p:sld>
+</file>
+
+<file path=ppt/slides/slide52.xml><?xml version="1.0" encoding="utf-8"?>
+<p:sld xmlns:a="http://schemas.openxmlformats.org/drawingml/2006/main" xmlns:p="http://schemas.openxmlformats.org/presentationml/2006/main" xmlns:r="http://schemas.openxmlformats.org/officeDocument/2006/relationships">
+  <p:cSld>
+    <p:spTree>
+      <p:nvGrpSpPr>
+        <p:cNvPr id="1" name=""/>
+        <p:cNvGrpSpPr/>
+        <p:nvPr/>
+      </p:nvGrpSpPr>
+      <p:grpSpPr/>
+      <p:sp>
+        <p:nvSpPr>
+          <p:cNvPr id="2" name="Rectangle 1"/>
+          <p:cNvSpPr/>
+          <p:nvPr/>
+        </p:nvSpPr>
+        <p:spPr>
+          <a:xfrm>
+            <a:off x="0" y="0"/>
+            <a:ext cx="12191695" cy="6858000"/>
+          </a:xfrm>
+          <a:prstGeom prst="rect">
+            <a:avLst/>
+          </a:prstGeom>
+          <a:solidFill>
+            <a:srgbClr val="FFF7ED"/>
+          </a:solidFill>
+          <a:ln>
+            <a:noFill/>
+          </a:ln>
+        </p:spPr>
+        <p:style>
+          <a:lnRef idx="1">
+            <a:schemeClr val="accent1"/>
+          </a:lnRef>
+          <a:fillRef idx="3">
+            <a:schemeClr val="accent1"/>
+          </a:fillRef>
+          <a:effectRef idx="2">
+            <a:schemeClr val="accent1"/>
+          </a:effectRef>
+          <a:fontRef idx="minor">
+            <a:schemeClr val="lt1"/>
+          </a:fontRef>
+        </p:style>
+        <p:txBody>
+          <a:bodyPr rtlCol="0" anchor="ctr"/>
+          <a:lstStyle/>
+          <a:p>
+            <a:pPr algn="ctr"/>
+          </a:p>
+        </p:txBody>
+      </p:sp>
+      <p:sp>
+        <p:nvSpPr>
+          <p:cNvPr id="3" name="TextBox 2"/>
+          <p:cNvSpPr txBox="1"/>
+          <p:nvPr/>
+        </p:nvSpPr>
+        <p:spPr>
+          <a:xfrm>
+            <a:off x="731520" y="2377440"/>
+            <a:ext cx="10698480" cy="1097280"/>
+          </a:xfrm>
+          <a:prstGeom prst="rect">
+            <a:avLst/>
+          </a:prstGeom>
+          <a:noFill/>
+        </p:spPr>
+        <p:txBody>
+          <a:bodyPr wrap="square">
+            <a:spAutoFit/>
+          </a:bodyPr>
+          <a:lstStyle/>
+          <a:p>
+            <a:r>
+              <a:rPr sz="3600" b="1">
+                <a:solidFill>
+                  <a:srgbClr val="111827"/>
+                </a:solidFill>
+              </a:rPr>
+              <a:t>10. A.i content payment (agencies)</a:t>
+            </a:r>
+          </a:p>
+        </p:txBody>
+      </p:sp>
+      <p:sp>
+        <p:nvSpPr>
+          <p:cNvPr id="4" name="TextBox 3"/>
+          <p:cNvSpPr txBox="1"/>
+          <p:nvPr/>
+        </p:nvSpPr>
+        <p:spPr>
+          <a:xfrm>
+            <a:off x="731520" y="3474720"/>
+            <a:ext cx="10698480" cy="1280160"/>
+          </a:xfrm>
+          <a:prstGeom prst="rect">
+            <a:avLst/>
+          </a:prstGeom>
+          <a:noFill/>
+        </p:spPr>
+        <p:txBody>
+          <a:bodyPr wrap="square">
+            <a:spAutoFit/>
+          </a:bodyPr>
+          <a:lstStyle/>
+          <a:p>
+            <a:r>
+              <a:rPr sz="1800" b="0">
+                <a:solidFill>
+                  <a:srgbClr val="4B5563"/>
+                </a:solidFill>
+              </a:rPr>
+              <a:t>Agencies (academies) choose the students who will use A.i next month and pay by card by the last day of this month. Only agency accounts pay — HQ staff should know this flow to answer questions. The 4-page guide to send to agencies is «🤖 A.i Content Payment Guide» in the library.</a:t>
+            </a:r>
+          </a:p>
+        </p:txBody>
+      </p:sp>
+    </p:spTree>
+  </p:cSld>
+  <p:clrMapOvr>
+    <a:masterClrMapping/>
+  </p:clrMapOvr>
+</p:sld>
+</file>
+
+<file path=ppt/slides/slide53.xml><?xml version="1.0" encoding="utf-8"?>
+<p:sld xmlns:a="http://schemas.openxmlformats.org/drawingml/2006/main" xmlns:p="http://schemas.openxmlformats.org/presentationml/2006/main" xmlns:r="http://schemas.openxmlformats.org/officeDocument/2006/relationships">
+  <p:cSld>
+    <p:spTree>
+      <p:nvGrpSpPr>
+        <p:cNvPr id="1" name=""/>
+        <p:cNvGrpSpPr/>
+        <p:nvPr/>
+      </p:nvGrpSpPr>
+      <p:grpSpPr/>
+      <p:sp>
+        <p:nvSpPr>
+          <p:cNvPr id="2" name="TextBox 1"/>
+          <p:cNvSpPr txBox="1"/>
+          <p:nvPr/>
+        </p:nvSpPr>
+        <p:spPr>
+          <a:xfrm>
+            <a:off x="365760" y="228600"/>
+            <a:ext cx="11430000" cy="640080"/>
+          </a:xfrm>
+          <a:prstGeom prst="rect">
+            <a:avLst/>
+          </a:prstGeom>
+          <a:noFill/>
+        </p:spPr>
+        <p:txBody>
+          <a:bodyPr wrap="square">
+            <a:spAutoFit/>
+          </a:bodyPr>
+          <a:lstStyle/>
+          <a:p>
+            <a:r>
+              <a:rPr sz="2200" b="1">
+                <a:solidFill>
+                  <a:srgbClr val="111827"/>
+                </a:solidFill>
+              </a:rPr>
+              <a:t>10. A.i content payment (agencies) — Agency login · open the menu</a:t>
+            </a:r>
+          </a:p>
+        </p:txBody>
+      </p:sp>
+      <p:pic>
+        <p:nvPicPr>
+          <p:cNvPr id="3" name="Picture 2" descr="en-p2-menu.jpg"/>
+          <p:cNvPicPr>
+            <a:picLocks noChangeAspect="1"/>
+          </p:cNvPicPr>
+          <p:nvPr/>
+        </p:nvPicPr>
+        <p:blipFill>
+          <a:blip r:embed="rId2"/>
+          <a:stretch>
+            <a:fillRect/>
+          </a:stretch>
+        </p:blipFill>
+        <p:spPr>
+          <a:xfrm>
+            <a:off x="320040" y="960120"/>
+            <a:ext cx="7223760" cy="2498540"/>
+          </a:xfrm>
+          <a:prstGeom prst="rect">
+            <a:avLst/>
+          </a:prstGeom>
+        </p:spPr>
+      </p:pic>
+      <p:sp>
+        <p:nvSpPr>
+          <p:cNvPr id="4" name="TextBox 3"/>
+          <p:cNvSpPr txBox="1"/>
+          <p:nvPr/>
+        </p:nvSpPr>
+        <p:spPr>
+          <a:xfrm>
+            <a:off x="7772400" y="960120"/>
+            <a:ext cx="4114800" cy="5669280"/>
+          </a:xfrm>
+          <a:prstGeom prst="rect">
+            <a:avLst/>
+          </a:prstGeom>
+          <a:noFill/>
+        </p:spPr>
+        <p:txBody>
+          <a:bodyPr wrap="square">
+            <a:spAutoFit/>
+          </a:bodyPr>
+          <a:lstStyle/>
+          <a:p>
+            <a:pPr>
+              <a:spcAft>
+                <a:spcPts val="600"/>
+              </a:spcAft>
+              <a:defRPr sz="1400"/>
+            </a:pPr>
+            <a:r>
+              <a:t>• An agency logs in at mangoi.ai/admin/login with its agency ID and gets the agency screen.</a:t>
+            </a:r>
+          </a:p>
+          <a:p>
+            <a:pPr>
+              <a:spcAft>
+                <a:spcPts val="600"/>
+              </a:spcAft>
+              <a:defRPr sz="1400"/>
+            </a:pPr>
+            <a:r>
+              <a:t>• ④ Left menu Settlement &amp; stats › 🤖 A.i content payment. This menu appears only for agency accounts (not for HQ or branch accounts).</a:t>
+            </a:r>
+          </a:p>
+          <a:p>
+            <a:pPr>
+              <a:spcAft>
+                <a:spcPts val="600"/>
+              </a:spcAft>
+              <a:defRPr sz="1400"/>
+            </a:pPr>
+            <a:r>
+              <a:t>• HQ uses Finance › 🏢 AI Usage Fee (A.i Learning Fee Management) to see each academy’s headcount and estimated invoice, set custom rates, and turn auto-billing on or off. There is no pay button there.</a:t>
+            </a:r>
+          </a:p>
+        </p:txBody>
+      </p:sp>
+    </p:spTree>
+  </p:cSld>
+  <p:clrMapOvr>
+    <a:masterClrMapping/>
+  </p:clrMapOvr>
+</p:sld>
+</file>
+
+<file path=ppt/slides/slide54.xml><?xml version="1.0" encoding="utf-8"?>
+<p:sld xmlns:a="http://schemas.openxmlformats.org/drawingml/2006/main" xmlns:p="http://schemas.openxmlformats.org/presentationml/2006/main" xmlns:r="http://schemas.openxmlformats.org/officeDocument/2006/relationships">
+  <p:cSld>
+    <p:spTree>
+      <p:nvGrpSpPr>
+        <p:cNvPr id="1" name=""/>
+        <p:cNvGrpSpPr/>
+        <p:nvPr/>
+      </p:nvGrpSpPr>
+      <p:grpSpPr/>
+      <p:sp>
+        <p:nvSpPr>
+          <p:cNvPr id="2" name="TextBox 1"/>
+          <p:cNvSpPr txBox="1"/>
+          <p:nvPr/>
+        </p:nvSpPr>
+        <p:spPr>
+          <a:xfrm>
+            <a:off x="365760" y="228600"/>
+            <a:ext cx="11430000" cy="640080"/>
+          </a:xfrm>
+          <a:prstGeom prst="rect">
+            <a:avLst/>
+          </a:prstGeom>
+          <a:noFill/>
+        </p:spPr>
+        <p:txBody>
+          <a:bodyPr wrap="square">
+            <a:spAutoFit/>
+          </a:bodyPr>
+          <a:lstStyle/>
+          <a:p>
+            <a:r>
+              <a:rPr sz="2200" b="1">
+                <a:solidFill>
+                  <a:srgbClr val="111827"/>
+                </a:solidFill>
+              </a:rPr>
+              <a:t>10. A.i content payment (agencies) — Load the student list</a:t>
+            </a:r>
+          </a:p>
+        </p:txBody>
+      </p:sp>
+      <p:pic>
+        <p:nvPicPr>
+          <p:cNvPr id="3" name="Picture 2" descr="en-p3-load.jpg"/>
+          <p:cNvPicPr>
+            <a:picLocks noChangeAspect="1"/>
+          </p:cNvPicPr>
+          <p:nvPr/>
+        </p:nvPicPr>
+        <p:blipFill>
+          <a:blip r:embed="rId2"/>
+          <a:stretch>
+            <a:fillRect/>
+          </a:stretch>
+        </p:blipFill>
+        <p:spPr>
+          <a:xfrm>
+            <a:off x="320040" y="960120"/>
+            <a:ext cx="7223760" cy="3982425"/>
+          </a:xfrm>
+          <a:prstGeom prst="rect">
+            <a:avLst/>
+          </a:prstGeom>
+        </p:spPr>
+      </p:pic>
+      <p:sp>
+        <p:nvSpPr>
+          <p:cNvPr id="4" name="TextBox 3"/>
+          <p:cNvSpPr txBox="1"/>
+          <p:nvPr/>
+        </p:nvSpPr>
+        <p:spPr>
+          <a:xfrm>
+            <a:off x="7772400" y="960120"/>
+            <a:ext cx="4114800" cy="5669280"/>
+          </a:xfrm>
+          <a:prstGeom prst="rect">
+            <a:avLst/>
+          </a:prstGeom>
+          <a:noFill/>
+        </p:spPr>
+        <p:txBody>
+          <a:bodyPr wrap="square">
+            <a:spAutoFit/>
+          </a:bodyPr>
+          <a:lstStyle/>
+          <a:p>
+            <a:pPr>
+              <a:spcAft>
+                <a:spcPts val="600"/>
+              </a:spcAft>
+              <a:defRPr sz="1400"/>
+            </a:pPr>
+            <a:r>
+              <a:t>• Check the due date at the top (last day of this month · D-days left). The payment is for next month.</a:t>
+            </a:r>
+          </a:p>
+          <a:p>
+            <a:pPr>
+              <a:spcAft>
+                <a:spcPts val="600"/>
+              </a:spcAft>
+              <a:defRPr sz="1400"/>
+            </a:pPr>
+            <a:r>
+              <a:t>• Counters: Signed up for A.i (to be paid) · Not signed up · Video class (included) — video-class students get A.i with their tuition and are not paid here.</a:t>
+            </a:r>
+          </a:p>
+          <a:p>
+            <a:pPr>
+              <a:spcAft>
+                <a:spcPts val="600"/>
+              </a:spcAft>
+              <a:defRPr sz="1400"/>
+            </a:pPr>
+            <a:r>
+              <a:t>• ⑤ Load my students and choose only loads the list. Nothing is paid at this point.</a:t>
+            </a:r>
+          </a:p>
+          <a:p>
+            <a:pPr>
+              <a:spcAft>
+                <a:spcPts val="600"/>
+              </a:spcAft>
+              <a:defRPr sz="1400"/>
+            </a:pPr>
+            <a:r>
+              <a:t>• If HQ has not turned on auto-billing yet, the agency only sees «Head office has not opened A.i content payment yet (test period)» — it is not broken.</a:t>
+            </a:r>
+          </a:p>
+        </p:txBody>
+      </p:sp>
+    </p:spTree>
+  </p:cSld>
+  <p:clrMapOvr>
+    <a:masterClrMapping/>
+  </p:clrMapOvr>
+</p:sld>
+</file>
+
+<file path=ppt/slides/slide55.xml><?xml version="1.0" encoding="utf-8"?>
+<p:sld xmlns:a="http://schemas.openxmlformats.org/drawingml/2006/main" xmlns:p="http://schemas.openxmlformats.org/presentationml/2006/main" xmlns:r="http://schemas.openxmlformats.org/officeDocument/2006/relationships">
+  <p:cSld>
+    <p:spTree>
+      <p:nvGrpSpPr>
+        <p:cNvPr id="1" name=""/>
+        <p:cNvGrpSpPr/>
+        <p:nvPr/>
+      </p:nvGrpSpPr>
+      <p:grpSpPr/>
+      <p:sp>
+        <p:nvSpPr>
+          <p:cNvPr id="2" name="TextBox 1"/>
+          <p:cNvSpPr txBox="1"/>
+          <p:nvPr/>
+        </p:nvSpPr>
+        <p:spPr>
+          <a:xfrm>
+            <a:off x="365760" y="228600"/>
+            <a:ext cx="11430000" cy="640080"/>
+          </a:xfrm>
+          <a:prstGeom prst="rect">
+            <a:avLst/>
+          </a:prstGeom>
+          <a:noFill/>
+        </p:spPr>
+        <p:txBody>
+          <a:bodyPr wrap="square">
+            <a:spAutoFit/>
+          </a:bodyPr>
+          <a:lstStyle/>
+          <a:p>
+            <a:r>
+              <a:rPr sz="2200" b="1">
+                <a:solidFill>
+                  <a:srgbClr val="111827"/>
+                </a:solidFill>
+              </a:rPr>
+              <a:t>10. A.i content payment (agencies) — Choose next month’s students</a:t>
+            </a:r>
+          </a:p>
+        </p:txBody>
+      </p:sp>
+      <p:pic>
+        <p:nvPicPr>
+          <p:cNvPr id="3" name="Picture 2" descr="en-p4-check.jpg"/>
+          <p:cNvPicPr>
+            <a:picLocks noChangeAspect="1"/>
+          </p:cNvPicPr>
+          <p:nvPr/>
+        </p:nvPicPr>
+        <p:blipFill>
+          <a:blip r:embed="rId2"/>
+          <a:stretch>
+            <a:fillRect/>
+          </a:stretch>
+        </p:blipFill>
+        <p:spPr>
+          <a:xfrm>
+            <a:off x="320040" y="960120"/>
+            <a:ext cx="7223760" cy="3284926"/>
+          </a:xfrm>
+          <a:prstGeom prst="rect">
+            <a:avLst/>
+          </a:prstGeom>
+        </p:spPr>
+      </p:pic>
+      <p:sp>
+        <p:nvSpPr>
+          <p:cNvPr id="4" name="TextBox 3"/>
+          <p:cNvSpPr txBox="1"/>
+          <p:nvPr/>
+        </p:nvSpPr>
+        <p:spPr>
+          <a:xfrm>
+            <a:off x="7772400" y="960120"/>
+            <a:ext cx="4114800" cy="5669280"/>
+          </a:xfrm>
+          <a:prstGeom prst="rect">
+            <a:avLst/>
+          </a:prstGeom>
+          <a:noFill/>
+        </p:spPr>
+        <p:txBody>
+          <a:bodyPr wrap="square">
+            <a:spAutoFit/>
+          </a:bodyPr>
+          <a:lstStyle/>
+          <a:p>
+            <a:pPr>
+              <a:spcAft>
+                <a:spcPts val="600"/>
+              </a:spcAft>
+              <a:defRPr sz="1400"/>
+            </a:pPr>
+            <a:r>
+              <a:t>• ⑥ Only students checked under Paying for A.i content are paid. Unchecking a student who left removes them before payment.</a:t>
+            </a:r>
+          </a:p>
+          <a:p>
+            <a:pPr>
+              <a:spcAft>
+                <a:spcPts val="600"/>
+              </a:spcAft>
+              <a:defRPr sz="1400"/>
+            </a:pPr>
+            <a:r>
+              <a:t>• Search by name or ID; Unselect all shown / Select all shown changes many at once (it asks how many first).</a:t>
+            </a:r>
+          </a:p>
+          <a:p>
+            <a:pPr>
+              <a:spcAft>
+                <a:spcPts val="600"/>
+              </a:spcAft>
+              <a:defRPr sz="1400"/>
+            </a:pPr>
+            <a:r>
+              <a:t>• The server recalculates the amount every time a check changes.</a:t>
+            </a:r>
+          </a:p>
+        </p:txBody>
+      </p:sp>
+    </p:spTree>
+  </p:cSld>
+  <p:clrMapOvr>
+    <a:masterClrMapping/>
+  </p:clrMapOvr>
+</p:sld>
+</file>
+
+<file path=ppt/slides/slide56.xml><?xml version="1.0" encoding="utf-8"?>
+<p:sld xmlns:a="http://schemas.openxmlformats.org/drawingml/2006/main" xmlns:p="http://schemas.openxmlformats.org/presentationml/2006/main" xmlns:r="http://schemas.openxmlformats.org/officeDocument/2006/relationships">
+  <p:cSld>
+    <p:spTree>
+      <p:nvGrpSpPr>
+        <p:cNvPr id="1" name=""/>
+        <p:cNvGrpSpPr/>
+        <p:nvPr/>
+      </p:nvGrpSpPr>
+      <p:grpSpPr/>
+      <p:sp>
+        <p:nvSpPr>
+          <p:cNvPr id="2" name="TextBox 1"/>
+          <p:cNvSpPr txBox="1"/>
+          <p:nvPr/>
+        </p:nvSpPr>
+        <p:spPr>
+          <a:xfrm>
+            <a:off x="365760" y="228600"/>
+            <a:ext cx="11430000" cy="640080"/>
+          </a:xfrm>
+          <a:prstGeom prst="rect">
+            <a:avLst/>
+          </a:prstGeom>
+          <a:noFill/>
+        </p:spPr>
+        <p:txBody>
+          <a:bodyPr wrap="square">
+            <a:spAutoFit/>
+          </a:bodyPr>
+          <a:lstStyle/>
+          <a:p>
+            <a:r>
+              <a:rPr sz="2200" b="1">
+                <a:solidFill>
+                  <a:srgbClr val="111827"/>
+                </a:solidFill>
+              </a:rPr>
+              <a:t>10. A.i content payment (agencies) — Not signed up · video-class students</a:t>
+            </a:r>
+          </a:p>
+        </p:txBody>
+      </p:sp>
+      <p:pic>
+        <p:nvPicPr>
+          <p:cNvPr id="3" name="Picture 2" descr="en-p4-notyet.jpg"/>
+          <p:cNvPicPr>
+            <a:picLocks noChangeAspect="1"/>
+          </p:cNvPicPr>
+          <p:nvPr/>
+        </p:nvPicPr>
+        <p:blipFill>
+          <a:blip r:embed="rId2"/>
+          <a:stretch>
+            <a:fillRect/>
+          </a:stretch>
+        </p:blipFill>
+        <p:spPr>
+          <a:xfrm>
+            <a:off x="320040" y="960120"/>
+            <a:ext cx="7223760" cy="1845987"/>
+          </a:xfrm>
+          <a:prstGeom prst="rect">
+            <a:avLst/>
+          </a:prstGeom>
+        </p:spPr>
+      </p:pic>
+      <p:sp>
+        <p:nvSpPr>
+          <p:cNvPr id="4" name="TextBox 3"/>
+          <p:cNvSpPr txBox="1"/>
+          <p:nvPr/>
+        </p:nvSpPr>
+        <p:spPr>
+          <a:xfrm>
+            <a:off x="7772400" y="960120"/>
+            <a:ext cx="4114799" cy="5669280"/>
+          </a:xfrm>
+          <a:prstGeom prst="rect">
+            <a:avLst/>
+          </a:prstGeom>
+          <a:noFill/>
+        </p:spPr>
+        <p:txBody>
+          <a:bodyPr wrap="square">
+            <a:spAutoFit/>
+          </a:bodyPr>
+          <a:lstStyle/>
+          <a:p>
+            <a:pPr>
+              <a:spcAft>
+                <a:spcPts val="600"/>
+              </a:spcAft>
+              <a:defRPr sz="1400"/>
+            </a:pPr>
+            <a:r>
+              <a:t>• ⑦ Checking a student under Not signed up adds them to the payment.</a:t>
+            </a:r>
+          </a:p>
+          <a:p>
+            <a:pPr>
+              <a:spcAft>
+                <a:spcPts val="600"/>
+              </a:spcAft>
+              <a:defRPr sz="1400"/>
+            </a:pPr>
+            <a:r>
+              <a:t>• 📹 Video-class students are folded away. A.i is included in their tuition, so they are not chosen — check one only if the classification is wrong.</a:t>
+            </a:r>
+          </a:p>
+          <a:p>
+            <a:pPr>
+              <a:spcAft>
+                <a:spcPts val="600"/>
+              </a:spcAft>
+              <a:defRPr sz="1400"/>
+            </a:pPr>
+            <a:r>
+              <a:t>• Students the academy changed get a «✔ confirmed by academy» tag, and automatic classification no longer changes them.</a:t>
+            </a:r>
+          </a:p>
+        </p:txBody>
+      </p:sp>
+    </p:spTree>
+  </p:cSld>
+  <p:clrMapOvr>
+    <a:masterClrMapping/>
+  </p:clrMapOvr>
+</p:sld>
+</file>
+
+<file path=ppt/slides/slide57.xml><?xml version="1.0" encoding="utf-8"?>
+<p:sld xmlns:a="http://schemas.openxmlformats.org/drawingml/2006/main" xmlns:p="http://schemas.openxmlformats.org/presentationml/2006/main" xmlns:r="http://schemas.openxmlformats.org/officeDocument/2006/relationships">
+  <p:cSld>
+    <p:spTree>
+      <p:nvGrpSpPr>
+        <p:cNvPr id="1" name=""/>
+        <p:cNvGrpSpPr/>
+        <p:nvPr/>
+      </p:nvGrpSpPr>
+      <p:grpSpPr/>
+      <p:sp>
+        <p:nvSpPr>
+          <p:cNvPr id="2" name="TextBox 1"/>
+          <p:cNvSpPr txBox="1"/>
+          <p:nvPr/>
+        </p:nvSpPr>
+        <p:spPr>
+          <a:xfrm>
+            <a:off x="365760" y="228600"/>
+            <a:ext cx="11430000" cy="640080"/>
+          </a:xfrm>
+          <a:prstGeom prst="rect">
+            <a:avLst/>
+          </a:prstGeom>
+          <a:noFill/>
+        </p:spPr>
+        <p:txBody>
+          <a:bodyPr wrap="square">
+            <a:spAutoFit/>
+          </a:bodyPr>
+          <a:lstStyle/>
+          <a:p>
+            <a:r>
+              <a:rPr sz="2200" b="1">
+                <a:solidFill>
+                  <a:srgbClr val="111827"/>
+                </a:solidFill>
+              </a:rPr>
+              <a:t>10. A.i content payment (agencies) — Check the amount · pay by card</a:t>
+            </a:r>
+          </a:p>
+        </p:txBody>
+      </p:sp>
+      <p:pic>
+        <p:nvPicPr>
+          <p:cNvPr id="3" name="Picture 2" descr="en-p5-pay.jpg"/>
+          <p:cNvPicPr>
+            <a:picLocks noChangeAspect="1"/>
+          </p:cNvPicPr>
+          <p:nvPr/>
+        </p:nvPicPr>
+        <p:blipFill>
+          <a:blip r:embed="rId2"/>
+          <a:stretch>
+            <a:fillRect/>
+          </a:stretch>
+        </p:blipFill>
+        <p:spPr>
+          <a:xfrm>
+            <a:off x="320040" y="960120"/>
+            <a:ext cx="7223760" cy="3209724"/>
+          </a:xfrm>
+          <a:prstGeom prst="rect">
+            <a:avLst/>
+          </a:prstGeom>
+        </p:spPr>
+      </p:pic>
+      <p:sp>
+        <p:nvSpPr>
+          <p:cNvPr id="4" name="TextBox 3"/>
+          <p:cNvSpPr txBox="1"/>
+          <p:nvPr/>
+        </p:nvSpPr>
+        <p:spPr>
+          <a:xfrm>
+            <a:off x="7772400" y="960120"/>
+            <a:ext cx="4114800" cy="5669280"/>
+          </a:xfrm>
+          <a:prstGeom prst="rect">
+            <a:avLst/>
+          </a:prstGeom>
+          <a:noFill/>
+        </p:spPr>
+        <p:txBody>
+          <a:bodyPr wrap="square">
+            <a:spAutoFit/>
+          </a:bodyPr>
+          <a:lstStyle/>
+          <a:p>
+            <a:pPr>
+              <a:spcAft>
+                <a:spcPts val="600"/>
+              </a:spcAft>
+              <a:defRPr sz="1400"/>
+            </a:pPr>
+            <a:r>
+              <a:t>• ⑧ Check the number of students and the total, then ⑨ Pay OOO KRW → confirm → pay in the Toss card window.</a:t>
+            </a:r>
+          </a:p>
+          <a:p>
+            <a:pPr>
+              <a:spcAft>
+                <a:spcPts val="600"/>
+              </a:spcAft>
+              <a:defRPr sz="1400"/>
+            </a:pPr>
+            <a:r>
+              <a:t>• Price per student per month: 20 or fewer 7,500 · 21–50 6,500 · 51–70 5,500 · 71 or more 4,500 KRW. No minimum charge (since 2026-10-26).</a:t>
+            </a:r>
+          </a:p>
+          <a:p>
+            <a:pPr>
+              <a:spcAft>
+                <a:spcPts val="600"/>
+              </a:spcAft>
+              <a:defRPr sz="1400"/>
+            </a:pPr>
+            <a:r>
+              <a:t>• The total never goes down as students are added (e.g. 21–23 students = 150,000 KRW). The server recalculates the amount at the moment of payment — the screen number is for display. Academies with an HQ custom rate pay that rate × students.</a:t>
+            </a:r>
+          </a:p>
+          <a:p>
+            <a:pPr>
+              <a:spcAft>
+                <a:spcPts val="600"/>
+              </a:spcAft>
+              <a:defRPr sz="1400"/>
+            </a:pPr>
+            <a:r>
+              <a:t>• The demo account (testagency) does not open the payment window (sample data).</a:t>
+            </a:r>
+          </a:p>
+        </p:txBody>
+      </p:sp>
+    </p:spTree>
+  </p:cSld>
+  <p:clrMapOvr>
+    <a:masterClrMapping/>
+  </p:clrMapOvr>
+</p:sld>
+</file>
+
+<file path=ppt/slides/slide58.xml><?xml version="1.0" encoding="utf-8"?>
+<p:sld xmlns:a="http://schemas.openxmlformats.org/drawingml/2006/main" xmlns:p="http://schemas.openxmlformats.org/presentationml/2006/main" xmlns:r="http://schemas.openxmlformats.org/officeDocument/2006/relationships">
+  <p:cSld>
+    <p:spTree>
+      <p:nvGrpSpPr>
+        <p:cNvPr id="1" name=""/>
+        <p:cNvGrpSpPr/>
+        <p:nvPr/>
+      </p:nvGrpSpPr>
+      <p:grpSpPr/>
+      <p:sp>
+        <p:nvSpPr>
+          <p:cNvPr id="2" name="TextBox 1"/>
+          <p:cNvSpPr txBox="1"/>
+          <p:nvPr/>
+        </p:nvSpPr>
+        <p:spPr>
+          <a:xfrm>
+            <a:off x="365760" y="228600"/>
+            <a:ext cx="11430000" cy="640080"/>
+          </a:xfrm>
+          <a:prstGeom prst="rect">
+            <a:avLst/>
+          </a:prstGeom>
+          <a:noFill/>
+        </p:spPr>
+        <p:txBody>
+          <a:bodyPr wrap="square">
+            <a:spAutoFit/>
+          </a:bodyPr>
+          <a:lstStyle/>
+          <a:p>
+            <a:r>
+              <a:rPr sz="2200" b="1">
+                <a:solidFill>
+                  <a:srgbClr val="111827"/>
+                </a:solidFill>
+              </a:rPr>
+              <a:t>10. A.i content payment (agencies) — Check the payment · extra payment</a:t>
+            </a:r>
+          </a:p>
+        </p:txBody>
+      </p:sp>
+      <p:pic>
+        <p:nvPicPr>
+          <p:cNvPr id="3" name="Picture 2" descr="en-p6-done.jpg"/>
+          <p:cNvPicPr>
+            <a:picLocks noChangeAspect="1"/>
+          </p:cNvPicPr>
+          <p:nvPr/>
+        </p:nvPicPr>
+        <p:blipFill>
+          <a:blip r:embed="rId2"/>
+          <a:stretch>
+            <a:fillRect/>
+          </a:stretch>
+        </p:blipFill>
+        <p:spPr>
+          <a:xfrm>
+            <a:off x="320040" y="960120"/>
+            <a:ext cx="7223760" cy="1011477"/>
+          </a:xfrm>
+          <a:prstGeom prst="rect">
+            <a:avLst/>
+          </a:prstGeom>
+        </p:spPr>
+      </p:pic>
+      <p:sp>
+        <p:nvSpPr>
+          <p:cNvPr id="4" name="TextBox 3"/>
+          <p:cNvSpPr txBox="1"/>
+          <p:nvPr/>
+        </p:nvSpPr>
+        <p:spPr>
+          <a:xfrm>
+            <a:off x="7772400" y="960120"/>
+            <a:ext cx="4114800" cy="5669280"/>
+          </a:xfrm>
+          <a:prstGeom prst="rect">
+            <a:avLst/>
+          </a:prstGeom>
+          <a:noFill/>
+        </p:spPr>
+        <p:txBody>
+          <a:bodyPr wrap="square">
+            <a:spAutoFit/>
+          </a:bodyPr>
+          <a:lstStyle/>
+          <a:p>
+            <a:pPr>
+              <a:spcAft>
+                <a:spcPts val="600"/>
+              </a:spcAft>
+              <a:defRPr sz="1400"/>
+            </a:pPr>
+            <a:r>
+              <a:t>• ⑩ A ✅ under Past payments means paid. After paying, «Paid» appears and paid students are pinned at the top.</a:t>
+            </a:r>
+          </a:p>
+          <a:p>
+            <a:pPr>
+              <a:spcAft>
+                <a:spcPts val="600"/>
+              </a:spcAft>
+              <a:defRPr sz="1400"/>
+            </a:pPr>
+            <a:r>
+              <a:t>• To add students in the same month, check them below and press Pay extra — only the added students are charged.</a:t>
+            </a:r>
+          </a:p>
+          <a:p>
+            <a:pPr>
+              <a:spcAft>
+                <a:spcPts val="600"/>
+              </a:spcAft>
+              <a:defRPr sz="1400"/>
+            </a:pPr>
+            <a:r>
+              <a:t>• Students already paid for cannot be removed or changed on the screen. HQ handles refunds.</a:t>
+            </a:r>
+          </a:p>
+          <a:p>
+            <a:pPr>
+              <a:spcAft>
+                <a:spcPts val="600"/>
+              </a:spcAft>
+              <a:defRPr sz="1400"/>
+            </a:pPr>
+            <a:r>
+              <a:t>• If an earlier month is unpaid, a «⚠️ Unpaid A.i content invoice(s)» button appears at the top.</a:t>
             </a:r>
           </a:p>
         </p:txBody>
